--- a/LIVING-SICCS.pptx
+++ b/LIVING-SICCS.pptx
@@ -5,7 +5,7 @@
     <p:sldMasterId id="2147483739" r:id="rId1"/>
   </p:sldMasterIdLst>
   <p:notesMasterIdLst>
-    <p:notesMasterId r:id="rId9"/>
+    <p:notesMasterId r:id="rId10"/>
   </p:notesMasterIdLst>
   <p:sldIdLst>
     <p:sldId id="256" r:id="rId2"/>
@@ -14,7 +14,8 @@
     <p:sldId id="259" r:id="rId5"/>
     <p:sldId id="260" r:id="rId6"/>
     <p:sldId id="261" r:id="rId7"/>
-    <p:sldId id="262" r:id="rId8"/>
+    <p:sldId id="263" r:id="rId8"/>
+    <p:sldId id="262" r:id="rId9"/>
   </p:sldIdLst>
   <p:sldSz cx="12192000" cy="6858000"/>
   <p:notesSz cx="6858000" cy="9144000"/>
@@ -113,6 +114,11 @@
       </a:defRPr>
     </a:lvl9pPr>
   </p:defaultTextStyle>
+  <p:extLst>
+    <p:ext uri="{EFAFB233-063F-42B5-8137-9DF3F51BA10A}">
+      <p15:sldGuideLst xmlns:p15="http://schemas.microsoft.com/office/powerpoint/2012/main"/>
+    </p:ext>
+  </p:extLst>
 </p:presentation>
 </file>
 
@@ -198,7 +204,7 @@
           <a:p>
             <a:fld id="{8231C51D-D7C2-44A5-85D3-69E93A6C6FFA}" type="datetimeFigureOut">
               <a:rPr lang="en-NL" smtClean="0"/>
-              <a:t>16/06/2026</a:t>
+              <a:t>17/06/2026</a:t>
             </a:fld>
             <a:endParaRPr lang="en-NL"/>
           </a:p>
@@ -697,7 +703,7 @@
           <a:p>
             <a:fld id="{82EDB8D0-98ED-4B86-9D5F-E61ADC70144D}" type="datetimeFigureOut">
               <a:rPr lang="en-US" smtClean="0"/>
-              <a:t>6/16/2026</a:t>
+              <a:t>6/17/2026</a:t>
             </a:fld>
             <a:endParaRPr lang="en-US" dirty="0"/>
           </a:p>
@@ -1112,7 +1118,7 @@
           <a:p>
             <a:fld id="{82EDB8D0-98ED-4B86-9D5F-E61ADC70144D}" type="datetimeFigureOut">
               <a:rPr lang="en-US" smtClean="0"/>
-              <a:t>6/16/2026</a:t>
+              <a:t>6/17/2026</a:t>
             </a:fld>
             <a:endParaRPr lang="en-US"/>
           </a:p>
@@ -1604,7 +1610,7 @@
           <a:p>
             <a:fld id="{82EDB8D0-98ED-4B86-9D5F-E61ADC70144D}" type="datetimeFigureOut">
               <a:rPr lang="en-US" smtClean="0"/>
-              <a:t>6/16/2026</a:t>
+              <a:t>6/17/2026</a:t>
             </a:fld>
             <a:endParaRPr lang="en-US"/>
           </a:p>
@@ -2091,7 +2097,7 @@
           <a:p>
             <a:fld id="{82EDB8D0-98ED-4B86-9D5F-E61ADC70144D}" type="datetimeFigureOut">
               <a:rPr lang="en-US" smtClean="0"/>
-              <a:t>6/16/2026</a:t>
+              <a:t>6/17/2026</a:t>
             </a:fld>
             <a:endParaRPr lang="en-US" dirty="0"/>
           </a:p>
@@ -2860,7 +2866,7 @@
           <a:p>
             <a:fld id="{82EDB8D0-98ED-4B86-9D5F-E61ADC70144D}" type="datetimeFigureOut">
               <a:rPr lang="en-US" smtClean="0"/>
-              <a:t>6/16/2026</a:t>
+              <a:t>6/17/2026</a:t>
             </a:fld>
             <a:endParaRPr lang="en-US"/>
           </a:p>
@@ -3342,7 +3348,7 @@
           <a:p>
             <a:fld id="{82EDB8D0-98ED-4B86-9D5F-E61ADC70144D}" type="datetimeFigureOut">
               <a:rPr lang="en-US" smtClean="0"/>
-              <a:t>6/16/2026</a:t>
+              <a:t>6/17/2026</a:t>
             </a:fld>
             <a:endParaRPr lang="en-US"/>
           </a:p>
@@ -4038,7 +4044,7 @@
           <a:p>
             <a:fld id="{82EDB8D0-98ED-4B86-9D5F-E61ADC70144D}" type="datetimeFigureOut">
               <a:rPr lang="en-US" smtClean="0"/>
-              <a:t>6/16/2026</a:t>
+              <a:t>6/17/2026</a:t>
             </a:fld>
             <a:endParaRPr lang="en-US"/>
           </a:p>
@@ -4463,7 +4469,7 @@
           <a:p>
             <a:fld id="{82EDB8D0-98ED-4B86-9D5F-E61ADC70144D}" type="datetimeFigureOut">
               <a:rPr lang="en-US" smtClean="0"/>
-              <a:t>6/16/2026</a:t>
+              <a:t>6/17/2026</a:t>
             </a:fld>
             <a:endParaRPr lang="en-US"/>
           </a:p>
@@ -4860,7 +4866,7 @@
           <a:p>
             <a:fld id="{82EDB8D0-98ED-4B86-9D5F-E61ADC70144D}" type="datetimeFigureOut">
               <a:rPr lang="en-US" smtClean="0"/>
-              <a:t>6/16/2026</a:t>
+              <a:t>6/17/2026</a:t>
             </a:fld>
             <a:endParaRPr lang="en-US"/>
           </a:p>
@@ -5455,7 +5461,7 @@
           <a:p>
             <a:fld id="{82EDB8D0-98ED-4B86-9D5F-E61ADC70144D}" type="datetimeFigureOut">
               <a:rPr lang="en-US" smtClean="0"/>
-              <a:t>6/16/2026</a:t>
+              <a:t>6/17/2026</a:t>
             </a:fld>
             <a:endParaRPr lang="en-US"/>
           </a:p>
@@ -6030,7 +6036,7 @@
           <a:p>
             <a:fld id="{82EDB8D0-98ED-4B86-9D5F-E61ADC70144D}" type="datetimeFigureOut">
               <a:rPr lang="en-US" smtClean="0"/>
-              <a:t>6/16/2026</a:t>
+              <a:t>6/17/2026</a:t>
             </a:fld>
             <a:endParaRPr lang="en-US"/>
           </a:p>
@@ -6557,7 +6563,7 @@
             <a:fld id="{82EDB8D0-98ED-4B86-9D5F-E61ADC70144D}" type="datetimeFigureOut">
               <a:rPr lang="en-US" smtClean="0"/>
               <a:pPr/>
-              <a:t>6/16/2026</a:t>
+              <a:t>6/17/2026</a:t>
             </a:fld>
             <a:endParaRPr lang="en-US" dirty="0"/>
           </a:p>
@@ -8464,6 +8470,106 @@
 </file>
 
 <file path=ppt/slides/slide7.xml><?xml version="1.0" encoding="utf-8"?>
+<p:sld xmlns:a="http://schemas.openxmlformats.org/drawingml/2006/main" xmlns:r="http://schemas.openxmlformats.org/officeDocument/2006/relationships" xmlns:p="http://schemas.openxmlformats.org/presentationml/2006/main">
+  <p:cSld>
+    <p:spTree>
+      <p:nvGrpSpPr>
+        <p:cNvPr id="1" name="">
+          <a:extLst>
+            <a:ext uri="{FF2B5EF4-FFF2-40B4-BE49-F238E27FC236}">
+              <a16:creationId xmlns:a16="http://schemas.microsoft.com/office/drawing/2014/main" id="{1392FCA9-9934-597E-3E85-F91240B2A565}"/>
+            </a:ext>
+          </a:extLst>
+        </p:cNvPr>
+        <p:cNvGrpSpPr/>
+        <p:nvPr/>
+      </p:nvGrpSpPr>
+      <p:grpSpPr>
+        <a:xfrm>
+          <a:off x="0" y="0"/>
+          <a:ext cx="0" cy="0"/>
+          <a:chOff x="0" y="0"/>
+          <a:chExt cx="0" cy="0"/>
+        </a:xfrm>
+      </p:grpSpPr>
+      <p:sp>
+        <p:nvSpPr>
+          <p:cNvPr id="2" name="Title 1">
+            <a:extLst>
+              <a:ext uri="{FF2B5EF4-FFF2-40B4-BE49-F238E27FC236}">
+                <a16:creationId xmlns:a16="http://schemas.microsoft.com/office/drawing/2014/main" id="{DB638A7B-FADD-2A50-6E5A-A5F74D16E501}"/>
+              </a:ext>
+            </a:extLst>
+          </p:cNvPr>
+          <p:cNvSpPr>
+            <a:spLocks noGrp="1"/>
+          </p:cNvSpPr>
+          <p:nvPr>
+            <p:ph type="title"/>
+          </p:nvPr>
+        </p:nvSpPr>
+        <p:spPr/>
+        <p:txBody>
+          <a:bodyPr>
+            <a:normAutofit/>
+          </a:bodyPr>
+          <a:lstStyle/>
+          <a:p>
+            <a:r>
+              <a:rPr lang="en-US" sz="4000" b="1" dirty="0">
+                <a:latin typeface="Aptos" panose="020B0004020202020204" pitchFamily="34" charset="0"/>
+              </a:rPr>
+              <a:t>REPRODUCIBILITY</a:t>
+            </a:r>
+            <a:endParaRPr lang="en-NL" sz="4000" b="1" dirty="0">
+              <a:latin typeface="Aptos" panose="020B0004020202020204" pitchFamily="34" charset="0"/>
+            </a:endParaRPr>
+          </a:p>
+        </p:txBody>
+      </p:sp>
+      <p:sp>
+        <p:nvSpPr>
+          <p:cNvPr id="3" name="Content Placeholder 2">
+            <a:extLst>
+              <a:ext uri="{FF2B5EF4-FFF2-40B4-BE49-F238E27FC236}">
+                <a16:creationId xmlns:a16="http://schemas.microsoft.com/office/drawing/2014/main" id="{C7F2E767-F405-E9C2-5F6D-C2E221D903CF}"/>
+              </a:ext>
+            </a:extLst>
+          </p:cNvPr>
+          <p:cNvSpPr>
+            <a:spLocks noGrp="1"/>
+          </p:cNvSpPr>
+          <p:nvPr>
+            <p:ph idx="1"/>
+          </p:nvPr>
+        </p:nvSpPr>
+        <p:spPr/>
+        <p:txBody>
+          <a:bodyPr/>
+          <a:lstStyle/>
+          <a:p>
+            <a:r>
+              <a:rPr lang="en-US" dirty="0"/>
+              <a:t>MAYBE OVERVIEW OF THE FAIR PRINCIPLES THAT WE FOLLOWED</a:t>
+            </a:r>
+            <a:endParaRPr lang="en-NL" dirty="0"/>
+          </a:p>
+        </p:txBody>
+      </p:sp>
+    </p:spTree>
+    <p:extLst>
+      <p:ext uri="{BB962C8B-B14F-4D97-AF65-F5344CB8AC3E}">
+        <p14:creationId xmlns:p14="http://schemas.microsoft.com/office/powerpoint/2010/main" val="2131163159"/>
+      </p:ext>
+    </p:extLst>
+  </p:cSld>
+  <p:clrMapOvr>
+    <a:masterClrMapping/>
+  </p:clrMapOvr>
+</p:sld>
+</file>
+
+<file path=ppt/slides/slide8.xml><?xml version="1.0" encoding="utf-8"?>
 <p:sld xmlns:a="http://schemas.openxmlformats.org/drawingml/2006/main" xmlns:r="http://schemas.openxmlformats.org/officeDocument/2006/relationships" xmlns:p="http://schemas.openxmlformats.org/presentationml/2006/main">
   <p:cSld>
     <p:spTree>

--- a/LIVING-SICCS.pptx
+++ b/LIVING-SICCS.pptx
@@ -10,11 +10,11 @@
   <p:sldIdLst>
     <p:sldId id="256" r:id="rId2"/>
     <p:sldId id="257" r:id="rId3"/>
-    <p:sldId id="258" r:id="rId4"/>
-    <p:sldId id="259" r:id="rId5"/>
-    <p:sldId id="260" r:id="rId6"/>
-    <p:sldId id="261" r:id="rId7"/>
-    <p:sldId id="263" r:id="rId8"/>
+    <p:sldId id="263" r:id="rId4"/>
+    <p:sldId id="258" r:id="rId5"/>
+    <p:sldId id="259" r:id="rId6"/>
+    <p:sldId id="260" r:id="rId7"/>
+    <p:sldId id="261" r:id="rId8"/>
     <p:sldId id="262" r:id="rId9"/>
   </p:sldIdLst>
   <p:sldSz cx="12192000" cy="6858000"/>
@@ -204,7 +204,7 @@
           <a:p>
             <a:fld id="{8231C51D-D7C2-44A5-85D3-69E93A6C6FFA}" type="datetimeFigureOut">
               <a:rPr lang="en-NL" smtClean="0"/>
-              <a:t>17/06/2026</a:t>
+              <a:t>6/18/26</a:t>
             </a:fld>
             <a:endParaRPr lang="en-NL"/>
           </a:p>
@@ -537,7 +537,7 @@
           <a:p>
             <a:fld id="{2B9B7CD5-E554-4EF4-BDFC-2343191D4CFE}" type="slidenum">
               <a:rPr lang="en-NL" smtClean="0"/>
-              <a:t>3</a:t>
+              <a:t>4</a:t>
             </a:fld>
             <a:endParaRPr lang="en-NL"/>
           </a:p>
@@ -703,7 +703,7 @@
           <a:p>
             <a:fld id="{82EDB8D0-98ED-4B86-9D5F-E61ADC70144D}" type="datetimeFigureOut">
               <a:rPr lang="en-US" smtClean="0"/>
-              <a:t>6/17/2026</a:t>
+              <a:t>6/18/26</a:t>
             </a:fld>
             <a:endParaRPr lang="en-US" dirty="0"/>
           </a:p>
@@ -1118,7 +1118,7 @@
           <a:p>
             <a:fld id="{82EDB8D0-98ED-4B86-9D5F-E61ADC70144D}" type="datetimeFigureOut">
               <a:rPr lang="en-US" smtClean="0"/>
-              <a:t>6/17/2026</a:t>
+              <a:t>6/18/26</a:t>
             </a:fld>
             <a:endParaRPr lang="en-US"/>
           </a:p>
@@ -1610,7 +1610,7 @@
           <a:p>
             <a:fld id="{82EDB8D0-98ED-4B86-9D5F-E61ADC70144D}" type="datetimeFigureOut">
               <a:rPr lang="en-US" smtClean="0"/>
-              <a:t>6/17/2026</a:t>
+              <a:t>6/18/26</a:t>
             </a:fld>
             <a:endParaRPr lang="en-US"/>
           </a:p>
@@ -2097,7 +2097,7 @@
           <a:p>
             <a:fld id="{82EDB8D0-98ED-4B86-9D5F-E61ADC70144D}" type="datetimeFigureOut">
               <a:rPr lang="en-US" smtClean="0"/>
-              <a:t>6/17/2026</a:t>
+              <a:t>6/18/26</a:t>
             </a:fld>
             <a:endParaRPr lang="en-US" dirty="0"/>
           </a:p>
@@ -2866,7 +2866,7 @@
           <a:p>
             <a:fld id="{82EDB8D0-98ED-4B86-9D5F-E61ADC70144D}" type="datetimeFigureOut">
               <a:rPr lang="en-US" smtClean="0"/>
-              <a:t>6/17/2026</a:t>
+              <a:t>6/18/26</a:t>
             </a:fld>
             <a:endParaRPr lang="en-US"/>
           </a:p>
@@ -3348,7 +3348,7 @@
           <a:p>
             <a:fld id="{82EDB8D0-98ED-4B86-9D5F-E61ADC70144D}" type="datetimeFigureOut">
               <a:rPr lang="en-US" smtClean="0"/>
-              <a:t>6/17/2026</a:t>
+              <a:t>6/18/26</a:t>
             </a:fld>
             <a:endParaRPr lang="en-US"/>
           </a:p>
@@ -4044,7 +4044,7 @@
           <a:p>
             <a:fld id="{82EDB8D0-98ED-4B86-9D5F-E61ADC70144D}" type="datetimeFigureOut">
               <a:rPr lang="en-US" smtClean="0"/>
-              <a:t>6/17/2026</a:t>
+              <a:t>6/18/26</a:t>
             </a:fld>
             <a:endParaRPr lang="en-US"/>
           </a:p>
@@ -4469,7 +4469,7 @@
           <a:p>
             <a:fld id="{82EDB8D0-98ED-4B86-9D5F-E61ADC70144D}" type="datetimeFigureOut">
               <a:rPr lang="en-US" smtClean="0"/>
-              <a:t>6/17/2026</a:t>
+              <a:t>6/18/26</a:t>
             </a:fld>
             <a:endParaRPr lang="en-US"/>
           </a:p>
@@ -4866,7 +4866,7 @@
           <a:p>
             <a:fld id="{82EDB8D0-98ED-4B86-9D5F-E61ADC70144D}" type="datetimeFigureOut">
               <a:rPr lang="en-US" smtClean="0"/>
-              <a:t>6/17/2026</a:t>
+              <a:t>6/18/26</a:t>
             </a:fld>
             <a:endParaRPr lang="en-US"/>
           </a:p>
@@ -5461,7 +5461,7 @@
           <a:p>
             <a:fld id="{82EDB8D0-98ED-4B86-9D5F-E61ADC70144D}" type="datetimeFigureOut">
               <a:rPr lang="en-US" smtClean="0"/>
-              <a:t>6/17/2026</a:t>
+              <a:t>6/18/26</a:t>
             </a:fld>
             <a:endParaRPr lang="en-US"/>
           </a:p>
@@ -6036,7 +6036,7 @@
           <a:p>
             <a:fld id="{82EDB8D0-98ED-4B86-9D5F-E61ADC70144D}" type="datetimeFigureOut">
               <a:rPr lang="en-US" smtClean="0"/>
-              <a:t>6/17/2026</a:t>
+              <a:t>6/18/26</a:t>
             </a:fld>
             <a:endParaRPr lang="en-US"/>
           </a:p>
@@ -6563,7 +6563,7 @@
             <a:fld id="{82EDB8D0-98ED-4B86-9D5F-E61ADC70144D}" type="datetimeFigureOut">
               <a:rPr lang="en-US" smtClean="0"/>
               <a:pPr/>
-              <a:t>6/17/2026</a:t>
+              <a:t>6/18/26</a:t>
             </a:fld>
             <a:endParaRPr lang="en-US" dirty="0"/>
           </a:p>
@@ -7916,26 +7916,110 @@
         </p:nvSpPr>
         <p:spPr/>
         <p:txBody>
-          <a:bodyPr/>
+          <a:bodyPr>
+            <a:normAutofit lnSpcReduction="10000"/>
+          </a:bodyPr>
           <a:lstStyle/>
           <a:p>
             <a:r>
-              <a:rPr lang="en-US" dirty="0"/>
-              <a:t>LITERATURE</a:t>
-            </a:r>
-          </a:p>
-          <a:p>
-            <a:r>
-              <a:rPr lang="en-US" dirty="0"/>
-              <a:t>GAP?</a:t>
-            </a:r>
-          </a:p>
-          <a:p>
-            <a:r>
-              <a:rPr lang="en-US" dirty="0"/>
-              <a:t>RQ</a:t>
-            </a:r>
-            <a:endParaRPr lang="en-NL" dirty="0"/>
+              <a:rPr lang="en-GB" dirty="0" err="1"/>
+              <a:t>Livability</a:t>
+            </a:r>
+            <a:r>
+              <a:rPr lang="en-GB" dirty="0"/>
+              <a:t> score</a:t>
+            </a:r>
+            <a:br>
+              <a:rPr lang="en-GB" dirty="0"/>
+            </a:br>
+            <a:r>
+              <a:rPr lang="en-GB" dirty="0"/>
+              <a:t>– definition</a:t>
+            </a:r>
+            <a:br>
+              <a:rPr lang="en-GB" dirty="0"/>
+            </a:br>
+            <a:r>
+              <a:rPr lang="en-GB" dirty="0"/>
+              <a:t>- what is based on</a:t>
+            </a:r>
+            <a:br>
+              <a:rPr lang="en-GB" dirty="0"/>
+            </a:br>
+            <a:r>
+              <a:rPr lang="en-GB" dirty="0"/>
+              <a:t>- limitations - lack of transparency in the documentation? Reliance on regulations and few variables that account for people’s actual experiences</a:t>
+            </a:r>
+          </a:p>
+          <a:p>
+            <a:r>
+              <a:rPr lang="en-GB" dirty="0"/>
+              <a:t>Changing conceptions of what </a:t>
+            </a:r>
+            <a:r>
+              <a:rPr lang="en-GB" dirty="0" err="1"/>
+              <a:t>livability</a:t>
+            </a:r>
+            <a:r>
+              <a:rPr lang="en-GB" dirty="0"/>
+              <a:t> means in the Netherlands</a:t>
+            </a:r>
+          </a:p>
+          <a:p>
+            <a:r>
+              <a:rPr lang="en-GB" dirty="0"/>
+              <a:t>Gap: objective and actual understandings of </a:t>
+            </a:r>
+            <a:r>
+              <a:rPr lang="en-GB" dirty="0" err="1"/>
+              <a:t>livability</a:t>
+            </a:r>
+            <a:endParaRPr lang="en-GB" dirty="0"/>
+          </a:p>
+          <a:p>
+            <a:r>
+              <a:rPr lang="en-GB" dirty="0"/>
+              <a:t>Using Exposome, </a:t>
+            </a:r>
+            <a:r>
+              <a:rPr lang="en-GB" dirty="0" err="1"/>
+              <a:t>Firmbackbone</a:t>
+            </a:r>
+            <a:r>
+              <a:rPr lang="en-GB" dirty="0"/>
+              <a:t>, LISS to try understand the predictors of </a:t>
+            </a:r>
+            <a:r>
+              <a:rPr lang="en-GB" dirty="0" err="1"/>
+              <a:t>livability</a:t>
+            </a:r>
+            <a:r>
+              <a:rPr lang="en-GB" dirty="0"/>
+              <a:t> </a:t>
+            </a:r>
+          </a:p>
+          <a:p>
+            <a:r>
+              <a:rPr lang="en-GB" dirty="0"/>
+              <a:t>Compare perception with “objective” </a:t>
+            </a:r>
+            <a:r>
+              <a:rPr lang="en-GB" dirty="0" err="1"/>
+              <a:t>livability</a:t>
+            </a:r>
+            <a:r>
+              <a:rPr lang="en-GB" dirty="0"/>
+              <a:t> score </a:t>
+            </a:r>
+          </a:p>
+          <a:p>
+            <a:endParaRPr lang="en-GB" dirty="0"/>
+          </a:p>
+          <a:p>
+            <a:endParaRPr lang="en-GB" dirty="0"/>
+          </a:p>
+          <a:p>
+            <a:endParaRPr lang="en-GB" dirty="0"/>
           </a:p>
         </p:txBody>
       </p:sp>
@@ -7953,6 +8037,131 @@
 </file>
 
 <file path=ppt/slides/slide3.xml><?xml version="1.0" encoding="utf-8"?>
+<p:sld xmlns:a="http://schemas.openxmlformats.org/drawingml/2006/main" xmlns:r="http://schemas.openxmlformats.org/officeDocument/2006/relationships" xmlns:p="http://schemas.openxmlformats.org/presentationml/2006/main">
+  <p:cSld>
+    <p:spTree>
+      <p:nvGrpSpPr>
+        <p:cNvPr id="1" name=""/>
+        <p:cNvGrpSpPr/>
+        <p:nvPr/>
+      </p:nvGrpSpPr>
+      <p:grpSpPr>
+        <a:xfrm>
+          <a:off x="0" y="0"/>
+          <a:ext cx="0" cy="0"/>
+          <a:chOff x="0" y="0"/>
+          <a:chExt cx="0" cy="0"/>
+        </a:xfrm>
+      </p:grpSpPr>
+      <p:sp>
+        <p:nvSpPr>
+          <p:cNvPr id="2" name="Title 1">
+            <a:extLst>
+              <a:ext uri="{FF2B5EF4-FFF2-40B4-BE49-F238E27FC236}">
+                <a16:creationId xmlns:a16="http://schemas.microsoft.com/office/drawing/2014/main" id="{3E3114CE-3A47-AFD5-8B03-147194BCDE56}"/>
+              </a:ext>
+            </a:extLst>
+          </p:cNvPr>
+          <p:cNvSpPr>
+            <a:spLocks noGrp="1"/>
+          </p:cNvSpPr>
+          <p:nvPr>
+            <p:ph type="title"/>
+          </p:nvPr>
+        </p:nvSpPr>
+        <p:spPr/>
+        <p:txBody>
+          <a:bodyPr/>
+          <a:lstStyle/>
+          <a:p>
+            <a:r>
+              <a:rPr lang="en-US" b="1" dirty="0"/>
+              <a:t>RESEARCH QUESTIONS</a:t>
+            </a:r>
+          </a:p>
+        </p:txBody>
+      </p:sp>
+      <p:sp>
+        <p:nvSpPr>
+          <p:cNvPr id="3" name="Content Placeholder 2">
+            <a:extLst>
+              <a:ext uri="{FF2B5EF4-FFF2-40B4-BE49-F238E27FC236}">
+                <a16:creationId xmlns:a16="http://schemas.microsoft.com/office/drawing/2014/main" id="{18DFE17C-99DB-E666-E7C2-0E384C99A025}"/>
+              </a:ext>
+            </a:extLst>
+          </p:cNvPr>
+          <p:cNvSpPr>
+            <a:spLocks noGrp="1"/>
+          </p:cNvSpPr>
+          <p:nvPr>
+            <p:ph idx="1"/>
+          </p:nvPr>
+        </p:nvSpPr>
+        <p:spPr/>
+        <p:txBody>
+          <a:bodyPr/>
+          <a:lstStyle/>
+          <a:p>
+            <a:pPr marL="457200" indent="-457200">
+              <a:buAutoNum type="arabicPeriod"/>
+            </a:pPr>
+            <a:r>
+              <a:rPr lang="en-GB" dirty="0"/>
+              <a:t>What alternative model using administrative and survey data can predict </a:t>
+            </a:r>
+            <a:r>
+              <a:rPr lang="en-GB" dirty="0" err="1"/>
+              <a:t>livability</a:t>
+            </a:r>
+            <a:r>
+              <a:rPr lang="en-GB" dirty="0"/>
+              <a:t> score in the Netherlands?</a:t>
+            </a:r>
+            <a:endParaRPr lang="ru-RU" dirty="0"/>
+          </a:p>
+          <a:p>
+            <a:pPr marL="457200" indent="-457200">
+              <a:buAutoNum type="arabicPeriod"/>
+            </a:pPr>
+            <a:r>
+              <a:rPr lang="en-GB" dirty="0"/>
+              <a:t>What model can represent people’s perceptions of </a:t>
+            </a:r>
+            <a:r>
+              <a:rPr lang="en-GB" dirty="0" err="1"/>
+              <a:t>livability</a:t>
+            </a:r>
+            <a:r>
+              <a:rPr lang="en-GB" dirty="0"/>
+              <a:t> in the Netherlands?</a:t>
+            </a:r>
+          </a:p>
+          <a:p>
+            <a:pPr marL="457200" indent="-457200">
+              <a:buAutoNum type="arabicPeriod"/>
+            </a:pPr>
+            <a:r>
+              <a:rPr lang="en-GB" dirty="0"/>
+              <a:t>What are the differences in scoring …?</a:t>
+            </a:r>
+            <a:endParaRPr lang="en-US" dirty="0"/>
+          </a:p>
+        </p:txBody>
+      </p:sp>
+    </p:spTree>
+    <p:extLst>
+      <p:ext uri="{BB962C8B-B14F-4D97-AF65-F5344CB8AC3E}">
+        <p14:creationId xmlns:p14="http://schemas.microsoft.com/office/powerpoint/2010/main" val="245806625"/>
+      </p:ext>
+    </p:extLst>
+  </p:cSld>
+  <p:clrMapOvr>
+    <a:masterClrMapping/>
+  </p:clrMapOvr>
+</p:sld>
+</file>
+
+<file path=ppt/slides/slide4.xml><?xml version="1.0" encoding="utf-8"?>
 <p:sld xmlns:a="http://schemas.openxmlformats.org/drawingml/2006/main" xmlns:r="http://schemas.openxmlformats.org/officeDocument/2006/relationships" xmlns:p="http://schemas.openxmlformats.org/presentationml/2006/main">
   <p:cSld>
     <p:spTree>
@@ -8171,104 +8380,6 @@
 </p:sld>
 </file>
 
-<file path=ppt/slides/slide4.xml><?xml version="1.0" encoding="utf-8"?>
-<p:sld xmlns:a="http://schemas.openxmlformats.org/drawingml/2006/main" xmlns:r="http://schemas.openxmlformats.org/officeDocument/2006/relationships" xmlns:p="http://schemas.openxmlformats.org/presentationml/2006/main">
-  <p:cSld>
-    <p:spTree>
-      <p:nvGrpSpPr>
-        <p:cNvPr id="1" name=""/>
-        <p:cNvGrpSpPr/>
-        <p:nvPr/>
-      </p:nvGrpSpPr>
-      <p:grpSpPr>
-        <a:xfrm>
-          <a:off x="0" y="0"/>
-          <a:ext cx="0" cy="0"/>
-          <a:chOff x="0" y="0"/>
-          <a:chExt cx="0" cy="0"/>
-        </a:xfrm>
-      </p:grpSpPr>
-      <p:sp>
-        <p:nvSpPr>
-          <p:cNvPr id="2" name="Title 1">
-            <a:extLst>
-              <a:ext uri="{FF2B5EF4-FFF2-40B4-BE49-F238E27FC236}">
-                <a16:creationId xmlns:a16="http://schemas.microsoft.com/office/drawing/2014/main" id="{391D5AA4-39E8-7D88-FF14-AEEA7CC8AC7B}"/>
-              </a:ext>
-            </a:extLst>
-          </p:cNvPr>
-          <p:cNvSpPr>
-            <a:spLocks noGrp="1"/>
-          </p:cNvSpPr>
-          <p:nvPr>
-            <p:ph type="title"/>
-          </p:nvPr>
-        </p:nvSpPr>
-        <p:spPr/>
-        <p:txBody>
-          <a:bodyPr>
-            <a:normAutofit/>
-          </a:bodyPr>
-          <a:lstStyle/>
-          <a:p>
-            <a:r>
-              <a:rPr lang="en-US" sz="4000" b="1" dirty="0">
-                <a:latin typeface="Aptos" panose="020B0004020202020204" pitchFamily="34" charset="0"/>
-              </a:rPr>
-              <a:t>LIVABILITY SCORE</a:t>
-            </a:r>
-            <a:endParaRPr lang="en-NL" sz="4000" dirty="0"/>
-          </a:p>
-        </p:txBody>
-      </p:sp>
-      <p:sp>
-        <p:nvSpPr>
-          <p:cNvPr id="3" name="Content Placeholder 2">
-            <a:extLst>
-              <a:ext uri="{FF2B5EF4-FFF2-40B4-BE49-F238E27FC236}">
-                <a16:creationId xmlns:a16="http://schemas.microsoft.com/office/drawing/2014/main" id="{532078A8-6BB5-7041-FA15-FF26060FEB86}"/>
-              </a:ext>
-            </a:extLst>
-          </p:cNvPr>
-          <p:cNvSpPr>
-            <a:spLocks noGrp="1"/>
-          </p:cNvSpPr>
-          <p:nvPr>
-            <p:ph idx="1"/>
-          </p:nvPr>
-        </p:nvSpPr>
-        <p:spPr/>
-        <p:txBody>
-          <a:bodyPr/>
-          <a:lstStyle/>
-          <a:p>
-            <a:r>
-              <a:rPr lang="en-US" dirty="0"/>
-              <a:t>OVERVIEW OF DIMENSIONS</a:t>
-            </a:r>
-          </a:p>
-          <a:p>
-            <a:r>
-              <a:rPr lang="en-US" dirty="0"/>
-              <a:t>VISUALIZATION</a:t>
-            </a:r>
-            <a:endParaRPr lang="en-NL" dirty="0"/>
-          </a:p>
-        </p:txBody>
-      </p:sp>
-    </p:spTree>
-    <p:extLst>
-      <p:ext uri="{BB962C8B-B14F-4D97-AF65-F5344CB8AC3E}">
-        <p14:creationId xmlns:p14="http://schemas.microsoft.com/office/powerpoint/2010/main" val="929769730"/>
-      </p:ext>
-    </p:extLst>
-  </p:cSld>
-  <p:clrMapOvr>
-    <a:masterClrMapping/>
-  </p:clrMapOvr>
-</p:sld>
-</file>
-
 <file path=ppt/slides/slide5.xml><?xml version="1.0" encoding="utf-8"?>
 <p:sld xmlns:a="http://schemas.openxmlformats.org/drawingml/2006/main" xmlns:r="http://schemas.openxmlformats.org/officeDocument/2006/relationships" xmlns:p="http://schemas.openxmlformats.org/presentationml/2006/main">
   <p:cSld>
@@ -8291,7 +8402,7 @@
           <p:cNvPr id="2" name="Title 1">
             <a:extLst>
               <a:ext uri="{FF2B5EF4-FFF2-40B4-BE49-F238E27FC236}">
-                <a16:creationId xmlns:a16="http://schemas.microsoft.com/office/drawing/2014/main" id="{1F20AF0E-ED51-D6C7-ED17-990E85214ED5}"/>
+                <a16:creationId xmlns:a16="http://schemas.microsoft.com/office/drawing/2014/main" id="{391D5AA4-39E8-7D88-FF14-AEEA7CC8AC7B}"/>
               </a:ext>
             </a:extLst>
           </p:cNvPr>
@@ -8313,11 +8424,9 @@
               <a:rPr lang="en-US" sz="4000" b="1" dirty="0">
                 <a:latin typeface="Aptos" panose="020B0004020202020204" pitchFamily="34" charset="0"/>
               </a:rPr>
-              <a:t>ANALYSIS</a:t>
-            </a:r>
-            <a:endParaRPr lang="en-NL" sz="4000" b="1" dirty="0">
-              <a:latin typeface="Aptos" panose="020B0004020202020204" pitchFamily="34" charset="0"/>
-            </a:endParaRPr>
+              <a:t>LIVABILITY SCORE</a:t>
+            </a:r>
+            <a:endParaRPr lang="en-NL" sz="4000" dirty="0"/>
           </a:p>
         </p:txBody>
       </p:sp>
@@ -8326,7 +8435,7 @@
           <p:cNvPr id="3" name="Content Placeholder 2">
             <a:extLst>
               <a:ext uri="{FF2B5EF4-FFF2-40B4-BE49-F238E27FC236}">
-                <a16:creationId xmlns:a16="http://schemas.microsoft.com/office/drawing/2014/main" id="{EE745100-CE06-4549-0F6E-0CC8267F6DBC}"/>
+                <a16:creationId xmlns:a16="http://schemas.microsoft.com/office/drawing/2014/main" id="{532078A8-6BB5-7041-FA15-FF26060FEB86}"/>
               </a:ext>
             </a:extLst>
           </p:cNvPr>
@@ -8344,7 +8453,27 @@
           <a:p>
             <a:r>
               <a:rPr lang="en-US" dirty="0"/>
-              <a:t>METHOD AND APPROACH</a:t>
+              <a:t>OVERVIEW OF DIMENSIONS</a:t>
+            </a:r>
+            <a:br>
+              <a:rPr lang="en-US" dirty="0"/>
+            </a:br>
+            <a:r>
+              <a:rPr lang="en-US" dirty="0"/>
+              <a:t>dimensions and subdimensions</a:t>
+            </a:r>
+            <a:br>
+              <a:rPr lang="en-US" dirty="0"/>
+            </a:br>
+            <a:r>
+              <a:rPr lang="en-US" dirty="0"/>
+              <a:t>color-coding dimensions we think we were able to capture in the LISS variables as perceptions </a:t>
+            </a:r>
+          </a:p>
+          <a:p>
+            <a:r>
+              <a:rPr lang="en-US" dirty="0"/>
+              <a:t>VISUALIZATION</a:t>
             </a:r>
             <a:endParaRPr lang="en-NL" dirty="0"/>
           </a:p>
@@ -8353,7 +8482,7 @@
     </p:spTree>
     <p:extLst>
       <p:ext uri="{BB962C8B-B14F-4D97-AF65-F5344CB8AC3E}">
-        <p14:creationId xmlns:p14="http://schemas.microsoft.com/office/powerpoint/2010/main" val="1200445968"/>
+        <p14:creationId xmlns:p14="http://schemas.microsoft.com/office/powerpoint/2010/main" val="929769730"/>
       </p:ext>
     </p:extLst>
   </p:cSld>
@@ -8385,7 +8514,7 @@
           <p:cNvPr id="2" name="Title 1">
             <a:extLst>
               <a:ext uri="{FF2B5EF4-FFF2-40B4-BE49-F238E27FC236}">
-                <a16:creationId xmlns:a16="http://schemas.microsoft.com/office/drawing/2014/main" id="{9D87DF4A-6793-0A82-6A54-8C85064ED0FD}"/>
+                <a16:creationId xmlns:a16="http://schemas.microsoft.com/office/drawing/2014/main" id="{1F20AF0E-ED51-D6C7-ED17-990E85214ED5}"/>
               </a:ext>
             </a:extLst>
           </p:cNvPr>
@@ -8407,7 +8536,7 @@
               <a:rPr lang="en-US" sz="4000" b="1" dirty="0">
                 <a:latin typeface="Aptos" panose="020B0004020202020204" pitchFamily="34" charset="0"/>
               </a:rPr>
-              <a:t>RESULTS</a:t>
+              <a:t>ANALYSIS</a:t>
             </a:r>
             <a:endParaRPr lang="en-NL" sz="4000" b="1" dirty="0">
               <a:latin typeface="Aptos" panose="020B0004020202020204" pitchFamily="34" charset="0"/>
@@ -8420,7 +8549,7 @@
           <p:cNvPr id="3" name="Content Placeholder 2">
             <a:extLst>
               <a:ext uri="{FF2B5EF4-FFF2-40B4-BE49-F238E27FC236}">
-                <a16:creationId xmlns:a16="http://schemas.microsoft.com/office/drawing/2014/main" id="{B7AC6F1B-C3BD-3A07-79D7-89F1A5E47B98}"/>
+                <a16:creationId xmlns:a16="http://schemas.microsoft.com/office/drawing/2014/main" id="{EE745100-CE06-4549-0F6E-0CC8267F6DBC}"/>
               </a:ext>
             </a:extLst>
           </p:cNvPr>
@@ -8438,19 +8567,14 @@
           <a:p>
             <a:r>
               <a:rPr lang="en-US" dirty="0"/>
-              <a:t>OVERVIEW OF RESULTS</a:t>
-            </a:r>
-          </a:p>
-          <a:p>
-            <a:r>
-              <a:rPr lang="en-US" dirty="0"/>
-              <a:t>VISUALIZATIONS</a:t>
-            </a:r>
-          </a:p>
-          <a:p>
-            <a:r>
-              <a:rPr lang="en-US" dirty="0"/>
-              <a:t>REMARKS</a:t>
+              <a:t>METHOD AND APPROACH</a:t>
+            </a:r>
+            <a:endParaRPr lang="ru-RU" dirty="0"/>
+          </a:p>
+          <a:p>
+            <a:r>
+              <a:rPr lang="en-GB" dirty="0"/>
+              <a:t>ETHICAL CONSIDERATIONS</a:t>
             </a:r>
             <a:endParaRPr lang="en-NL" dirty="0"/>
           </a:p>
@@ -8459,7 +8583,7 @@
     </p:spTree>
     <p:extLst>
       <p:ext uri="{BB962C8B-B14F-4D97-AF65-F5344CB8AC3E}">
-        <p14:creationId xmlns:p14="http://schemas.microsoft.com/office/powerpoint/2010/main" val="2823057263"/>
+        <p14:creationId xmlns:p14="http://schemas.microsoft.com/office/powerpoint/2010/main" val="1200445968"/>
       </p:ext>
     </p:extLst>
   </p:cSld>
@@ -8474,13 +8598,7 @@
   <p:cSld>
     <p:spTree>
       <p:nvGrpSpPr>
-        <p:cNvPr id="1" name="">
-          <a:extLst>
-            <a:ext uri="{FF2B5EF4-FFF2-40B4-BE49-F238E27FC236}">
-              <a16:creationId xmlns:a16="http://schemas.microsoft.com/office/drawing/2014/main" id="{1392FCA9-9934-597E-3E85-F91240B2A565}"/>
-            </a:ext>
-          </a:extLst>
-        </p:cNvPr>
+        <p:cNvPr id="1" name=""/>
         <p:cNvGrpSpPr/>
         <p:nvPr/>
       </p:nvGrpSpPr>
@@ -8497,7 +8615,7 @@
           <p:cNvPr id="2" name="Title 1">
             <a:extLst>
               <a:ext uri="{FF2B5EF4-FFF2-40B4-BE49-F238E27FC236}">
-                <a16:creationId xmlns:a16="http://schemas.microsoft.com/office/drawing/2014/main" id="{DB638A7B-FADD-2A50-6E5A-A5F74D16E501}"/>
+                <a16:creationId xmlns:a16="http://schemas.microsoft.com/office/drawing/2014/main" id="{9D87DF4A-6793-0A82-6A54-8C85064ED0FD}"/>
               </a:ext>
             </a:extLst>
           </p:cNvPr>
@@ -8519,7 +8637,7 @@
               <a:rPr lang="en-US" sz="4000" b="1" dirty="0">
                 <a:latin typeface="Aptos" panose="020B0004020202020204" pitchFamily="34" charset="0"/>
               </a:rPr>
-              <a:t>REPRODUCIBILITY</a:t>
+              <a:t>RESULTS</a:t>
             </a:r>
             <a:endParaRPr lang="en-NL" sz="4000" b="1" dirty="0">
               <a:latin typeface="Aptos" panose="020B0004020202020204" pitchFamily="34" charset="0"/>
@@ -8532,7 +8650,7 @@
           <p:cNvPr id="3" name="Content Placeholder 2">
             <a:extLst>
               <a:ext uri="{FF2B5EF4-FFF2-40B4-BE49-F238E27FC236}">
-                <a16:creationId xmlns:a16="http://schemas.microsoft.com/office/drawing/2014/main" id="{C7F2E767-F405-E9C2-5F6D-C2E221D903CF}"/>
+                <a16:creationId xmlns:a16="http://schemas.microsoft.com/office/drawing/2014/main" id="{B7AC6F1B-C3BD-3A07-79D7-89F1A5E47B98}"/>
               </a:ext>
             </a:extLst>
           </p:cNvPr>
@@ -8550,7 +8668,19 @@
           <a:p>
             <a:r>
               <a:rPr lang="en-US" dirty="0"/>
-              <a:t>MAYBE OVERVIEW OF THE FAIR PRINCIPLES THAT WE FOLLOWED</a:t>
+              <a:t>OVERVIEW OF RESULTS</a:t>
+            </a:r>
+          </a:p>
+          <a:p>
+            <a:r>
+              <a:rPr lang="en-US" dirty="0"/>
+              <a:t>VISUALIZATIONS</a:t>
+            </a:r>
+          </a:p>
+          <a:p>
+            <a:r>
+              <a:rPr lang="en-US" dirty="0"/>
+              <a:t>REMARKS</a:t>
             </a:r>
             <a:endParaRPr lang="en-NL" dirty="0"/>
           </a:p>
@@ -8559,7 +8689,7 @@
     </p:spTree>
     <p:extLst>
       <p:ext uri="{BB962C8B-B14F-4D97-AF65-F5344CB8AC3E}">
-        <p14:creationId xmlns:p14="http://schemas.microsoft.com/office/powerpoint/2010/main" val="2131163159"/>
+        <p14:creationId xmlns:p14="http://schemas.microsoft.com/office/powerpoint/2010/main" val="2823057263"/>
       </p:ext>
     </p:extLst>
   </p:cSld>
@@ -8652,12 +8782,72 @@
               <a:rPr lang="en-US" dirty="0"/>
               <a:t>LIMITATIONS</a:t>
             </a:r>
+            <a:r>
+              <a:rPr lang="en-GB" dirty="0"/>
+              <a:t>:</a:t>
+            </a:r>
+            <a:br>
+              <a:rPr lang="en-GB" dirty="0"/>
+            </a:br>
+            <a:r>
+              <a:rPr lang="en-GB" dirty="0"/>
+              <a:t>- limitations of using secondary data, and admin data in particular – having only variables that are available</a:t>
+            </a:r>
+            <a:br>
+              <a:rPr lang="en-GB" dirty="0"/>
+            </a:br>
+            <a:r>
+              <a:rPr lang="en-GB" dirty="0"/>
+              <a:t>- representativeness of LISS – often less than 10 people per neighbourhood</a:t>
+            </a:r>
+            <a:br>
+              <a:rPr lang="en-GB" dirty="0"/>
+            </a:br>
+            <a:r>
+              <a:rPr lang="en-GB" dirty="0"/>
+              <a:t>- approximating measures for </a:t>
+            </a:r>
+            <a:r>
+              <a:rPr lang="en-GB" dirty="0" err="1"/>
+              <a:t>livability</a:t>
+            </a:r>
+            <a:r>
+              <a:rPr lang="en-GB" dirty="0"/>
+              <a:t> dimensions based on our own interpretation due to lack of metadata documentation for </a:t>
+            </a:r>
+            <a:r>
+              <a:rPr lang="en-GB" dirty="0" err="1"/>
+              <a:t>livability</a:t>
+            </a:r>
+            <a:r>
+              <a:rPr lang="en-GB" dirty="0"/>
+              <a:t> score</a:t>
+            </a:r>
+            <a:endParaRPr lang="en-US" dirty="0"/>
           </a:p>
           <a:p>
             <a:r>
               <a:rPr lang="en-US" dirty="0"/>
               <a:t>POSSIBLE FURTHER DIRECTIONS</a:t>
             </a:r>
+            <a:r>
+              <a:rPr lang="en-US" dirty="0">
+                <a:sym typeface="Wingdings" pitchFamily="2" charset="2"/>
+              </a:rPr>
+              <a:t>:</a:t>
+            </a:r>
+            <a:br>
+              <a:rPr lang="en-US" dirty="0">
+                <a:sym typeface="Wingdings" pitchFamily="2" charset="2"/>
+              </a:rPr>
+            </a:br>
+            <a:r>
+              <a:rPr lang="en-US" dirty="0">
+                <a:sym typeface="Wingdings" pitchFamily="2" charset="2"/>
+              </a:rPr>
+              <a:t>- </a:t>
+            </a:r>
+            <a:endParaRPr lang="en-US" dirty="0"/>
           </a:p>
           <a:p>
             <a:endParaRPr lang="en-NL" dirty="0"/>

--- a/LIVING-SICCS.pptx
+++ b/LIVING-SICCS.pptx
@@ -5,17 +5,25 @@
     <p:sldMasterId id="2147483739" r:id="rId1"/>
   </p:sldMasterIdLst>
   <p:notesMasterIdLst>
-    <p:notesMasterId r:id="rId10"/>
+    <p:notesMasterId r:id="rId18"/>
   </p:notesMasterIdLst>
   <p:sldIdLst>
     <p:sldId id="256" r:id="rId2"/>
-    <p:sldId id="257" r:id="rId3"/>
-    <p:sldId id="263" r:id="rId4"/>
-    <p:sldId id="258" r:id="rId5"/>
-    <p:sldId id="259" r:id="rId6"/>
-    <p:sldId id="260" r:id="rId7"/>
-    <p:sldId id="261" r:id="rId8"/>
-    <p:sldId id="262" r:id="rId9"/>
+    <p:sldId id="264" r:id="rId3"/>
+    <p:sldId id="265" r:id="rId4"/>
+    <p:sldId id="266" r:id="rId5"/>
+    <p:sldId id="263" r:id="rId6"/>
+    <p:sldId id="267" r:id="rId7"/>
+    <p:sldId id="259" r:id="rId8"/>
+    <p:sldId id="269" r:id="rId9"/>
+    <p:sldId id="258" r:id="rId10"/>
+    <p:sldId id="260" r:id="rId11"/>
+    <p:sldId id="270" r:id="rId12"/>
+    <p:sldId id="261" r:id="rId13"/>
+    <p:sldId id="273" r:id="rId14"/>
+    <p:sldId id="272" r:id="rId15"/>
+    <p:sldId id="274" r:id="rId16"/>
+    <p:sldId id="268" r:id="rId17"/>
   </p:sldIdLst>
   <p:sldSz cx="12192000" cy="6858000"/>
   <p:notesSz cx="6858000" cy="9144000"/>
@@ -500,6 +508,13 @@
           </p:nvPr>
         </p:nvSpPr>
         <p:spPr/>
+        <p:txBody>
+          <a:bodyPr/>
+          <a:lstStyle/>
+          <a:p>
+            <a:endParaRPr lang="en-US"/>
+          </a:p>
+        </p:txBody>
       </p:sp>
       <p:sp>
         <p:nvSpPr>
@@ -537,7 +552,7 @@
           <a:p>
             <a:fld id="{2B9B7CD5-E554-4EF4-BDFC-2343191D4CFE}" type="slidenum">
               <a:rPr lang="en-NL" smtClean="0"/>
-              <a:t>4</a:t>
+              <a:t>9</a:t>
             </a:fld>
             <a:endParaRPr lang="en-NL"/>
           </a:p>
@@ -7846,6 +7861,895 @@
 </p:sld>
 </file>
 
+<file path=ppt/slides/slide10.xml><?xml version="1.0" encoding="utf-8"?>
+<p:sld xmlns:a="http://schemas.openxmlformats.org/drawingml/2006/main" xmlns:r="http://schemas.openxmlformats.org/officeDocument/2006/relationships" xmlns:p="http://schemas.openxmlformats.org/presentationml/2006/main">
+  <p:cSld>
+    <p:spTree>
+      <p:nvGrpSpPr>
+        <p:cNvPr id="1" name=""/>
+        <p:cNvGrpSpPr/>
+        <p:nvPr/>
+      </p:nvGrpSpPr>
+      <p:grpSpPr>
+        <a:xfrm>
+          <a:off x="0" y="0"/>
+          <a:ext cx="0" cy="0"/>
+          <a:chOff x="0" y="0"/>
+          <a:chExt cx="0" cy="0"/>
+        </a:xfrm>
+      </p:grpSpPr>
+      <p:sp>
+        <p:nvSpPr>
+          <p:cNvPr id="2" name="Title 1">
+            <a:extLst>
+              <a:ext uri="{FF2B5EF4-FFF2-40B4-BE49-F238E27FC236}">
+                <a16:creationId xmlns:a16="http://schemas.microsoft.com/office/drawing/2014/main" id="{1F20AF0E-ED51-D6C7-ED17-990E85214ED5}"/>
+              </a:ext>
+            </a:extLst>
+          </p:cNvPr>
+          <p:cNvSpPr>
+            <a:spLocks noGrp="1"/>
+          </p:cNvSpPr>
+          <p:nvPr>
+            <p:ph type="title"/>
+          </p:nvPr>
+        </p:nvSpPr>
+        <p:spPr/>
+        <p:txBody>
+          <a:bodyPr>
+            <a:normAutofit/>
+          </a:bodyPr>
+          <a:lstStyle/>
+          <a:p>
+            <a:r>
+              <a:rPr lang="en-US" sz="4000" b="1" dirty="0">
+                <a:latin typeface="Aptos" panose="020B0004020202020204" pitchFamily="34" charset="0"/>
+              </a:rPr>
+              <a:t>METHODOLOGY</a:t>
+            </a:r>
+            <a:endParaRPr lang="en-NL" sz="4000" b="1" dirty="0">
+              <a:latin typeface="Aptos" panose="020B0004020202020204" pitchFamily="34" charset="0"/>
+            </a:endParaRPr>
+          </a:p>
+        </p:txBody>
+      </p:sp>
+      <p:sp>
+        <p:nvSpPr>
+          <p:cNvPr id="3" name="Content Placeholder 2">
+            <a:extLst>
+              <a:ext uri="{FF2B5EF4-FFF2-40B4-BE49-F238E27FC236}">
+                <a16:creationId xmlns:a16="http://schemas.microsoft.com/office/drawing/2014/main" id="{EE745100-CE06-4549-0F6E-0CC8267F6DBC}"/>
+              </a:ext>
+            </a:extLst>
+          </p:cNvPr>
+          <p:cNvSpPr>
+            <a:spLocks noGrp="1"/>
+          </p:cNvSpPr>
+          <p:nvPr>
+            <p:ph idx="1"/>
+          </p:nvPr>
+        </p:nvSpPr>
+        <p:spPr/>
+        <p:txBody>
+          <a:bodyPr/>
+          <a:lstStyle/>
+          <a:p>
+            <a:r>
+              <a:rPr lang="en-US" dirty="0"/>
+              <a:t>METHOD AND APPROACH</a:t>
+            </a:r>
+            <a:endParaRPr lang="ru-RU" dirty="0"/>
+          </a:p>
+        </p:txBody>
+      </p:sp>
+    </p:spTree>
+    <p:extLst>
+      <p:ext uri="{BB962C8B-B14F-4D97-AF65-F5344CB8AC3E}">
+        <p14:creationId xmlns:p14="http://schemas.microsoft.com/office/powerpoint/2010/main" val="1200445968"/>
+      </p:ext>
+    </p:extLst>
+  </p:cSld>
+  <p:clrMapOvr>
+    <a:masterClrMapping/>
+  </p:clrMapOvr>
+</p:sld>
+</file>
+
+<file path=ppt/slides/slide11.xml><?xml version="1.0" encoding="utf-8"?>
+<p:sld xmlns:a="http://schemas.openxmlformats.org/drawingml/2006/main" xmlns:r="http://schemas.openxmlformats.org/officeDocument/2006/relationships" xmlns:p="http://schemas.openxmlformats.org/presentationml/2006/main">
+  <p:cSld>
+    <p:spTree>
+      <p:nvGrpSpPr>
+        <p:cNvPr id="1" name="">
+          <a:extLst>
+            <a:ext uri="{FF2B5EF4-FFF2-40B4-BE49-F238E27FC236}">
+              <a16:creationId xmlns:a16="http://schemas.microsoft.com/office/drawing/2014/main" id="{C1EF7281-6E80-CFFF-874F-9F76B107E57D}"/>
+            </a:ext>
+          </a:extLst>
+        </p:cNvPr>
+        <p:cNvGrpSpPr/>
+        <p:nvPr/>
+      </p:nvGrpSpPr>
+      <p:grpSpPr>
+        <a:xfrm>
+          <a:off x="0" y="0"/>
+          <a:ext cx="0" cy="0"/>
+          <a:chOff x="0" y="0"/>
+          <a:chExt cx="0" cy="0"/>
+        </a:xfrm>
+      </p:grpSpPr>
+      <p:sp>
+        <p:nvSpPr>
+          <p:cNvPr id="2" name="Title 1">
+            <a:extLst>
+              <a:ext uri="{FF2B5EF4-FFF2-40B4-BE49-F238E27FC236}">
+                <a16:creationId xmlns:a16="http://schemas.microsoft.com/office/drawing/2014/main" id="{5E90C301-DB0A-A0D8-AE4C-36C9A1FC7AF6}"/>
+              </a:ext>
+            </a:extLst>
+          </p:cNvPr>
+          <p:cNvSpPr>
+            <a:spLocks noGrp="1"/>
+          </p:cNvSpPr>
+          <p:nvPr>
+            <p:ph type="title"/>
+          </p:nvPr>
+        </p:nvSpPr>
+        <p:spPr/>
+        <p:txBody>
+          <a:bodyPr>
+            <a:normAutofit/>
+          </a:bodyPr>
+          <a:lstStyle/>
+          <a:p>
+            <a:r>
+              <a:rPr lang="en-US" sz="4000" b="1" dirty="0">
+                <a:latin typeface="Aptos" panose="020B0004020202020204" pitchFamily="34" charset="0"/>
+              </a:rPr>
+              <a:t>METHODOLOGY</a:t>
+            </a:r>
+            <a:endParaRPr lang="en-NL" sz="4000" b="1" dirty="0">
+              <a:latin typeface="Aptos" panose="020B0004020202020204" pitchFamily="34" charset="0"/>
+            </a:endParaRPr>
+          </a:p>
+        </p:txBody>
+      </p:sp>
+      <p:sp>
+        <p:nvSpPr>
+          <p:cNvPr id="3" name="Content Placeholder 2">
+            <a:extLst>
+              <a:ext uri="{FF2B5EF4-FFF2-40B4-BE49-F238E27FC236}">
+                <a16:creationId xmlns:a16="http://schemas.microsoft.com/office/drawing/2014/main" id="{B9B86305-CFE3-D282-69B1-87E1AFA6AE0D}"/>
+              </a:ext>
+            </a:extLst>
+          </p:cNvPr>
+          <p:cNvSpPr>
+            <a:spLocks noGrp="1"/>
+          </p:cNvSpPr>
+          <p:nvPr>
+            <p:ph idx="1"/>
+          </p:nvPr>
+        </p:nvSpPr>
+        <p:spPr/>
+        <p:txBody>
+          <a:bodyPr/>
+          <a:lstStyle/>
+          <a:p>
+            <a:r>
+              <a:rPr lang="en-US" dirty="0"/>
+              <a:t>METHOD AND APPROACH</a:t>
+            </a:r>
+            <a:endParaRPr lang="ru-RU" dirty="0"/>
+          </a:p>
+        </p:txBody>
+      </p:sp>
+    </p:spTree>
+    <p:extLst>
+      <p:ext uri="{BB962C8B-B14F-4D97-AF65-F5344CB8AC3E}">
+        <p14:creationId xmlns:p14="http://schemas.microsoft.com/office/powerpoint/2010/main" val="3778131531"/>
+      </p:ext>
+    </p:extLst>
+  </p:cSld>
+  <p:clrMapOvr>
+    <a:masterClrMapping/>
+  </p:clrMapOvr>
+</p:sld>
+</file>
+
+<file path=ppt/slides/slide12.xml><?xml version="1.0" encoding="utf-8"?>
+<p:sld xmlns:a="http://schemas.openxmlformats.org/drawingml/2006/main" xmlns:r="http://schemas.openxmlformats.org/officeDocument/2006/relationships" xmlns:p="http://schemas.openxmlformats.org/presentationml/2006/main">
+  <p:cSld>
+    <p:spTree>
+      <p:nvGrpSpPr>
+        <p:cNvPr id="1" name=""/>
+        <p:cNvGrpSpPr/>
+        <p:nvPr/>
+      </p:nvGrpSpPr>
+      <p:grpSpPr>
+        <a:xfrm>
+          <a:off x="0" y="0"/>
+          <a:ext cx="0" cy="0"/>
+          <a:chOff x="0" y="0"/>
+          <a:chExt cx="0" cy="0"/>
+        </a:xfrm>
+      </p:grpSpPr>
+      <p:sp>
+        <p:nvSpPr>
+          <p:cNvPr id="2" name="Title 1">
+            <a:extLst>
+              <a:ext uri="{FF2B5EF4-FFF2-40B4-BE49-F238E27FC236}">
+                <a16:creationId xmlns:a16="http://schemas.microsoft.com/office/drawing/2014/main" id="{9D87DF4A-6793-0A82-6A54-8C85064ED0FD}"/>
+              </a:ext>
+            </a:extLst>
+          </p:cNvPr>
+          <p:cNvSpPr>
+            <a:spLocks noGrp="1"/>
+          </p:cNvSpPr>
+          <p:nvPr>
+            <p:ph type="title"/>
+          </p:nvPr>
+        </p:nvSpPr>
+        <p:spPr/>
+        <p:txBody>
+          <a:bodyPr>
+            <a:normAutofit/>
+          </a:bodyPr>
+          <a:lstStyle/>
+          <a:p>
+            <a:r>
+              <a:rPr lang="en-US" sz="4000" b="1" dirty="0">
+                <a:latin typeface="Aptos" panose="020B0004020202020204" pitchFamily="34" charset="0"/>
+              </a:rPr>
+              <a:t>RESULTS</a:t>
+            </a:r>
+            <a:endParaRPr lang="en-NL" sz="4000" b="1" dirty="0">
+              <a:latin typeface="Aptos" panose="020B0004020202020204" pitchFamily="34" charset="0"/>
+            </a:endParaRPr>
+          </a:p>
+        </p:txBody>
+      </p:sp>
+      <p:sp>
+        <p:nvSpPr>
+          <p:cNvPr id="3" name="Content Placeholder 2">
+            <a:extLst>
+              <a:ext uri="{FF2B5EF4-FFF2-40B4-BE49-F238E27FC236}">
+                <a16:creationId xmlns:a16="http://schemas.microsoft.com/office/drawing/2014/main" id="{B7AC6F1B-C3BD-3A07-79D7-89F1A5E47B98}"/>
+              </a:ext>
+            </a:extLst>
+          </p:cNvPr>
+          <p:cNvSpPr>
+            <a:spLocks noGrp="1"/>
+          </p:cNvSpPr>
+          <p:nvPr>
+            <p:ph idx="1"/>
+          </p:nvPr>
+        </p:nvSpPr>
+        <p:spPr/>
+        <p:txBody>
+          <a:bodyPr/>
+          <a:lstStyle/>
+          <a:p>
+            <a:r>
+              <a:rPr lang="en-US" dirty="0"/>
+              <a:t>OVERVIEW OF RESULTS</a:t>
+            </a:r>
+          </a:p>
+          <a:p>
+            <a:r>
+              <a:rPr lang="en-US" dirty="0"/>
+              <a:t>VISUALIZATIONS</a:t>
+            </a:r>
+          </a:p>
+          <a:p>
+            <a:r>
+              <a:rPr lang="en-US" dirty="0"/>
+              <a:t>REMARKS</a:t>
+            </a:r>
+            <a:endParaRPr lang="en-NL" dirty="0"/>
+          </a:p>
+        </p:txBody>
+      </p:sp>
+    </p:spTree>
+    <p:extLst>
+      <p:ext uri="{BB962C8B-B14F-4D97-AF65-F5344CB8AC3E}">
+        <p14:creationId xmlns:p14="http://schemas.microsoft.com/office/powerpoint/2010/main" val="2823057263"/>
+      </p:ext>
+    </p:extLst>
+  </p:cSld>
+  <p:clrMapOvr>
+    <a:masterClrMapping/>
+  </p:clrMapOvr>
+</p:sld>
+</file>
+
+<file path=ppt/slides/slide13.xml><?xml version="1.0" encoding="utf-8"?>
+<p:sld xmlns:a="http://schemas.openxmlformats.org/drawingml/2006/main" xmlns:r="http://schemas.openxmlformats.org/officeDocument/2006/relationships" xmlns:p="http://schemas.openxmlformats.org/presentationml/2006/main">
+  <p:cSld>
+    <p:spTree>
+      <p:nvGrpSpPr>
+        <p:cNvPr id="1" name="">
+          <a:extLst>
+            <a:ext uri="{FF2B5EF4-FFF2-40B4-BE49-F238E27FC236}">
+              <a16:creationId xmlns:a16="http://schemas.microsoft.com/office/drawing/2014/main" id="{B8BB0EC5-B0F0-FCC9-17F0-3AB7C153266E}"/>
+            </a:ext>
+          </a:extLst>
+        </p:cNvPr>
+        <p:cNvGrpSpPr/>
+        <p:nvPr/>
+      </p:nvGrpSpPr>
+      <p:grpSpPr>
+        <a:xfrm>
+          <a:off x="0" y="0"/>
+          <a:ext cx="0" cy="0"/>
+          <a:chOff x="0" y="0"/>
+          <a:chExt cx="0" cy="0"/>
+        </a:xfrm>
+      </p:grpSpPr>
+      <p:sp>
+        <p:nvSpPr>
+          <p:cNvPr id="2" name="Title 1">
+            <a:extLst>
+              <a:ext uri="{FF2B5EF4-FFF2-40B4-BE49-F238E27FC236}">
+                <a16:creationId xmlns:a16="http://schemas.microsoft.com/office/drawing/2014/main" id="{0059A363-D7DB-6BE4-0009-CC686FBA65FF}"/>
+              </a:ext>
+            </a:extLst>
+          </p:cNvPr>
+          <p:cNvSpPr>
+            <a:spLocks noGrp="1"/>
+          </p:cNvSpPr>
+          <p:nvPr>
+            <p:ph type="title"/>
+          </p:nvPr>
+        </p:nvSpPr>
+        <p:spPr/>
+        <p:txBody>
+          <a:bodyPr>
+            <a:normAutofit/>
+          </a:bodyPr>
+          <a:lstStyle/>
+          <a:p>
+            <a:r>
+              <a:rPr lang="en-US" sz="4000" b="1" dirty="0">
+                <a:latin typeface="Aptos" panose="020B0004020202020204" pitchFamily="34" charset="0"/>
+              </a:rPr>
+              <a:t>DISCUSSION: Findings</a:t>
+            </a:r>
+            <a:endParaRPr lang="en-NL" sz="4000" b="1" dirty="0">
+              <a:latin typeface="Aptos" panose="020B0004020202020204" pitchFamily="34" charset="0"/>
+            </a:endParaRPr>
+          </a:p>
+        </p:txBody>
+      </p:sp>
+      <p:sp>
+        <p:nvSpPr>
+          <p:cNvPr id="3" name="Content Placeholder 2">
+            <a:extLst>
+              <a:ext uri="{FF2B5EF4-FFF2-40B4-BE49-F238E27FC236}">
+                <a16:creationId xmlns:a16="http://schemas.microsoft.com/office/drawing/2014/main" id="{B391B391-3948-A474-3013-11139B938FBF}"/>
+              </a:ext>
+            </a:extLst>
+          </p:cNvPr>
+          <p:cNvSpPr>
+            <a:spLocks noGrp="1"/>
+          </p:cNvSpPr>
+          <p:nvPr>
+            <p:ph idx="1"/>
+          </p:nvPr>
+        </p:nvSpPr>
+        <p:spPr/>
+        <p:txBody>
+          <a:bodyPr/>
+          <a:lstStyle/>
+          <a:p>
+            <a:endParaRPr lang="en-US" dirty="0"/>
+          </a:p>
+          <a:p>
+            <a:endParaRPr lang="en-NL" dirty="0"/>
+          </a:p>
+        </p:txBody>
+      </p:sp>
+    </p:spTree>
+    <p:extLst>
+      <p:ext uri="{BB962C8B-B14F-4D97-AF65-F5344CB8AC3E}">
+        <p14:creationId xmlns:p14="http://schemas.microsoft.com/office/powerpoint/2010/main" val="2101214258"/>
+      </p:ext>
+    </p:extLst>
+  </p:cSld>
+  <p:clrMapOvr>
+    <a:masterClrMapping/>
+  </p:clrMapOvr>
+</p:sld>
+</file>
+
+<file path=ppt/slides/slide14.xml><?xml version="1.0" encoding="utf-8"?>
+<p:sld xmlns:a="http://schemas.openxmlformats.org/drawingml/2006/main" xmlns:r="http://schemas.openxmlformats.org/officeDocument/2006/relationships" xmlns:p="http://schemas.openxmlformats.org/presentationml/2006/main">
+  <p:cSld>
+    <p:spTree>
+      <p:nvGrpSpPr>
+        <p:cNvPr id="1" name="">
+          <a:extLst>
+            <a:ext uri="{FF2B5EF4-FFF2-40B4-BE49-F238E27FC236}">
+              <a16:creationId xmlns:a16="http://schemas.microsoft.com/office/drawing/2014/main" id="{BFBFDBAE-1EFF-E4E1-2009-6131436A8797}"/>
+            </a:ext>
+          </a:extLst>
+        </p:cNvPr>
+        <p:cNvGrpSpPr/>
+        <p:nvPr/>
+      </p:nvGrpSpPr>
+      <p:grpSpPr>
+        <a:xfrm>
+          <a:off x="0" y="0"/>
+          <a:ext cx="0" cy="0"/>
+          <a:chOff x="0" y="0"/>
+          <a:chExt cx="0" cy="0"/>
+        </a:xfrm>
+      </p:grpSpPr>
+      <p:sp>
+        <p:nvSpPr>
+          <p:cNvPr id="2" name="Title 1">
+            <a:extLst>
+              <a:ext uri="{FF2B5EF4-FFF2-40B4-BE49-F238E27FC236}">
+                <a16:creationId xmlns:a16="http://schemas.microsoft.com/office/drawing/2014/main" id="{B08FE8AF-6600-55A1-C616-6283C73A98A5}"/>
+              </a:ext>
+            </a:extLst>
+          </p:cNvPr>
+          <p:cNvSpPr>
+            <a:spLocks noGrp="1"/>
+          </p:cNvSpPr>
+          <p:nvPr>
+            <p:ph type="title"/>
+          </p:nvPr>
+        </p:nvSpPr>
+        <p:spPr/>
+        <p:txBody>
+          <a:bodyPr>
+            <a:normAutofit/>
+          </a:bodyPr>
+          <a:lstStyle/>
+          <a:p>
+            <a:r>
+              <a:rPr lang="en-US" sz="4000" b="1" dirty="0">
+                <a:latin typeface="Aptos" panose="020B0004020202020204" pitchFamily="34" charset="0"/>
+              </a:rPr>
+              <a:t>DISCUSSION: Limitations</a:t>
+            </a:r>
+            <a:endParaRPr lang="en-NL" sz="4000" b="1" dirty="0">
+              <a:latin typeface="Aptos" panose="020B0004020202020204" pitchFamily="34" charset="0"/>
+            </a:endParaRPr>
+          </a:p>
+        </p:txBody>
+      </p:sp>
+      <p:sp>
+        <p:nvSpPr>
+          <p:cNvPr id="3" name="Content Placeholder 2">
+            <a:extLst>
+              <a:ext uri="{FF2B5EF4-FFF2-40B4-BE49-F238E27FC236}">
+                <a16:creationId xmlns:a16="http://schemas.microsoft.com/office/drawing/2014/main" id="{21490BC7-1771-452A-8BD5-AFEAB98D7F87}"/>
+              </a:ext>
+            </a:extLst>
+          </p:cNvPr>
+          <p:cNvSpPr>
+            <a:spLocks noGrp="1"/>
+          </p:cNvSpPr>
+          <p:nvPr>
+            <p:ph idx="1"/>
+          </p:nvPr>
+        </p:nvSpPr>
+        <p:spPr/>
+        <p:txBody>
+          <a:bodyPr>
+            <a:normAutofit/>
+          </a:bodyPr>
+          <a:lstStyle/>
+          <a:p>
+            <a:r>
+              <a:rPr lang="en-GB" dirty="0"/>
+              <a:t>Limited to available variables in admin data</a:t>
+            </a:r>
+          </a:p>
+          <a:p>
+            <a:r>
+              <a:rPr lang="en-GB" dirty="0"/>
+              <a:t>Smaller sample size in LISS, especially when aggregating per PS4 (often less than 10 people per neighbourhood)</a:t>
+            </a:r>
+          </a:p>
+          <a:p>
+            <a:r>
+              <a:rPr lang="en-GB" dirty="0"/>
+              <a:t>Approximating measures for livability dimensions based on our own interpretation due to lack of metadata documentation for livability score</a:t>
+            </a:r>
+            <a:endParaRPr lang="en-US" dirty="0"/>
+          </a:p>
+          <a:p>
+            <a:pPr marL="0" indent="0">
+              <a:buNone/>
+            </a:pPr>
+            <a:r>
+              <a:rPr lang="en-US" dirty="0">
+                <a:sym typeface="Wingdings" pitchFamily="2" charset="2"/>
+              </a:rPr>
+              <a:t> </a:t>
+            </a:r>
+            <a:endParaRPr lang="en-US" dirty="0"/>
+          </a:p>
+          <a:p>
+            <a:endParaRPr lang="en-NL" dirty="0"/>
+          </a:p>
+        </p:txBody>
+      </p:sp>
+    </p:spTree>
+    <p:extLst>
+      <p:ext uri="{BB962C8B-B14F-4D97-AF65-F5344CB8AC3E}">
+        <p14:creationId xmlns:p14="http://schemas.microsoft.com/office/powerpoint/2010/main" val="2305266645"/>
+      </p:ext>
+    </p:extLst>
+  </p:cSld>
+  <p:clrMapOvr>
+    <a:masterClrMapping/>
+  </p:clrMapOvr>
+</p:sld>
+</file>
+
+<file path=ppt/slides/slide15.xml><?xml version="1.0" encoding="utf-8"?>
+<p:sld xmlns:a="http://schemas.openxmlformats.org/drawingml/2006/main" xmlns:r="http://schemas.openxmlformats.org/officeDocument/2006/relationships" xmlns:p="http://schemas.openxmlformats.org/presentationml/2006/main">
+  <p:cSld>
+    <p:spTree>
+      <p:nvGrpSpPr>
+        <p:cNvPr id="1" name="">
+          <a:extLst>
+            <a:ext uri="{FF2B5EF4-FFF2-40B4-BE49-F238E27FC236}">
+              <a16:creationId xmlns:a16="http://schemas.microsoft.com/office/drawing/2014/main" id="{D947CB3A-E61B-8EF9-D00B-3E6E949FE9AB}"/>
+            </a:ext>
+          </a:extLst>
+        </p:cNvPr>
+        <p:cNvGrpSpPr/>
+        <p:nvPr/>
+      </p:nvGrpSpPr>
+      <p:grpSpPr>
+        <a:xfrm>
+          <a:off x="0" y="0"/>
+          <a:ext cx="0" cy="0"/>
+          <a:chOff x="0" y="0"/>
+          <a:chExt cx="0" cy="0"/>
+        </a:xfrm>
+      </p:grpSpPr>
+      <p:sp>
+        <p:nvSpPr>
+          <p:cNvPr id="2" name="Title 1">
+            <a:extLst>
+              <a:ext uri="{FF2B5EF4-FFF2-40B4-BE49-F238E27FC236}">
+                <a16:creationId xmlns:a16="http://schemas.microsoft.com/office/drawing/2014/main" id="{E78DD16D-56EC-3AB6-50B7-F29D312ACDAE}"/>
+              </a:ext>
+            </a:extLst>
+          </p:cNvPr>
+          <p:cNvSpPr>
+            <a:spLocks noGrp="1"/>
+          </p:cNvSpPr>
+          <p:nvPr>
+            <p:ph type="title"/>
+          </p:nvPr>
+        </p:nvSpPr>
+        <p:spPr/>
+        <p:txBody>
+          <a:bodyPr>
+            <a:normAutofit/>
+          </a:bodyPr>
+          <a:lstStyle/>
+          <a:p>
+            <a:r>
+              <a:rPr lang="en-US" sz="4000" b="1" dirty="0">
+                <a:latin typeface="Aptos" panose="020B0004020202020204" pitchFamily="34" charset="0"/>
+              </a:rPr>
+              <a:t>DISCUSSION: Future work</a:t>
+            </a:r>
+            <a:endParaRPr lang="en-NL" sz="4000" b="1" dirty="0">
+              <a:latin typeface="Aptos" panose="020B0004020202020204" pitchFamily="34" charset="0"/>
+            </a:endParaRPr>
+          </a:p>
+        </p:txBody>
+      </p:sp>
+      <p:sp>
+        <p:nvSpPr>
+          <p:cNvPr id="3" name="Content Placeholder 2">
+            <a:extLst>
+              <a:ext uri="{FF2B5EF4-FFF2-40B4-BE49-F238E27FC236}">
+                <a16:creationId xmlns:a16="http://schemas.microsoft.com/office/drawing/2014/main" id="{7549A113-3E64-19D2-7CA4-DFC57AC685DC}"/>
+              </a:ext>
+            </a:extLst>
+          </p:cNvPr>
+          <p:cNvSpPr>
+            <a:spLocks noGrp="1"/>
+          </p:cNvSpPr>
+          <p:nvPr>
+            <p:ph idx="1"/>
+          </p:nvPr>
+        </p:nvSpPr>
+        <p:spPr/>
+        <p:txBody>
+          <a:bodyPr/>
+          <a:lstStyle/>
+          <a:p>
+            <a:pPr marL="0" indent="0">
+              <a:buNone/>
+            </a:pPr>
+            <a:endParaRPr lang="en-US" dirty="0"/>
+          </a:p>
+        </p:txBody>
+      </p:sp>
+    </p:spTree>
+    <p:extLst>
+      <p:ext uri="{BB962C8B-B14F-4D97-AF65-F5344CB8AC3E}">
+        <p14:creationId xmlns:p14="http://schemas.microsoft.com/office/powerpoint/2010/main" val="2794840623"/>
+      </p:ext>
+    </p:extLst>
+  </p:cSld>
+  <p:clrMapOvr>
+    <a:masterClrMapping/>
+  </p:clrMapOvr>
+</p:sld>
+</file>
+
+<file path=ppt/slides/slide16.xml><?xml version="1.0" encoding="utf-8"?>
+<p:sld xmlns:a="http://schemas.openxmlformats.org/drawingml/2006/main" xmlns:r="http://schemas.openxmlformats.org/officeDocument/2006/relationships" xmlns:p="http://schemas.openxmlformats.org/presentationml/2006/main">
+  <p:cSld>
+    <p:spTree>
+      <p:nvGrpSpPr>
+        <p:cNvPr id="1" name="">
+          <a:extLst>
+            <a:ext uri="{FF2B5EF4-FFF2-40B4-BE49-F238E27FC236}">
+              <a16:creationId xmlns:a16="http://schemas.microsoft.com/office/drawing/2014/main" id="{30A362F7-CF35-3AA5-265D-09DB969711EB}"/>
+            </a:ext>
+          </a:extLst>
+        </p:cNvPr>
+        <p:cNvGrpSpPr/>
+        <p:nvPr/>
+      </p:nvGrpSpPr>
+      <p:grpSpPr>
+        <a:xfrm>
+          <a:off x="0" y="0"/>
+          <a:ext cx="0" cy="0"/>
+          <a:chOff x="0" y="0"/>
+          <a:chExt cx="0" cy="0"/>
+        </a:xfrm>
+      </p:grpSpPr>
+      <p:sp>
+        <p:nvSpPr>
+          <p:cNvPr id="2" name="Title 1">
+            <a:extLst>
+              <a:ext uri="{FF2B5EF4-FFF2-40B4-BE49-F238E27FC236}">
+                <a16:creationId xmlns:a16="http://schemas.microsoft.com/office/drawing/2014/main" id="{2C693B76-BE7F-CAEA-FFEB-3AE50DC27F05}"/>
+              </a:ext>
+            </a:extLst>
+          </p:cNvPr>
+          <p:cNvSpPr>
+            <a:spLocks noGrp="1"/>
+          </p:cNvSpPr>
+          <p:nvPr>
+            <p:ph type="title"/>
+          </p:nvPr>
+        </p:nvSpPr>
+        <p:spPr/>
+        <p:txBody>
+          <a:bodyPr>
+            <a:normAutofit/>
+          </a:bodyPr>
+          <a:lstStyle/>
+          <a:p>
+            <a:r>
+              <a:rPr lang="en-GB" sz="4000" b="1" dirty="0">
+                <a:latin typeface="Aptos" panose="020B0004020202020204" pitchFamily="34" charset="0"/>
+              </a:rPr>
+              <a:t>REFERENCES</a:t>
+            </a:r>
+            <a:endParaRPr lang="en-NL" sz="4000" b="1" dirty="0">
+              <a:latin typeface="Aptos" panose="020B0004020202020204" pitchFamily="34" charset="0"/>
+            </a:endParaRPr>
+          </a:p>
+        </p:txBody>
+      </p:sp>
+      <p:sp>
+        <p:nvSpPr>
+          <p:cNvPr id="3" name="Content Placeholder 2">
+            <a:extLst>
+              <a:ext uri="{FF2B5EF4-FFF2-40B4-BE49-F238E27FC236}">
+                <a16:creationId xmlns:a16="http://schemas.microsoft.com/office/drawing/2014/main" id="{5C2AB93C-1F68-C213-AE5F-0DC29232475D}"/>
+              </a:ext>
+            </a:extLst>
+          </p:cNvPr>
+          <p:cNvSpPr>
+            <a:spLocks noGrp="1"/>
+          </p:cNvSpPr>
+          <p:nvPr>
+            <p:ph idx="1"/>
+          </p:nvPr>
+        </p:nvSpPr>
+        <p:spPr>
+          <a:xfrm>
+            <a:off x="838200" y="1402544"/>
+            <a:ext cx="10515600" cy="4302219"/>
+          </a:xfrm>
+        </p:spPr>
+        <p:txBody>
+          <a:bodyPr>
+            <a:normAutofit/>
+          </a:bodyPr>
+          <a:lstStyle/>
+          <a:p>
+            <a:pPr marL="0" indent="0">
+              <a:buNone/>
+            </a:pPr>
+            <a:r>
+              <a:rPr lang="en-GB" sz="2000" dirty="0"/>
+              <a:t>CBS, </a:t>
+            </a:r>
+            <a:r>
+              <a:rPr lang="en-GB" sz="2000" dirty="0" err="1"/>
+              <a:t>Centraal</a:t>
+            </a:r>
+            <a:r>
+              <a:rPr lang="en-GB" sz="2000" dirty="0"/>
+              <a:t> Bureau </a:t>
+            </a:r>
+            <a:r>
+              <a:rPr lang="en-GB" sz="2000" dirty="0" err="1"/>
+              <a:t>voor</a:t>
+            </a:r>
+            <a:r>
+              <a:rPr lang="en-GB" sz="2000" dirty="0"/>
+              <a:t> de </a:t>
+            </a:r>
+            <a:r>
+              <a:rPr lang="en-GB" sz="2000" dirty="0" err="1"/>
+              <a:t>Statistiek</a:t>
+            </a:r>
+            <a:r>
+              <a:rPr lang="en-GB" sz="2000" dirty="0"/>
+              <a:t>. (2026). Fewer young people entering the housing market. </a:t>
+            </a:r>
+            <a:r>
+              <a:rPr lang="en-GB" sz="2000" dirty="0">
+                <a:hlinkClick r:id="rId2"/>
+              </a:rPr>
+              <a:t>https://www.cbs.nl/en-gb/news/2026/17/fewer-young-people-entering-the-housing-market</a:t>
+            </a:r>
+            <a:r>
+              <a:rPr lang="en-GB" sz="2000" dirty="0"/>
+              <a:t> </a:t>
+            </a:r>
+          </a:p>
+          <a:p>
+            <a:pPr marL="0" indent="0">
+              <a:buNone/>
+            </a:pPr>
+            <a:r>
+              <a:rPr lang="en-GB" sz="2000" dirty="0"/>
+              <a:t>Kaal, H. (2011). A conceptual history of livability: Dutch scientists, politicians, policy makers and citizens and the quest for a </a:t>
+            </a:r>
+            <a:r>
+              <a:rPr lang="en-GB" sz="2000" dirty="0" err="1"/>
+              <a:t>livable</a:t>
+            </a:r>
+            <a:r>
+              <a:rPr lang="en-GB" sz="2000" dirty="0"/>
+              <a:t> city. City, 15(5), 532–547. https://</a:t>
+            </a:r>
+            <a:r>
+              <a:rPr lang="en-GB" sz="2000" dirty="0" err="1"/>
+              <a:t>doi.org</a:t>
+            </a:r>
+            <a:r>
+              <a:rPr lang="en-GB" sz="2000" dirty="0"/>
+              <a:t>/10.1080/13604813.2011.595094</a:t>
+            </a:r>
+          </a:p>
+          <a:p>
+            <a:pPr marL="0" indent="0">
+              <a:buNone/>
+            </a:pPr>
+            <a:r>
+              <a:rPr lang="en-GB" sz="2000" dirty="0"/>
+              <a:t>Lennartz, C., Baarsma, B., &amp; </a:t>
+            </a:r>
+            <a:r>
+              <a:rPr lang="en-GB" sz="2000" dirty="0" err="1"/>
+              <a:t>Vrieselaar</a:t>
+            </a:r>
+            <a:r>
+              <a:rPr lang="en-GB" sz="2000" dirty="0"/>
+              <a:t>, N. (2019). Exploding house prices in urban housing markets: Explanations and policy solutions for the Netherlands. In </a:t>
+            </a:r>
+            <a:r>
+              <a:rPr lang="en-GB" sz="2000" i="1" dirty="0"/>
+              <a:t>Hot property: The housing market in major cities</a:t>
+            </a:r>
+            <a:r>
+              <a:rPr lang="en-GB" sz="2000" dirty="0"/>
+              <a:t> (pp. 207-221). Cham: Springer International Publishing.</a:t>
+            </a:r>
+          </a:p>
+          <a:p>
+            <a:pPr marL="0" indent="0">
+              <a:buNone/>
+            </a:pPr>
+            <a:r>
+              <a:rPr lang="en-GB" sz="2000" dirty="0" err="1"/>
+              <a:t>Mandemakers</a:t>
+            </a:r>
+            <a:r>
+              <a:rPr lang="en-GB" sz="2000" dirty="0"/>
+              <a:t>, J., </a:t>
+            </a:r>
+            <a:r>
+              <a:rPr lang="en-GB" sz="2000" dirty="0" err="1"/>
+              <a:t>Leidelmeijer</a:t>
+            </a:r>
+            <a:r>
+              <a:rPr lang="en-GB" sz="2000" dirty="0"/>
+              <a:t>, K., </a:t>
+            </a:r>
+            <a:r>
+              <a:rPr lang="en-GB" sz="2000" dirty="0" err="1"/>
+              <a:t>Burema</a:t>
+            </a:r>
+            <a:r>
+              <a:rPr lang="en-GB" sz="2000" dirty="0"/>
+              <a:t>, F., Halbersma, R., </a:t>
+            </a:r>
+            <a:r>
+              <a:rPr lang="en-GB" sz="2000" dirty="0" err="1"/>
+              <a:t>Middeldorp</a:t>
+            </a:r>
+            <a:r>
+              <a:rPr lang="en-GB" sz="2000" dirty="0"/>
+              <a:t>, M. &amp; Veldkamp, J. (2021). </a:t>
+            </a:r>
+            <a:r>
+              <a:rPr lang="en-GB" sz="2000" dirty="0" err="1"/>
+              <a:t>Leefbaarometer</a:t>
+            </a:r>
+            <a:r>
+              <a:rPr lang="en-GB" sz="2000" dirty="0"/>
+              <a:t> 3.0 </a:t>
+            </a:r>
+            <a:r>
+              <a:rPr lang="en-GB" sz="2000" dirty="0" err="1"/>
+              <a:t>Instrumentontwikkeling</a:t>
+            </a:r>
+            <a:r>
+              <a:rPr lang="en-GB" sz="2000" dirty="0"/>
+              <a:t>. </a:t>
+            </a:r>
+            <a:r>
+              <a:rPr lang="en-US" sz="2000" dirty="0">
+                <a:hlinkClick r:id="rId3"/>
+              </a:rPr>
+              <a:t>https://www.leefbaarometer.nl/resources/LBM3Instrumentontwikkeling.pdf</a:t>
+            </a:r>
+            <a:r>
+              <a:rPr lang="en-US" sz="2000" dirty="0"/>
+              <a:t>  </a:t>
+            </a:r>
+          </a:p>
+          <a:p>
+            <a:pPr marL="0" indent="0">
+              <a:buNone/>
+            </a:pPr>
+            <a:endParaRPr lang="en-NL" sz="2000" dirty="0"/>
+          </a:p>
+        </p:txBody>
+      </p:sp>
+    </p:spTree>
+    <p:extLst>
+      <p:ext uri="{BB962C8B-B14F-4D97-AF65-F5344CB8AC3E}">
+        <p14:creationId xmlns:p14="http://schemas.microsoft.com/office/powerpoint/2010/main" val="3829100217"/>
+      </p:ext>
+    </p:extLst>
+  </p:cSld>
+  <p:clrMapOvr>
+    <a:masterClrMapping/>
+  </p:clrMapOvr>
+</p:sld>
+</file>
+
 <file path=ppt/slides/slide2.xml><?xml version="1.0" encoding="utf-8"?>
 <p:sld xmlns:a="http://schemas.openxmlformats.org/drawingml/2006/main" xmlns:r="http://schemas.openxmlformats.org/officeDocument/2006/relationships" xmlns:p="http://schemas.openxmlformats.org/presentationml/2006/main">
   <p:cSld>
@@ -7868,7 +8772,7 @@
           <p:cNvPr id="2" name="Title 1">
             <a:extLst>
               <a:ext uri="{FF2B5EF4-FFF2-40B4-BE49-F238E27FC236}">
-                <a16:creationId xmlns:a16="http://schemas.microsoft.com/office/drawing/2014/main" id="{BB2C1B1B-F4CC-70BF-BFB0-34192FEE8037}"/>
+                <a16:creationId xmlns:a16="http://schemas.microsoft.com/office/drawing/2014/main" id="{2C0CD4AA-BA5C-71F8-F212-C45A214F0193}"/>
               </a:ext>
             </a:extLst>
           </p:cNvPr>
@@ -7881,20 +8785,15 @@
         </p:nvSpPr>
         <p:spPr/>
         <p:txBody>
-          <a:bodyPr>
-            <a:normAutofit/>
-          </a:bodyPr>
+          <a:bodyPr/>
           <a:lstStyle/>
           <a:p>
             <a:r>
-              <a:rPr lang="en-US" sz="4000" b="1" dirty="0">
+              <a:rPr lang="en-US" b="1" dirty="0">
                 <a:latin typeface="Aptos" panose="020B0004020202020204" pitchFamily="34" charset="0"/>
               </a:rPr>
-              <a:t>BACKGROUND LITERATURE</a:t>
-            </a:r>
-            <a:endParaRPr lang="en-NL" sz="4000" b="1" dirty="0">
-              <a:latin typeface="Aptos" panose="020B0004020202020204" pitchFamily="34" charset="0"/>
-            </a:endParaRPr>
+              <a:t>CONTENTS</a:t>
+            </a:r>
           </a:p>
         </p:txBody>
       </p:sp>
@@ -7903,7 +8802,7 @@
           <p:cNvPr id="3" name="Content Placeholder 2">
             <a:extLst>
               <a:ext uri="{FF2B5EF4-FFF2-40B4-BE49-F238E27FC236}">
-                <a16:creationId xmlns:a16="http://schemas.microsoft.com/office/drawing/2014/main" id="{9414BB4C-2FD9-D6E0-8F1E-ADD0CDCD6192}"/>
+                <a16:creationId xmlns:a16="http://schemas.microsoft.com/office/drawing/2014/main" id="{462B88E1-5B37-04A2-26AA-C1C21DF3DCAE}"/>
               </a:ext>
             </a:extLst>
           </p:cNvPr>
@@ -7914,119 +8813,107 @@
             <p:ph idx="1"/>
           </p:nvPr>
         </p:nvSpPr>
-        <p:spPr/>
+        <p:spPr>
+          <a:xfrm>
+            <a:off x="838200" y="1499128"/>
+            <a:ext cx="10515600" cy="4110101"/>
+          </a:xfrm>
+        </p:spPr>
         <p:txBody>
           <a:bodyPr>
-            <a:normAutofit lnSpcReduction="10000"/>
+            <a:normAutofit fontScale="85000" lnSpcReduction="20000"/>
           </a:bodyPr>
           <a:lstStyle/>
           <a:p>
             <a:r>
-              <a:rPr lang="en-GB" dirty="0" err="1"/>
-              <a:t>Livability</a:t>
+              <a:rPr lang="en-US" dirty="0"/>
+              <a:t>What is Livability score</a:t>
+            </a:r>
+          </a:p>
+          <a:p>
+            <a:r>
+              <a:rPr lang="en-US" dirty="0"/>
+              <a:t>Background literature</a:t>
+            </a:r>
+          </a:p>
+          <a:p>
+            <a:r>
+              <a:rPr lang="en-US" dirty="0"/>
+              <a:t>Research aim and questions</a:t>
+            </a:r>
+          </a:p>
+          <a:p>
+            <a:r>
+              <a:rPr lang="en-US" dirty="0"/>
+              <a:t>Overview of Livability score</a:t>
+            </a:r>
+          </a:p>
+          <a:p>
+            <a:r>
+              <a:rPr lang="en-US" dirty="0"/>
+              <a:t>Data</a:t>
+            </a:r>
+          </a:p>
+          <a:p>
+            <a:r>
+              <a:rPr lang="en-US" dirty="0"/>
+              <a:t>Methodology</a:t>
+            </a:r>
+          </a:p>
+          <a:p>
+            <a:r>
+              <a:rPr lang="en-US" dirty="0"/>
+              <a:t>Results</a:t>
+            </a:r>
+          </a:p>
+          <a:p>
+            <a:r>
+              <a:rPr lang="en-US" dirty="0"/>
+              <a:t>Discussion: findings</a:t>
+            </a:r>
+          </a:p>
+          <a:p>
+            <a:r>
+              <a:rPr lang="en-US" dirty="0"/>
+              <a:t>Discussion: limitations</a:t>
+            </a:r>
+          </a:p>
+          <a:p>
+            <a:r>
+              <a:rPr lang="en-US" dirty="0"/>
+              <a:t>Discussion: future work</a:t>
+            </a:r>
+          </a:p>
+          <a:p>
+            <a:r>
+              <a:rPr lang="en-US" dirty="0"/>
+              <a:t>Reproducibility</a:t>
+            </a:r>
+            <a:r>
+              <a:rPr lang="ru-RU" dirty="0"/>
+              <a:t> </a:t>
             </a:r>
             <a:r>
               <a:rPr lang="en-GB" dirty="0"/>
-              <a:t> score</a:t>
-            </a:r>
-            <a:br>
-              <a:rPr lang="en-GB" dirty="0"/>
-            </a:br>
-            <a:r>
-              <a:rPr lang="en-GB" dirty="0"/>
-              <a:t>– definition</a:t>
-            </a:r>
-            <a:br>
-              <a:rPr lang="en-GB" dirty="0"/>
-            </a:br>
-            <a:r>
-              <a:rPr lang="en-GB" dirty="0"/>
-              <a:t>- what is based on</a:t>
-            </a:r>
-            <a:br>
-              <a:rPr lang="en-GB" dirty="0"/>
-            </a:br>
-            <a:r>
-              <a:rPr lang="en-GB" dirty="0"/>
-              <a:t>- limitations - lack of transparency in the documentation? Reliance on regulations and few variables that account for people’s actual experiences</a:t>
-            </a:r>
-          </a:p>
-          <a:p>
-            <a:r>
-              <a:rPr lang="en-GB" dirty="0"/>
-              <a:t>Changing conceptions of what </a:t>
-            </a:r>
-            <a:r>
-              <a:rPr lang="en-GB" dirty="0" err="1"/>
-              <a:t>livability</a:t>
-            </a:r>
-            <a:r>
-              <a:rPr lang="en-GB" dirty="0"/>
-              <a:t> means in the Netherlands</a:t>
-            </a:r>
-          </a:p>
-          <a:p>
-            <a:r>
-              <a:rPr lang="en-GB" dirty="0"/>
-              <a:t>Gap: objective and actual understandings of </a:t>
-            </a:r>
-            <a:r>
-              <a:rPr lang="en-GB" dirty="0" err="1"/>
-              <a:t>livability</a:t>
-            </a:r>
-            <a:endParaRPr lang="en-GB" dirty="0"/>
-          </a:p>
-          <a:p>
-            <a:r>
-              <a:rPr lang="en-GB" dirty="0"/>
-              <a:t>Using Exposome, </a:t>
-            </a:r>
-            <a:r>
-              <a:rPr lang="en-GB" dirty="0" err="1"/>
-              <a:t>Firmbackbone</a:t>
-            </a:r>
-            <a:r>
-              <a:rPr lang="en-GB" dirty="0"/>
-              <a:t>, LISS to try understand the predictors of </a:t>
-            </a:r>
-            <a:r>
-              <a:rPr lang="en-GB" dirty="0" err="1"/>
-              <a:t>livability</a:t>
-            </a:r>
-            <a:r>
-              <a:rPr lang="en-GB" dirty="0"/>
-              <a:t> </a:t>
-            </a:r>
-          </a:p>
-          <a:p>
-            <a:r>
-              <a:rPr lang="en-GB" dirty="0"/>
-              <a:t>Compare perception with “objective” </a:t>
-            </a:r>
-            <a:r>
-              <a:rPr lang="en-GB" dirty="0" err="1"/>
-              <a:t>livability</a:t>
-            </a:r>
-            <a:r>
-              <a:rPr lang="en-GB" dirty="0"/>
-              <a:t> score </a:t>
-            </a:r>
-          </a:p>
-          <a:p>
-            <a:endParaRPr lang="en-GB" dirty="0"/>
-          </a:p>
-          <a:p>
-            <a:endParaRPr lang="en-GB" dirty="0"/>
-          </a:p>
-          <a:p>
-            <a:endParaRPr lang="en-GB" dirty="0"/>
+              <a:t>and ethnical considerations</a:t>
+            </a:r>
+            <a:endParaRPr lang="en-US" dirty="0"/>
+          </a:p>
+          <a:p>
+            <a:r>
+              <a:rPr lang="en-US" dirty="0"/>
+              <a:t>References</a:t>
+            </a:r>
+          </a:p>
+          <a:p>
+            <a:endParaRPr lang="en-US" dirty="0"/>
           </a:p>
         </p:txBody>
       </p:sp>
     </p:spTree>
     <p:extLst>
       <p:ext uri="{BB962C8B-B14F-4D97-AF65-F5344CB8AC3E}">
-        <p14:creationId xmlns:p14="http://schemas.microsoft.com/office/powerpoint/2010/main" val="2184668423"/>
+        <p14:creationId xmlns:p14="http://schemas.microsoft.com/office/powerpoint/2010/main" val="3744038781"/>
       </p:ext>
     </p:extLst>
   </p:cSld>
@@ -8058,7 +8945,7 @@
           <p:cNvPr id="2" name="Title 1">
             <a:extLst>
               <a:ext uri="{FF2B5EF4-FFF2-40B4-BE49-F238E27FC236}">
-                <a16:creationId xmlns:a16="http://schemas.microsoft.com/office/drawing/2014/main" id="{3E3114CE-3A47-AFD5-8B03-147194BCDE56}"/>
+                <a16:creationId xmlns:a16="http://schemas.microsoft.com/office/drawing/2014/main" id="{6215D309-BD8D-BF96-AE15-FD6F2E14DC39}"/>
               </a:ext>
             </a:extLst>
           </p:cNvPr>
@@ -8075,8 +8962,10 @@
           <a:lstStyle/>
           <a:p>
             <a:r>
-              <a:rPr lang="en-US" b="1" dirty="0"/>
-              <a:t>RESEARCH QUESTIONS</a:t>
+              <a:rPr lang="en-US" b="1" dirty="0">
+                <a:latin typeface="Aptos" panose="020B0004020202020204" pitchFamily="34" charset="0"/>
+              </a:rPr>
+              <a:t>WHAT IS LIVABILITY SCORE</a:t>
             </a:r>
           </a:p>
         </p:txBody>
@@ -8086,7 +8975,7 @@
           <p:cNvPr id="3" name="Content Placeholder 2">
             <a:extLst>
               <a:ext uri="{FF2B5EF4-FFF2-40B4-BE49-F238E27FC236}">
-                <a16:creationId xmlns:a16="http://schemas.microsoft.com/office/drawing/2014/main" id="{18DFE17C-99DB-E666-E7C2-0E384C99A025}"/>
+                <a16:creationId xmlns:a16="http://schemas.microsoft.com/office/drawing/2014/main" id="{2838A703-8E6A-3C14-DA4A-8978519EB3DB}"/>
               </a:ext>
             </a:extLst>
           </p:cNvPr>
@@ -8097,61 +8986,507 @@
             <p:ph idx="1"/>
           </p:nvPr>
         </p:nvSpPr>
-        <p:spPr/>
+        <p:spPr>
+          <a:xfrm>
+            <a:off x="838200" y="1591450"/>
+            <a:ext cx="10515600" cy="3859742"/>
+          </a:xfrm>
+        </p:spPr>
         <p:txBody>
           <a:bodyPr/>
           <a:lstStyle/>
           <a:p>
-            <a:pPr marL="457200" indent="-457200">
-              <a:buAutoNum type="arabicPeriod"/>
-            </a:pPr>
+            <a:r>
+              <a:rPr lang="en-US" b="1" dirty="0"/>
+              <a:t>Leefbaarometer</a:t>
+            </a:r>
+            <a:r>
+              <a:rPr lang="ru-RU" dirty="0"/>
+              <a:t> (</a:t>
+            </a:r>
             <a:r>
               <a:rPr lang="en-GB" dirty="0"/>
-              <a:t>What alternative model using administrative and survey data can predict </a:t>
-            </a:r>
-            <a:r>
-              <a:rPr lang="en-GB" dirty="0" err="1"/>
-              <a:t>livability</a:t>
-            </a:r>
+              <a:t>Livability Meter) – an instrument that provides an estimate of livability based on a large number of characteristics of the residential environment.</a:t>
+            </a:r>
+          </a:p>
+          <a:p>
             <a:r>
               <a:rPr lang="en-GB" dirty="0"/>
-              <a:t> score in the Netherlands?</a:t>
-            </a:r>
+              <a:t>Is intended to provide a picture of where livability is expected to be good or poor; is a monitoring instrument</a:t>
+            </a:r>
+          </a:p>
+          <a:p>
             <a:endParaRPr lang="ru-RU" dirty="0"/>
           </a:p>
           <a:p>
-            <a:pPr marL="457200" indent="-457200">
-              <a:buAutoNum type="arabicPeriod"/>
-            </a:pPr>
-            <a:r>
-              <a:rPr lang="en-GB" dirty="0"/>
-              <a:t>What model can represent people’s perceptions of </a:t>
-            </a:r>
-            <a:r>
-              <a:rPr lang="en-GB" dirty="0" err="1"/>
-              <a:t>livability</a:t>
-            </a:r>
-            <a:r>
-              <a:rPr lang="en-GB" dirty="0"/>
-              <a:t> in the Netherlands?</a:t>
-            </a:r>
-          </a:p>
-          <a:p>
-            <a:pPr marL="457200" indent="-457200">
-              <a:buAutoNum type="arabicPeriod"/>
-            </a:pPr>
-            <a:r>
-              <a:rPr lang="en-GB" dirty="0"/>
-              <a:t>What are the differences in scoring …?</a:t>
-            </a:r>
             <a:endParaRPr lang="en-US" dirty="0"/>
+          </a:p>
+        </p:txBody>
+      </p:sp>
+      <p:sp>
+        <p:nvSpPr>
+          <p:cNvPr id="4" name="TextBox 3">
+            <a:extLst>
+              <a:ext uri="{FF2B5EF4-FFF2-40B4-BE49-F238E27FC236}">
+                <a16:creationId xmlns:a16="http://schemas.microsoft.com/office/drawing/2014/main" id="{935A0AC2-DDF9-DEE0-DFF4-CC79A7E30FFB}"/>
+              </a:ext>
+            </a:extLst>
+          </p:cNvPr>
+          <p:cNvSpPr txBox="1"/>
+          <p:nvPr/>
+        </p:nvSpPr>
+        <p:spPr>
+          <a:xfrm>
+            <a:off x="838200" y="6211229"/>
+            <a:ext cx="10346473" cy="276999"/>
+          </a:xfrm>
+          <a:prstGeom prst="rect">
+            <a:avLst/>
+          </a:prstGeom>
+          <a:noFill/>
+        </p:spPr>
+        <p:txBody>
+          <a:bodyPr wrap="square" rtlCol="0">
+            <a:spAutoFit/>
+          </a:bodyPr>
+          <a:lstStyle/>
+          <a:p>
+            <a:r>
+              <a:rPr lang="en-US" sz="1200" dirty="0"/>
+              <a:t>Source: Leefbaarometer 3.0 </a:t>
+            </a:r>
+            <a:r>
+              <a:rPr lang="en-US" sz="1200" dirty="0" err="1"/>
+              <a:t>Instrumentontwikkeling</a:t>
+            </a:r>
+            <a:r>
+              <a:rPr lang="en-US" sz="1200" dirty="0"/>
+              <a:t> </a:t>
+            </a:r>
+            <a:r>
+              <a:rPr lang="en-US" sz="1200" dirty="0">
+                <a:hlinkClick r:id="rId2"/>
+              </a:rPr>
+              <a:t>https://www.leefbaarometer.nl/resources/LBM3Instrumentontwikkeling.pdf</a:t>
+            </a:r>
+            <a:r>
+              <a:rPr lang="en-US" sz="1200" dirty="0"/>
+              <a:t> </a:t>
+            </a:r>
+          </a:p>
+        </p:txBody>
+      </p:sp>
+      <p:sp>
+        <p:nvSpPr>
+          <p:cNvPr id="5" name="Rounded Rectangle 4">
+            <a:extLst>
+              <a:ext uri="{FF2B5EF4-FFF2-40B4-BE49-F238E27FC236}">
+                <a16:creationId xmlns:a16="http://schemas.microsoft.com/office/drawing/2014/main" id="{8A625C58-C048-815C-5253-11DC804B04AC}"/>
+              </a:ext>
+            </a:extLst>
+          </p:cNvPr>
+          <p:cNvSpPr/>
+          <p:nvPr/>
+        </p:nvSpPr>
+        <p:spPr>
+          <a:xfrm>
+            <a:off x="1191322" y="3740587"/>
+            <a:ext cx="1839952" cy="1525963"/>
+          </a:xfrm>
+          <a:prstGeom prst="roundRect">
+            <a:avLst/>
+          </a:prstGeom>
+          <a:gradFill flip="none" rotWithShape="1">
+            <a:gsLst>
+              <a:gs pos="0">
+                <a:schemeClr val="accent1">
+                  <a:tint val="66000"/>
+                  <a:satMod val="160000"/>
+                </a:schemeClr>
+              </a:gs>
+              <a:gs pos="50000">
+                <a:schemeClr val="accent1">
+                  <a:tint val="44500"/>
+                  <a:satMod val="160000"/>
+                </a:schemeClr>
+              </a:gs>
+              <a:gs pos="100000">
+                <a:schemeClr val="accent1">
+                  <a:tint val="23500"/>
+                  <a:satMod val="160000"/>
+                </a:schemeClr>
+              </a:gs>
+            </a:gsLst>
+            <a:path path="circle">
+              <a:fillToRect t="100000" r="100000"/>
+            </a:path>
+            <a:tileRect l="-100000" b="-100000"/>
+          </a:gradFill>
+        </p:spPr>
+        <p:style>
+          <a:lnRef idx="2">
+            <a:schemeClr val="accent1">
+              <a:shade val="15000"/>
+            </a:schemeClr>
+          </a:lnRef>
+          <a:fillRef idx="1">
+            <a:schemeClr val="accent1"/>
+          </a:fillRef>
+          <a:effectRef idx="0">
+            <a:schemeClr val="accent1"/>
+          </a:effectRef>
+          <a:fontRef idx="minor">
+            <a:schemeClr val="lt1"/>
+          </a:fontRef>
+        </p:style>
+        <p:txBody>
+          <a:bodyPr rtlCol="0" anchor="ctr"/>
+          <a:lstStyle/>
+          <a:p>
+            <a:pPr algn="ctr"/>
+            <a:r>
+              <a:rPr lang="en-US" dirty="0">
+                <a:solidFill>
+                  <a:schemeClr val="tx1"/>
+                </a:solidFill>
+              </a:rPr>
+              <a:t>Environment</a:t>
+            </a:r>
+          </a:p>
+        </p:txBody>
+      </p:sp>
+      <p:sp>
+        <p:nvSpPr>
+          <p:cNvPr id="6" name="Rounded Rectangle 5">
+            <a:extLst>
+              <a:ext uri="{FF2B5EF4-FFF2-40B4-BE49-F238E27FC236}">
+                <a16:creationId xmlns:a16="http://schemas.microsoft.com/office/drawing/2014/main" id="{FDF02185-E1A3-55FD-4A51-51D2F638035C}"/>
+              </a:ext>
+            </a:extLst>
+          </p:cNvPr>
+          <p:cNvSpPr/>
+          <p:nvPr/>
+        </p:nvSpPr>
+        <p:spPr>
+          <a:xfrm>
+            <a:off x="3183673" y="3740587"/>
+            <a:ext cx="1839952" cy="1525963"/>
+          </a:xfrm>
+          <a:prstGeom prst="roundRect">
+            <a:avLst/>
+          </a:prstGeom>
+          <a:gradFill flip="none" rotWithShape="1">
+            <a:gsLst>
+              <a:gs pos="0">
+                <a:schemeClr val="accent1">
+                  <a:tint val="66000"/>
+                  <a:satMod val="160000"/>
+                </a:schemeClr>
+              </a:gs>
+              <a:gs pos="50000">
+                <a:schemeClr val="accent1">
+                  <a:tint val="44500"/>
+                  <a:satMod val="160000"/>
+                </a:schemeClr>
+              </a:gs>
+              <a:gs pos="100000">
+                <a:schemeClr val="accent1">
+                  <a:tint val="23500"/>
+                  <a:satMod val="160000"/>
+                </a:schemeClr>
+              </a:gs>
+            </a:gsLst>
+            <a:path path="circle">
+              <a:fillToRect t="100000" r="100000"/>
+            </a:path>
+            <a:tileRect l="-100000" b="-100000"/>
+          </a:gradFill>
+        </p:spPr>
+        <p:style>
+          <a:lnRef idx="2">
+            <a:schemeClr val="accent1">
+              <a:shade val="15000"/>
+            </a:schemeClr>
+          </a:lnRef>
+          <a:fillRef idx="1">
+            <a:schemeClr val="accent1"/>
+          </a:fillRef>
+          <a:effectRef idx="0">
+            <a:schemeClr val="accent1"/>
+          </a:effectRef>
+          <a:fontRef idx="minor">
+            <a:schemeClr val="lt1"/>
+          </a:fontRef>
+        </p:style>
+        <p:txBody>
+          <a:bodyPr rtlCol="0" anchor="ctr"/>
+          <a:lstStyle/>
+          <a:p>
+            <a:pPr algn="ctr"/>
+            <a:r>
+              <a:rPr lang="en-US" dirty="0">
+                <a:solidFill>
+                  <a:schemeClr val="tx1"/>
+                </a:solidFill>
+              </a:rPr>
+              <a:t>Housing</a:t>
+            </a:r>
+          </a:p>
+        </p:txBody>
+      </p:sp>
+      <p:sp>
+        <p:nvSpPr>
+          <p:cNvPr id="7" name="Rounded Rectangle 6">
+            <a:extLst>
+              <a:ext uri="{FF2B5EF4-FFF2-40B4-BE49-F238E27FC236}">
+                <a16:creationId xmlns:a16="http://schemas.microsoft.com/office/drawing/2014/main" id="{1E59471D-39F4-FEEB-2D92-DC9142EC690A}"/>
+              </a:ext>
+            </a:extLst>
+          </p:cNvPr>
+          <p:cNvSpPr/>
+          <p:nvPr/>
+        </p:nvSpPr>
+        <p:spPr>
+          <a:xfrm>
+            <a:off x="5176024" y="3740586"/>
+            <a:ext cx="1839952" cy="1525963"/>
+          </a:xfrm>
+          <a:prstGeom prst="roundRect">
+            <a:avLst/>
+          </a:prstGeom>
+          <a:gradFill flip="none" rotWithShape="1">
+            <a:gsLst>
+              <a:gs pos="0">
+                <a:schemeClr val="accent1">
+                  <a:tint val="66000"/>
+                  <a:satMod val="160000"/>
+                </a:schemeClr>
+              </a:gs>
+              <a:gs pos="50000">
+                <a:schemeClr val="accent1">
+                  <a:tint val="44500"/>
+                  <a:satMod val="160000"/>
+                </a:schemeClr>
+              </a:gs>
+              <a:gs pos="100000">
+                <a:schemeClr val="accent1">
+                  <a:tint val="23500"/>
+                  <a:satMod val="160000"/>
+                </a:schemeClr>
+              </a:gs>
+            </a:gsLst>
+            <a:path path="circle">
+              <a:fillToRect t="100000" r="100000"/>
+            </a:path>
+            <a:tileRect l="-100000" b="-100000"/>
+          </a:gradFill>
+        </p:spPr>
+        <p:style>
+          <a:lnRef idx="2">
+            <a:schemeClr val="accent1">
+              <a:shade val="15000"/>
+            </a:schemeClr>
+          </a:lnRef>
+          <a:fillRef idx="1">
+            <a:schemeClr val="accent1"/>
+          </a:fillRef>
+          <a:effectRef idx="0">
+            <a:schemeClr val="accent1"/>
+          </a:effectRef>
+          <a:fontRef idx="minor">
+            <a:schemeClr val="lt1"/>
+          </a:fontRef>
+        </p:style>
+        <p:txBody>
+          <a:bodyPr rtlCol="0" anchor="ctr"/>
+          <a:lstStyle/>
+          <a:p>
+            <a:pPr algn="ctr"/>
+            <a:r>
+              <a:rPr lang="en-US" dirty="0">
+                <a:solidFill>
+                  <a:schemeClr val="tx1"/>
+                </a:solidFill>
+              </a:rPr>
+              <a:t>Amenities</a:t>
+            </a:r>
+          </a:p>
+        </p:txBody>
+      </p:sp>
+      <p:sp>
+        <p:nvSpPr>
+          <p:cNvPr id="8" name="Rounded Rectangle 7">
+            <a:extLst>
+              <a:ext uri="{FF2B5EF4-FFF2-40B4-BE49-F238E27FC236}">
+                <a16:creationId xmlns:a16="http://schemas.microsoft.com/office/drawing/2014/main" id="{D1CC55CD-7811-E068-5A7C-6235908397AA}"/>
+              </a:ext>
+            </a:extLst>
+          </p:cNvPr>
+          <p:cNvSpPr/>
+          <p:nvPr/>
+        </p:nvSpPr>
+        <p:spPr>
+          <a:xfrm>
+            <a:off x="7168375" y="3740585"/>
+            <a:ext cx="1839952" cy="1525963"/>
+          </a:xfrm>
+          <a:prstGeom prst="roundRect">
+            <a:avLst/>
+          </a:prstGeom>
+          <a:gradFill flip="none" rotWithShape="1">
+            <a:gsLst>
+              <a:gs pos="0">
+                <a:schemeClr val="accent1">
+                  <a:tint val="66000"/>
+                  <a:satMod val="160000"/>
+                </a:schemeClr>
+              </a:gs>
+              <a:gs pos="50000">
+                <a:schemeClr val="accent1">
+                  <a:tint val="44500"/>
+                  <a:satMod val="160000"/>
+                </a:schemeClr>
+              </a:gs>
+              <a:gs pos="100000">
+                <a:schemeClr val="accent1">
+                  <a:tint val="23500"/>
+                  <a:satMod val="160000"/>
+                </a:schemeClr>
+              </a:gs>
+            </a:gsLst>
+            <a:path path="circle">
+              <a:fillToRect t="100000" r="100000"/>
+            </a:path>
+            <a:tileRect l="-100000" b="-100000"/>
+          </a:gradFill>
+        </p:spPr>
+        <p:style>
+          <a:lnRef idx="2">
+            <a:schemeClr val="accent1">
+              <a:shade val="15000"/>
+            </a:schemeClr>
+          </a:lnRef>
+          <a:fillRef idx="1">
+            <a:schemeClr val="accent1"/>
+          </a:fillRef>
+          <a:effectRef idx="0">
+            <a:schemeClr val="accent1"/>
+          </a:effectRef>
+          <a:fontRef idx="minor">
+            <a:schemeClr val="lt1"/>
+          </a:fontRef>
+        </p:style>
+        <p:txBody>
+          <a:bodyPr rtlCol="0" anchor="ctr"/>
+          <a:lstStyle/>
+          <a:p>
+            <a:pPr algn="ctr"/>
+            <a:r>
+              <a:rPr lang="en-US" dirty="0">
+                <a:solidFill>
+                  <a:schemeClr val="tx1"/>
+                </a:solidFill>
+              </a:rPr>
+              <a:t>Social</a:t>
+            </a:r>
+            <a:r>
+              <a:rPr lang="en-US" dirty="0"/>
+              <a:t> </a:t>
+            </a:r>
+            <a:r>
+              <a:rPr lang="en-US" dirty="0">
+                <a:solidFill>
+                  <a:schemeClr val="tx1"/>
+                </a:solidFill>
+              </a:rPr>
+              <a:t>cohesion</a:t>
+            </a:r>
+          </a:p>
+        </p:txBody>
+      </p:sp>
+      <p:sp>
+        <p:nvSpPr>
+          <p:cNvPr id="9" name="Rounded Rectangle 8">
+            <a:extLst>
+              <a:ext uri="{FF2B5EF4-FFF2-40B4-BE49-F238E27FC236}">
+                <a16:creationId xmlns:a16="http://schemas.microsoft.com/office/drawing/2014/main" id="{6C4F4B04-1FFE-9456-9874-1E9852CD1A4E}"/>
+              </a:ext>
+            </a:extLst>
+          </p:cNvPr>
+          <p:cNvSpPr/>
+          <p:nvPr/>
+        </p:nvSpPr>
+        <p:spPr>
+          <a:xfrm>
+            <a:off x="9160726" y="3740585"/>
+            <a:ext cx="1839952" cy="1525963"/>
+          </a:xfrm>
+          <a:prstGeom prst="roundRect">
+            <a:avLst/>
+          </a:prstGeom>
+          <a:gradFill flip="none" rotWithShape="1">
+            <a:gsLst>
+              <a:gs pos="0">
+                <a:schemeClr val="accent1">
+                  <a:tint val="66000"/>
+                  <a:satMod val="160000"/>
+                </a:schemeClr>
+              </a:gs>
+              <a:gs pos="50000">
+                <a:schemeClr val="accent1">
+                  <a:tint val="44500"/>
+                  <a:satMod val="160000"/>
+                </a:schemeClr>
+              </a:gs>
+              <a:gs pos="100000">
+                <a:schemeClr val="accent1">
+                  <a:tint val="23500"/>
+                  <a:satMod val="160000"/>
+                </a:schemeClr>
+              </a:gs>
+            </a:gsLst>
+            <a:path path="circle">
+              <a:fillToRect t="100000" r="100000"/>
+            </a:path>
+            <a:tileRect l="-100000" b="-100000"/>
+          </a:gradFill>
+        </p:spPr>
+        <p:style>
+          <a:lnRef idx="2">
+            <a:schemeClr val="accent1">
+              <a:shade val="15000"/>
+            </a:schemeClr>
+          </a:lnRef>
+          <a:fillRef idx="1">
+            <a:schemeClr val="accent1"/>
+          </a:fillRef>
+          <a:effectRef idx="0">
+            <a:schemeClr val="accent1"/>
+          </a:effectRef>
+          <a:fontRef idx="minor">
+            <a:schemeClr val="lt1"/>
+          </a:fontRef>
+        </p:style>
+        <p:txBody>
+          <a:bodyPr rtlCol="0" anchor="ctr"/>
+          <a:lstStyle/>
+          <a:p>
+            <a:pPr algn="ctr"/>
+            <a:r>
+              <a:rPr lang="en-US" dirty="0">
+                <a:solidFill>
+                  <a:schemeClr val="tx1"/>
+                </a:solidFill>
+              </a:rPr>
+              <a:t>Safety</a:t>
+            </a:r>
           </a:p>
         </p:txBody>
       </p:sp>
     </p:spTree>
     <p:extLst>
       <p:ext uri="{BB962C8B-B14F-4D97-AF65-F5344CB8AC3E}">
-        <p14:creationId xmlns:p14="http://schemas.microsoft.com/office/powerpoint/2010/main" val="245806625"/>
+        <p14:creationId xmlns:p14="http://schemas.microsoft.com/office/powerpoint/2010/main" val="939603383"/>
       </p:ext>
     </p:extLst>
   </p:cSld>
@@ -8166,7 +9501,13 @@
   <p:cSld>
     <p:spTree>
       <p:nvGrpSpPr>
-        <p:cNvPr id="1" name=""/>
+        <p:cNvPr id="1" name="">
+          <a:extLst>
+            <a:ext uri="{FF2B5EF4-FFF2-40B4-BE49-F238E27FC236}">
+              <a16:creationId xmlns:a16="http://schemas.microsoft.com/office/drawing/2014/main" id="{D0E98250-9428-263F-C9C5-5A97E199F829}"/>
+            </a:ext>
+          </a:extLst>
+        </p:cNvPr>
         <p:cNvGrpSpPr/>
         <p:nvPr/>
       </p:nvGrpSpPr>
@@ -8183,7 +9524,7 @@
           <p:cNvPr id="2" name="Title 1">
             <a:extLst>
               <a:ext uri="{FF2B5EF4-FFF2-40B4-BE49-F238E27FC236}">
-                <a16:creationId xmlns:a16="http://schemas.microsoft.com/office/drawing/2014/main" id="{2667DB29-D704-7649-E63C-610D8F7CEBAF}"/>
+                <a16:creationId xmlns:a16="http://schemas.microsoft.com/office/drawing/2014/main" id="{DA17888F-CF55-7EDD-093F-A0C54340FC31}"/>
               </a:ext>
             </a:extLst>
           </p:cNvPr>
@@ -8205,172 +9546,103 @@
               <a:rPr lang="en-US" sz="4000" b="1" dirty="0">
                 <a:latin typeface="Aptos" panose="020B0004020202020204" pitchFamily="34" charset="0"/>
               </a:rPr>
-              <a:t>DATA</a:t>
-            </a:r>
-            <a:endParaRPr lang="en-NL" sz="4000" dirty="0"/>
-          </a:p>
-        </p:txBody>
-      </p:sp>
-      <p:pic>
-        <p:nvPicPr>
-          <p:cNvPr id="1026" name="Picture 2" descr="Survey Data Netherlands - About">
-            <a:extLst>
-              <a:ext uri="{FF2B5EF4-FFF2-40B4-BE49-F238E27FC236}">
-                <a16:creationId xmlns:a16="http://schemas.microsoft.com/office/drawing/2014/main" id="{912863B4-A454-920F-55D4-E828CD9836AF}"/>
-              </a:ext>
-            </a:extLst>
-          </p:cNvPr>
-          <p:cNvPicPr>
-            <a:picLocks noChangeAspect="1" noChangeArrowheads="1"/>
-          </p:cNvPicPr>
-          <p:nvPr/>
-        </p:nvPicPr>
-        <p:blipFill>
-          <a:blip r:embed="rId3">
-            <a:extLst>
-              <a:ext uri="{28A0092B-C50C-407E-A947-70E740481C1C}">
-                <a14:useLocalDpi xmlns:a14="http://schemas.microsoft.com/office/drawing/2010/main" val="0"/>
-              </a:ext>
-            </a:extLst>
-          </a:blip>
-          <a:srcRect/>
-          <a:stretch>
-            <a:fillRect/>
-          </a:stretch>
-        </p:blipFill>
-        <p:spPr bwMode="auto">
-          <a:xfrm>
-            <a:off x="838200" y="2145844"/>
-            <a:ext cx="1958068" cy="1958068"/>
-          </a:xfrm>
-          <a:prstGeom prst="rect">
-            <a:avLst/>
-          </a:prstGeom>
-          <a:noFill/>
-          <a:extLst>
-            <a:ext uri="{909E8E84-426E-40DD-AFC4-6F175D3DCCD1}">
-              <a14:hiddenFill xmlns:a14="http://schemas.microsoft.com/office/drawing/2010/main">
-                <a:solidFill>
-                  <a:srgbClr val="FFFFFF"/>
-                </a:solidFill>
-              </a14:hiddenFill>
-            </a:ext>
-          </a:extLst>
-        </p:spPr>
-      </p:pic>
-      <p:pic>
-        <p:nvPicPr>
-          <p:cNvPr id="12" name="Picture 11">
-            <a:extLst>
-              <a:ext uri="{FF2B5EF4-FFF2-40B4-BE49-F238E27FC236}">
-                <a16:creationId xmlns:a16="http://schemas.microsoft.com/office/drawing/2014/main" id="{B0B51224-3C30-98CB-EE9A-B726F75CA57A}"/>
-              </a:ext>
-            </a:extLst>
-          </p:cNvPr>
-          <p:cNvPicPr>
-            <a:picLocks noChangeAspect="1"/>
-          </p:cNvPicPr>
-          <p:nvPr/>
-        </p:nvPicPr>
-        <p:blipFill>
-          <a:blip r:embed="rId4"/>
-          <a:srcRect l="303" t="19448" r="72747" b="64625"/>
-          <a:stretch>
-            <a:fillRect/>
-          </a:stretch>
-        </p:blipFill>
-        <p:spPr>
-          <a:xfrm>
-            <a:off x="3176157" y="2303007"/>
-            <a:ext cx="4944730" cy="1643743"/>
-          </a:xfrm>
-          <a:prstGeom prst="rect">
-            <a:avLst/>
-          </a:prstGeom>
-        </p:spPr>
-      </p:pic>
-      <p:pic>
-        <p:nvPicPr>
-          <p:cNvPr id="14" name="Picture 13">
-            <a:extLst>
-              <a:ext uri="{FF2B5EF4-FFF2-40B4-BE49-F238E27FC236}">
-                <a16:creationId xmlns:a16="http://schemas.microsoft.com/office/drawing/2014/main" id="{2E34B0D6-8877-B408-5E8A-A26D9BD3BCDE}"/>
-              </a:ext>
-            </a:extLst>
-          </p:cNvPr>
-          <p:cNvPicPr>
-            <a:picLocks noChangeAspect="1"/>
-          </p:cNvPicPr>
-          <p:nvPr/>
-        </p:nvPicPr>
-        <p:blipFill>
-          <a:blip r:embed="rId5"/>
-          <a:srcRect l="1840" t="17143" r="75267" b="73175"/>
-          <a:stretch>
-            <a:fillRect/>
-          </a:stretch>
-        </p:blipFill>
-        <p:spPr>
-          <a:xfrm>
-            <a:off x="8120887" y="2642224"/>
-            <a:ext cx="4071113" cy="968573"/>
-          </a:xfrm>
-          <a:prstGeom prst="rect">
-            <a:avLst/>
-          </a:prstGeom>
-        </p:spPr>
-      </p:pic>
-      <p:pic>
-        <p:nvPicPr>
-          <p:cNvPr id="1038" name="Picture 14" descr="aivd_nl">
-            <a:extLst>
-              <a:ext uri="{FF2B5EF4-FFF2-40B4-BE49-F238E27FC236}">
-                <a16:creationId xmlns:a16="http://schemas.microsoft.com/office/drawing/2014/main" id="{2838B81E-7193-7651-E69A-11326F6CDF43}"/>
-              </a:ext>
-            </a:extLst>
-          </p:cNvPr>
-          <p:cNvPicPr>
-            <a:picLocks noChangeAspect="1" noChangeArrowheads="1"/>
-          </p:cNvPicPr>
-          <p:nvPr/>
-        </p:nvPicPr>
-        <p:blipFill>
-          <a:blip r:embed="rId6">
-            <a:extLst>
-              <a:ext uri="{28A0092B-C50C-407E-A947-70E740481C1C}">
-                <a14:useLocalDpi xmlns:a14="http://schemas.microsoft.com/office/drawing/2010/main" val="0"/>
-              </a:ext>
-            </a:extLst>
-          </a:blip>
-          <a:srcRect/>
-          <a:stretch>
-            <a:fillRect/>
-          </a:stretch>
-        </p:blipFill>
-        <p:spPr bwMode="auto">
-          <a:xfrm>
-            <a:off x="5226996" y="4103912"/>
-            <a:ext cx="2438400" cy="2438400"/>
-          </a:xfrm>
-          <a:prstGeom prst="rect">
-            <a:avLst/>
-          </a:prstGeom>
-          <a:noFill/>
-          <a:extLst>
-            <a:ext uri="{909E8E84-426E-40DD-AFC4-6F175D3DCCD1}">
-              <a14:hiddenFill xmlns:a14="http://schemas.microsoft.com/office/drawing/2010/main">
-                <a:solidFill>
-                  <a:srgbClr val="FFFFFF"/>
-                </a:solidFill>
-              </a14:hiddenFill>
-            </a:ext>
-          </a:extLst>
-        </p:spPr>
-      </p:pic>
+              <a:t>BACKGROUND LITERATURE</a:t>
+            </a:r>
+            <a:endParaRPr lang="en-NL" sz="4000" b="1" dirty="0">
+              <a:latin typeface="Aptos" panose="020B0004020202020204" pitchFamily="34" charset="0"/>
+            </a:endParaRPr>
+          </a:p>
+        </p:txBody>
+      </p:sp>
+      <p:sp>
+        <p:nvSpPr>
+          <p:cNvPr id="3" name="Content Placeholder 2">
+            <a:extLst>
+              <a:ext uri="{FF2B5EF4-FFF2-40B4-BE49-F238E27FC236}">
+                <a16:creationId xmlns:a16="http://schemas.microsoft.com/office/drawing/2014/main" id="{7221B41F-0191-34FF-5243-69C449026F90}"/>
+              </a:ext>
+            </a:extLst>
+          </p:cNvPr>
+          <p:cNvSpPr>
+            <a:spLocks noGrp="1"/>
+          </p:cNvSpPr>
+          <p:nvPr>
+            <p:ph idx="1"/>
+          </p:nvPr>
+        </p:nvSpPr>
+        <p:spPr/>
+        <p:txBody>
+          <a:bodyPr>
+            <a:normAutofit fontScale="92500" lnSpcReduction="20000"/>
+          </a:bodyPr>
+          <a:lstStyle/>
+          <a:p>
+            <a:r>
+              <a:rPr lang="en-GB" sz="2000" dirty="0"/>
+              <a:t>Concept of ‘livability’ is very fluid and changes over time (Kaal, 2011; </a:t>
+            </a:r>
+            <a:r>
+              <a:rPr lang="en-GB" sz="2000" dirty="0" err="1"/>
+              <a:t>Mandemakers</a:t>
+            </a:r>
+            <a:r>
+              <a:rPr lang="en-GB" sz="2000" dirty="0"/>
+              <a:t> et al., 2021).</a:t>
+            </a:r>
+          </a:p>
+          <a:p>
+            <a:r>
+              <a:rPr lang="en-GB" sz="2000" dirty="0"/>
+              <a:t>Livability meter is meant to reflect what people value. The model includes variables that are objective measures of environment. However, the dimensions are selected based on survey from 2018 and housing market choices data 2019-2022 (</a:t>
+            </a:r>
+            <a:r>
+              <a:rPr lang="en-GB" sz="2000" dirty="0" err="1"/>
+              <a:t>Mandemakers</a:t>
+            </a:r>
+            <a:r>
+              <a:rPr lang="en-GB" sz="2000" dirty="0"/>
+              <a:t> et al., 2021).</a:t>
+            </a:r>
+          </a:p>
+          <a:p>
+            <a:pPr marL="0" indent="0">
+              <a:buNone/>
+            </a:pPr>
+            <a:endParaRPr lang="en-GB" sz="2000" dirty="0"/>
+          </a:p>
+          <a:p>
+            <a:r>
+              <a:rPr lang="en-GB" sz="2000" dirty="0"/>
+              <a:t>Limitations:</a:t>
+            </a:r>
+            <a:br>
+              <a:rPr lang="en-GB" sz="2000" dirty="0"/>
+            </a:br>
+            <a:r>
+              <a:rPr lang="en-GB" sz="2000" dirty="0"/>
+              <a:t>- potential outdatedness of the opinions from 2018 and doesn’t include them in the model;</a:t>
+            </a:r>
+            <a:br>
+              <a:rPr lang="en-GB" sz="2000" dirty="0"/>
+            </a:br>
+            <a:r>
+              <a:rPr lang="en-GB" sz="2000" dirty="0"/>
+              <a:t>- poor representativeness of housing market choices as fewer people are able to purchase houses and the first-time buyers age has been increasing (CBS, 2026; Lennartz et al., 2019);</a:t>
+            </a:r>
+            <a:br>
+              <a:rPr lang="en-GB" sz="2000" dirty="0"/>
+            </a:br>
+            <a:r>
+              <a:rPr lang="en-GB" sz="2000" dirty="0"/>
+              <a:t>- the dimensions are not necessarily comprehensive – based on the availability of data</a:t>
+            </a:r>
+          </a:p>
+        </p:txBody>
+      </p:sp>
     </p:spTree>
     <p:extLst>
       <p:ext uri="{BB962C8B-B14F-4D97-AF65-F5344CB8AC3E}">
-        <p14:creationId xmlns:p14="http://schemas.microsoft.com/office/powerpoint/2010/main" val="3028968231"/>
+        <p14:creationId xmlns:p14="http://schemas.microsoft.com/office/powerpoint/2010/main" val="1486767280"/>
       </p:ext>
     </p:extLst>
   </p:cSld>
@@ -8402,7 +9674,7 @@
           <p:cNvPr id="2" name="Title 1">
             <a:extLst>
               <a:ext uri="{FF2B5EF4-FFF2-40B4-BE49-F238E27FC236}">
-                <a16:creationId xmlns:a16="http://schemas.microsoft.com/office/drawing/2014/main" id="{391D5AA4-39E8-7D88-FF14-AEEA7CC8AC7B}"/>
+                <a16:creationId xmlns:a16="http://schemas.microsoft.com/office/drawing/2014/main" id="{3E3114CE-3A47-AFD5-8B03-147194BCDE56}"/>
               </a:ext>
             </a:extLst>
           </p:cNvPr>
@@ -8415,18 +9687,13 @@
         </p:nvSpPr>
         <p:spPr/>
         <p:txBody>
-          <a:bodyPr>
-            <a:normAutofit/>
-          </a:bodyPr>
+          <a:bodyPr/>
           <a:lstStyle/>
           <a:p>
             <a:r>
-              <a:rPr lang="en-US" sz="4000" b="1" dirty="0">
-                <a:latin typeface="Aptos" panose="020B0004020202020204" pitchFamily="34" charset="0"/>
-              </a:rPr>
-              <a:t>LIVABILITY SCORE</a:t>
-            </a:r>
-            <a:endParaRPr lang="en-NL" sz="4000" dirty="0"/>
+              <a:rPr lang="en-US" b="1" dirty="0"/>
+              <a:t>RESEARCH AIM &amp; OBJECTIVES</a:t>
+            </a:r>
           </a:p>
         </p:txBody>
       </p:sp>
@@ -8435,7 +9702,7 @@
           <p:cNvPr id="3" name="Content Placeholder 2">
             <a:extLst>
               <a:ext uri="{FF2B5EF4-FFF2-40B4-BE49-F238E27FC236}">
-                <a16:creationId xmlns:a16="http://schemas.microsoft.com/office/drawing/2014/main" id="{532078A8-6BB5-7041-FA15-FF26060FEB86}"/>
+                <a16:creationId xmlns:a16="http://schemas.microsoft.com/office/drawing/2014/main" id="{18DFE17C-99DB-E666-E7C2-0E384C99A025}"/>
               </a:ext>
             </a:extLst>
           </p:cNvPr>
@@ -8451,38 +9718,62 @@
           <a:bodyPr/>
           <a:lstStyle/>
           <a:p>
+            <a:pPr marL="0" indent="0">
+              <a:buNone/>
+            </a:pPr>
             <a:r>
               <a:rPr lang="en-US" dirty="0"/>
-              <a:t>OVERVIEW OF DIMENSIONS</a:t>
-            </a:r>
-            <a:br>
+              <a:t>We aim to investigate which predictors available from survey and administrative data can predict the livability scores.</a:t>
+            </a:r>
+          </a:p>
+          <a:p>
+            <a:pPr marL="0" indent="0">
+              <a:buNone/>
+            </a:pPr>
+            <a:endParaRPr lang="en-US" dirty="0"/>
+          </a:p>
+          <a:p>
+            <a:pPr marL="0" indent="0">
+              <a:buNone/>
+            </a:pPr>
+            <a:r>
               <a:rPr lang="en-US" dirty="0"/>
-            </a:br>
+              <a:t>Objectives:</a:t>
+            </a:r>
+          </a:p>
+          <a:p>
+            <a:pPr marL="0" indent="0">
+              <a:buNone/>
+            </a:pPr>
             <a:r>
               <a:rPr lang="en-US" dirty="0"/>
-              <a:t>dimensions and subdimensions</a:t>
-            </a:r>
-            <a:br>
+              <a:t>- Use Exposome, </a:t>
+            </a:r>
+            <a:r>
+              <a:rPr lang="en-US" dirty="0" err="1"/>
+              <a:t>Firmbackbone</a:t>
+            </a:r>
+            <a:r>
               <a:rPr lang="en-US" dirty="0"/>
-            </a:br>
+              <a:t>, LISS to explore predictors for livability that match the Livability meter dimensions and also go beyond;</a:t>
+            </a:r>
+          </a:p>
+          <a:p>
+            <a:pPr>
+              <a:buFontTx/>
+              <a:buChar char="-"/>
+            </a:pPr>
             <a:r>
               <a:rPr lang="en-US" dirty="0"/>
-              <a:t>color-coding dimensions we think we were able to capture in the LISS variables as perceptions </a:t>
-            </a:r>
-          </a:p>
-          <a:p>
-            <a:r>
-              <a:rPr lang="en-US" dirty="0"/>
-              <a:t>VISUALIZATION</a:t>
-            </a:r>
-            <a:endParaRPr lang="en-NL" dirty="0"/>
+              <a:t>Compare “objective” and “subjective” livability.</a:t>
+            </a:r>
           </a:p>
         </p:txBody>
       </p:sp>
     </p:spTree>
     <p:extLst>
       <p:ext uri="{BB962C8B-B14F-4D97-AF65-F5344CB8AC3E}">
-        <p14:creationId xmlns:p14="http://schemas.microsoft.com/office/powerpoint/2010/main" val="929769730"/>
+        <p14:creationId xmlns:p14="http://schemas.microsoft.com/office/powerpoint/2010/main" val="245806625"/>
       </p:ext>
     </p:extLst>
   </p:cSld>
@@ -8497,7 +9788,13 @@
   <p:cSld>
     <p:spTree>
       <p:nvGrpSpPr>
-        <p:cNvPr id="1" name=""/>
+        <p:cNvPr id="1" name="">
+          <a:extLst>
+            <a:ext uri="{FF2B5EF4-FFF2-40B4-BE49-F238E27FC236}">
+              <a16:creationId xmlns:a16="http://schemas.microsoft.com/office/drawing/2014/main" id="{2E6780B8-1D4D-2196-D574-C778F0FAA644}"/>
+            </a:ext>
+          </a:extLst>
+        </p:cNvPr>
         <p:cNvGrpSpPr/>
         <p:nvPr/>
       </p:nvGrpSpPr>
@@ -8514,7 +9811,7 @@
           <p:cNvPr id="2" name="Title 1">
             <a:extLst>
               <a:ext uri="{FF2B5EF4-FFF2-40B4-BE49-F238E27FC236}">
-                <a16:creationId xmlns:a16="http://schemas.microsoft.com/office/drawing/2014/main" id="{1F20AF0E-ED51-D6C7-ED17-990E85214ED5}"/>
+                <a16:creationId xmlns:a16="http://schemas.microsoft.com/office/drawing/2014/main" id="{02E4E09E-B465-656A-B9A8-B3524CD432EE}"/>
               </a:ext>
             </a:extLst>
           </p:cNvPr>
@@ -8527,20 +9824,13 @@
         </p:nvSpPr>
         <p:spPr/>
         <p:txBody>
-          <a:bodyPr>
-            <a:normAutofit/>
-          </a:bodyPr>
+          <a:bodyPr/>
           <a:lstStyle/>
           <a:p>
             <a:r>
-              <a:rPr lang="en-US" sz="4000" b="1" dirty="0">
-                <a:latin typeface="Aptos" panose="020B0004020202020204" pitchFamily="34" charset="0"/>
-              </a:rPr>
-              <a:t>ANALYSIS</a:t>
-            </a:r>
-            <a:endParaRPr lang="en-NL" sz="4000" b="1" dirty="0">
-              <a:latin typeface="Aptos" panose="020B0004020202020204" pitchFamily="34" charset="0"/>
-            </a:endParaRPr>
+              <a:rPr lang="en-US" b="1" dirty="0"/>
+              <a:t>RESEARCH QUESTIONS</a:t>
+            </a:r>
           </a:p>
         </p:txBody>
       </p:sp>
@@ -8549,7 +9839,7 @@
           <p:cNvPr id="3" name="Content Placeholder 2">
             <a:extLst>
               <a:ext uri="{FF2B5EF4-FFF2-40B4-BE49-F238E27FC236}">
-                <a16:creationId xmlns:a16="http://schemas.microsoft.com/office/drawing/2014/main" id="{EE745100-CE06-4549-0F6E-0CC8267F6DBC}"/>
+                <a16:creationId xmlns:a16="http://schemas.microsoft.com/office/drawing/2014/main" id="{CCA3BEB6-BB5F-38E3-EC09-415912A4E9DD}"/>
               </a:ext>
             </a:extLst>
           </p:cNvPr>
@@ -8565,25 +9855,44 @@
           <a:bodyPr/>
           <a:lstStyle/>
           <a:p>
-            <a:r>
-              <a:rPr lang="en-US" dirty="0"/>
-              <a:t>METHOD AND APPROACH</a:t>
-            </a:r>
-            <a:endParaRPr lang="ru-RU" dirty="0"/>
-          </a:p>
-          <a:p>
+            <a:pPr marL="457200" indent="-457200">
+              <a:buAutoNum type="arabicPeriod"/>
+            </a:pPr>
             <a:r>
               <a:rPr lang="en-GB" dirty="0"/>
-              <a:t>ETHICAL CONSIDERATIONS</a:t>
-            </a:r>
-            <a:endParaRPr lang="en-NL" dirty="0"/>
+              <a:t>What alternative model using administrative data can predict livability score in the Netherlands?</a:t>
+            </a:r>
+            <a:r>
+              <a:rPr lang="ru-RU" dirty="0"/>
+              <a:t> </a:t>
+            </a:r>
+            <a:endParaRPr lang="en-GB" dirty="0"/>
+          </a:p>
+          <a:p>
+            <a:pPr marL="457200" indent="-457200">
+              <a:buAutoNum type="arabicPeriod"/>
+            </a:pPr>
+            <a:r>
+              <a:rPr lang="en-GB" dirty="0"/>
+              <a:t>What alternative model using survey data can predict livability score in the Netherlands?</a:t>
+            </a:r>
+          </a:p>
+          <a:p>
+            <a:pPr marL="457200" indent="-457200">
+              <a:buAutoNum type="arabicPeriod"/>
+            </a:pPr>
+            <a:r>
+              <a:rPr lang="en-GB" dirty="0"/>
+              <a:t>What are the differences between predicted (administrative and survey-based) and official livability scores?</a:t>
+            </a:r>
+            <a:endParaRPr lang="en-US" dirty="0"/>
           </a:p>
         </p:txBody>
       </p:sp>
     </p:spTree>
     <p:extLst>
       <p:ext uri="{BB962C8B-B14F-4D97-AF65-F5344CB8AC3E}">
-        <p14:creationId xmlns:p14="http://schemas.microsoft.com/office/powerpoint/2010/main" val="1200445968"/>
+        <p14:creationId xmlns:p14="http://schemas.microsoft.com/office/powerpoint/2010/main" val="3445527081"/>
       </p:ext>
     </p:extLst>
   </p:cSld>
@@ -8615,7 +9924,7 @@
           <p:cNvPr id="2" name="Title 1">
             <a:extLst>
               <a:ext uri="{FF2B5EF4-FFF2-40B4-BE49-F238E27FC236}">
-                <a16:creationId xmlns:a16="http://schemas.microsoft.com/office/drawing/2014/main" id="{9D87DF4A-6793-0A82-6A54-8C85064ED0FD}"/>
+                <a16:creationId xmlns:a16="http://schemas.microsoft.com/office/drawing/2014/main" id="{391D5AA4-39E8-7D88-FF14-AEEA7CC8AC7B}"/>
               </a:ext>
             </a:extLst>
           </p:cNvPr>
@@ -8637,11 +9946,9 @@
               <a:rPr lang="en-US" sz="4000" b="1" dirty="0">
                 <a:latin typeface="Aptos" panose="020B0004020202020204" pitchFamily="34" charset="0"/>
               </a:rPr>
-              <a:t>RESULTS</a:t>
-            </a:r>
-            <a:endParaRPr lang="en-NL" sz="4000" b="1" dirty="0">
-              <a:latin typeface="Aptos" panose="020B0004020202020204" pitchFamily="34" charset="0"/>
-            </a:endParaRPr>
+              <a:t>LIVABILITY SCORE</a:t>
+            </a:r>
+            <a:endParaRPr lang="en-NL" sz="4000" dirty="0"/>
           </a:p>
         </p:txBody>
       </p:sp>
@@ -8650,7 +9957,7 @@
           <p:cNvPr id="3" name="Content Placeholder 2">
             <a:extLst>
               <a:ext uri="{FF2B5EF4-FFF2-40B4-BE49-F238E27FC236}">
-                <a16:creationId xmlns:a16="http://schemas.microsoft.com/office/drawing/2014/main" id="{B7AC6F1B-C3BD-3A07-79D7-89F1A5E47B98}"/>
+                <a16:creationId xmlns:a16="http://schemas.microsoft.com/office/drawing/2014/main" id="{532078A8-6BB5-7041-FA15-FF26060FEB86}"/>
               </a:ext>
             </a:extLst>
           </p:cNvPr>
@@ -8661,35 +9968,474 @@
             <p:ph idx="1"/>
           </p:nvPr>
         </p:nvSpPr>
-        <p:spPr/>
+        <p:spPr>
+          <a:xfrm>
+            <a:off x="838200" y="1499129"/>
+            <a:ext cx="10515600" cy="3859742"/>
+          </a:xfrm>
+        </p:spPr>
         <p:txBody>
           <a:bodyPr/>
           <a:lstStyle/>
           <a:p>
             <a:r>
               <a:rPr lang="en-US" dirty="0"/>
-              <a:t>OVERVIEW OF RESULTS</a:t>
-            </a:r>
+              <a:t>OVERVIEW OF DIMENSIONS</a:t>
+            </a:r>
+            <a:r>
+              <a:rPr lang="ru-RU" dirty="0"/>
+              <a:t> (</a:t>
+            </a:r>
+            <a:r>
+              <a:rPr lang="ru-RU" dirty="0" err="1"/>
+              <a:t>m</a:t>
+            </a:r>
+            <a:r>
+              <a:rPr lang="en-GB" dirty="0"/>
+              <a:t>ore details in the following slide)</a:t>
+            </a:r>
+          </a:p>
+          <a:p>
+            <a:endParaRPr lang="en-GB" dirty="0"/>
+          </a:p>
+          <a:p>
+            <a:endParaRPr lang="en-GB" dirty="0"/>
+          </a:p>
+          <a:p>
+            <a:endParaRPr lang="en-GB" dirty="0"/>
+          </a:p>
+          <a:p>
+            <a:pPr marL="0" indent="0">
+              <a:buNone/>
+            </a:pPr>
+            <a:endParaRPr lang="en-GB" dirty="0"/>
+          </a:p>
+          <a:p>
+            <a:pPr marL="0" indent="0">
+              <a:buNone/>
+            </a:pPr>
+            <a:endParaRPr lang="en-GB" dirty="0"/>
           </a:p>
           <a:p>
             <a:r>
               <a:rPr lang="en-US" dirty="0"/>
-              <a:t>VISUALIZATIONS</a:t>
-            </a:r>
-          </a:p>
-          <a:p>
+              <a:t>VISUALIZATION in Shiny Dashboard</a:t>
+            </a:r>
+            <a:endParaRPr lang="en-NL" dirty="0"/>
+          </a:p>
+        </p:txBody>
+      </p:sp>
+      <p:sp>
+        <p:nvSpPr>
+          <p:cNvPr id="9" name="Rounded Rectangle 8">
+            <a:extLst>
+              <a:ext uri="{FF2B5EF4-FFF2-40B4-BE49-F238E27FC236}">
+                <a16:creationId xmlns:a16="http://schemas.microsoft.com/office/drawing/2014/main" id="{98B4C42F-10D3-D851-96CF-7A1017EDD3BB}"/>
+              </a:ext>
+            </a:extLst>
+          </p:cNvPr>
+          <p:cNvSpPr/>
+          <p:nvPr/>
+        </p:nvSpPr>
+        <p:spPr>
+          <a:xfrm>
+            <a:off x="838200" y="2203532"/>
+            <a:ext cx="1839952" cy="1525963"/>
+          </a:xfrm>
+          <a:prstGeom prst="roundRect">
+            <a:avLst/>
+          </a:prstGeom>
+          <a:gradFill flip="none" rotWithShape="1">
+            <a:gsLst>
+              <a:gs pos="0">
+                <a:schemeClr val="accent1">
+                  <a:tint val="66000"/>
+                  <a:satMod val="160000"/>
+                </a:schemeClr>
+              </a:gs>
+              <a:gs pos="50000">
+                <a:schemeClr val="accent1">
+                  <a:tint val="44500"/>
+                  <a:satMod val="160000"/>
+                </a:schemeClr>
+              </a:gs>
+              <a:gs pos="100000">
+                <a:schemeClr val="accent1">
+                  <a:tint val="23500"/>
+                  <a:satMod val="160000"/>
+                </a:schemeClr>
+              </a:gs>
+            </a:gsLst>
+            <a:path path="circle">
+              <a:fillToRect t="100000" r="100000"/>
+            </a:path>
+            <a:tileRect l="-100000" b="-100000"/>
+          </a:gradFill>
+        </p:spPr>
+        <p:style>
+          <a:lnRef idx="2">
+            <a:schemeClr val="accent1">
+              <a:shade val="15000"/>
+            </a:schemeClr>
+          </a:lnRef>
+          <a:fillRef idx="1">
+            <a:schemeClr val="accent1"/>
+          </a:fillRef>
+          <a:effectRef idx="0">
+            <a:schemeClr val="accent1"/>
+          </a:effectRef>
+          <a:fontRef idx="minor">
+            <a:schemeClr val="lt1"/>
+          </a:fontRef>
+        </p:style>
+        <p:txBody>
+          <a:bodyPr rtlCol="0" anchor="ctr"/>
+          <a:lstStyle/>
+          <a:p>
+            <a:pPr algn="ctr"/>
+            <a:r>
+              <a:rPr lang="en-US" dirty="0">
+                <a:solidFill>
+                  <a:schemeClr val="tx1"/>
+                </a:solidFill>
+              </a:rPr>
+              <a:t>Environment</a:t>
+            </a:r>
+          </a:p>
+        </p:txBody>
+      </p:sp>
+      <p:sp>
+        <p:nvSpPr>
+          <p:cNvPr id="10" name="Rounded Rectangle 9">
+            <a:extLst>
+              <a:ext uri="{FF2B5EF4-FFF2-40B4-BE49-F238E27FC236}">
+                <a16:creationId xmlns:a16="http://schemas.microsoft.com/office/drawing/2014/main" id="{46085A97-EA68-2DEA-E42F-513D745E3F14}"/>
+              </a:ext>
+            </a:extLst>
+          </p:cNvPr>
+          <p:cNvSpPr/>
+          <p:nvPr/>
+        </p:nvSpPr>
+        <p:spPr>
+          <a:xfrm>
+            <a:off x="2830551" y="2203532"/>
+            <a:ext cx="1839952" cy="1525963"/>
+          </a:xfrm>
+          <a:prstGeom prst="roundRect">
+            <a:avLst/>
+          </a:prstGeom>
+          <a:gradFill flip="none" rotWithShape="1">
+            <a:gsLst>
+              <a:gs pos="0">
+                <a:schemeClr val="accent1">
+                  <a:tint val="66000"/>
+                  <a:satMod val="160000"/>
+                </a:schemeClr>
+              </a:gs>
+              <a:gs pos="50000">
+                <a:schemeClr val="accent1">
+                  <a:tint val="44500"/>
+                  <a:satMod val="160000"/>
+                </a:schemeClr>
+              </a:gs>
+              <a:gs pos="100000">
+                <a:schemeClr val="accent1">
+                  <a:tint val="23500"/>
+                  <a:satMod val="160000"/>
+                </a:schemeClr>
+              </a:gs>
+            </a:gsLst>
+            <a:path path="circle">
+              <a:fillToRect t="100000" r="100000"/>
+            </a:path>
+            <a:tileRect l="-100000" b="-100000"/>
+          </a:gradFill>
+        </p:spPr>
+        <p:style>
+          <a:lnRef idx="2">
+            <a:schemeClr val="accent1">
+              <a:shade val="15000"/>
+            </a:schemeClr>
+          </a:lnRef>
+          <a:fillRef idx="1">
+            <a:schemeClr val="accent1"/>
+          </a:fillRef>
+          <a:effectRef idx="0">
+            <a:schemeClr val="accent1"/>
+          </a:effectRef>
+          <a:fontRef idx="minor">
+            <a:schemeClr val="lt1"/>
+          </a:fontRef>
+        </p:style>
+        <p:txBody>
+          <a:bodyPr rtlCol="0" anchor="ctr"/>
+          <a:lstStyle/>
+          <a:p>
+            <a:pPr algn="ctr"/>
+            <a:r>
+              <a:rPr lang="en-US" dirty="0">
+                <a:solidFill>
+                  <a:schemeClr val="tx1"/>
+                </a:solidFill>
+              </a:rPr>
+              <a:t>Housing</a:t>
+            </a:r>
+          </a:p>
+        </p:txBody>
+      </p:sp>
+      <p:sp>
+        <p:nvSpPr>
+          <p:cNvPr id="11" name="Rounded Rectangle 10">
+            <a:extLst>
+              <a:ext uri="{FF2B5EF4-FFF2-40B4-BE49-F238E27FC236}">
+                <a16:creationId xmlns:a16="http://schemas.microsoft.com/office/drawing/2014/main" id="{3FE1837C-3F85-D5DF-6A7A-007D4BAB7E88}"/>
+              </a:ext>
+            </a:extLst>
+          </p:cNvPr>
+          <p:cNvSpPr/>
+          <p:nvPr/>
+        </p:nvSpPr>
+        <p:spPr>
+          <a:xfrm>
+            <a:off x="4822902" y="2203531"/>
+            <a:ext cx="1839952" cy="1525963"/>
+          </a:xfrm>
+          <a:prstGeom prst="roundRect">
+            <a:avLst/>
+          </a:prstGeom>
+          <a:gradFill flip="none" rotWithShape="1">
+            <a:gsLst>
+              <a:gs pos="0">
+                <a:schemeClr val="accent1">
+                  <a:tint val="66000"/>
+                  <a:satMod val="160000"/>
+                </a:schemeClr>
+              </a:gs>
+              <a:gs pos="50000">
+                <a:schemeClr val="accent1">
+                  <a:tint val="44500"/>
+                  <a:satMod val="160000"/>
+                </a:schemeClr>
+              </a:gs>
+              <a:gs pos="100000">
+                <a:schemeClr val="accent1">
+                  <a:tint val="23500"/>
+                  <a:satMod val="160000"/>
+                </a:schemeClr>
+              </a:gs>
+            </a:gsLst>
+            <a:path path="circle">
+              <a:fillToRect t="100000" r="100000"/>
+            </a:path>
+            <a:tileRect l="-100000" b="-100000"/>
+          </a:gradFill>
+        </p:spPr>
+        <p:style>
+          <a:lnRef idx="2">
+            <a:schemeClr val="accent1">
+              <a:shade val="15000"/>
+            </a:schemeClr>
+          </a:lnRef>
+          <a:fillRef idx="1">
+            <a:schemeClr val="accent1"/>
+          </a:fillRef>
+          <a:effectRef idx="0">
+            <a:schemeClr val="accent1"/>
+          </a:effectRef>
+          <a:fontRef idx="minor">
+            <a:schemeClr val="lt1"/>
+          </a:fontRef>
+        </p:style>
+        <p:txBody>
+          <a:bodyPr rtlCol="0" anchor="ctr"/>
+          <a:lstStyle/>
+          <a:p>
+            <a:pPr algn="ctr"/>
+            <a:r>
+              <a:rPr lang="en-US" dirty="0">
+                <a:solidFill>
+                  <a:schemeClr val="tx1"/>
+                </a:solidFill>
+              </a:rPr>
+              <a:t>Amenities</a:t>
+            </a:r>
+          </a:p>
+        </p:txBody>
+      </p:sp>
+      <p:sp>
+        <p:nvSpPr>
+          <p:cNvPr id="12" name="Rounded Rectangle 11">
+            <a:extLst>
+              <a:ext uri="{FF2B5EF4-FFF2-40B4-BE49-F238E27FC236}">
+                <a16:creationId xmlns:a16="http://schemas.microsoft.com/office/drawing/2014/main" id="{66A37F30-DA56-4A91-049A-17DBAA5BFDBA}"/>
+              </a:ext>
+            </a:extLst>
+          </p:cNvPr>
+          <p:cNvSpPr/>
+          <p:nvPr/>
+        </p:nvSpPr>
+        <p:spPr>
+          <a:xfrm>
+            <a:off x="6815253" y="2203530"/>
+            <a:ext cx="1839952" cy="1525963"/>
+          </a:xfrm>
+          <a:prstGeom prst="roundRect">
+            <a:avLst/>
+          </a:prstGeom>
+          <a:gradFill flip="none" rotWithShape="1">
+            <a:gsLst>
+              <a:gs pos="0">
+                <a:schemeClr val="accent1">
+                  <a:tint val="66000"/>
+                  <a:satMod val="160000"/>
+                </a:schemeClr>
+              </a:gs>
+              <a:gs pos="50000">
+                <a:schemeClr val="accent1">
+                  <a:tint val="44500"/>
+                  <a:satMod val="160000"/>
+                </a:schemeClr>
+              </a:gs>
+              <a:gs pos="100000">
+                <a:schemeClr val="accent1">
+                  <a:tint val="23500"/>
+                  <a:satMod val="160000"/>
+                </a:schemeClr>
+              </a:gs>
+            </a:gsLst>
+            <a:path path="circle">
+              <a:fillToRect t="100000" r="100000"/>
+            </a:path>
+            <a:tileRect l="-100000" b="-100000"/>
+          </a:gradFill>
+        </p:spPr>
+        <p:style>
+          <a:lnRef idx="2">
+            <a:schemeClr val="accent1">
+              <a:shade val="15000"/>
+            </a:schemeClr>
+          </a:lnRef>
+          <a:fillRef idx="1">
+            <a:schemeClr val="accent1"/>
+          </a:fillRef>
+          <a:effectRef idx="0">
+            <a:schemeClr val="accent1"/>
+          </a:effectRef>
+          <a:fontRef idx="minor">
+            <a:schemeClr val="lt1"/>
+          </a:fontRef>
+        </p:style>
+        <p:txBody>
+          <a:bodyPr rtlCol="0" anchor="ctr"/>
+          <a:lstStyle/>
+          <a:p>
+            <a:pPr algn="ctr"/>
+            <a:r>
+              <a:rPr lang="en-US" dirty="0">
+                <a:solidFill>
+                  <a:schemeClr val="tx1"/>
+                </a:solidFill>
+              </a:rPr>
+              <a:t>Social</a:t>
+            </a:r>
             <a:r>
               <a:rPr lang="en-US" dirty="0"/>
-              <a:t>REMARKS</a:t>
-            </a:r>
-            <a:endParaRPr lang="en-NL" dirty="0"/>
+              <a:t> </a:t>
+            </a:r>
+            <a:r>
+              <a:rPr lang="en-US" dirty="0">
+                <a:solidFill>
+                  <a:schemeClr val="tx1"/>
+                </a:solidFill>
+              </a:rPr>
+              <a:t>cohesion</a:t>
+            </a:r>
+          </a:p>
+        </p:txBody>
+      </p:sp>
+      <p:sp>
+        <p:nvSpPr>
+          <p:cNvPr id="13" name="Rounded Rectangle 12">
+            <a:extLst>
+              <a:ext uri="{FF2B5EF4-FFF2-40B4-BE49-F238E27FC236}">
+                <a16:creationId xmlns:a16="http://schemas.microsoft.com/office/drawing/2014/main" id="{D0648173-59EC-57BF-44DA-7B1629A96B04}"/>
+              </a:ext>
+            </a:extLst>
+          </p:cNvPr>
+          <p:cNvSpPr/>
+          <p:nvPr/>
+        </p:nvSpPr>
+        <p:spPr>
+          <a:xfrm>
+            <a:off x="8807604" y="2203530"/>
+            <a:ext cx="1839952" cy="1525963"/>
+          </a:xfrm>
+          <a:prstGeom prst="roundRect">
+            <a:avLst/>
+          </a:prstGeom>
+          <a:gradFill flip="none" rotWithShape="1">
+            <a:gsLst>
+              <a:gs pos="0">
+                <a:schemeClr val="accent1">
+                  <a:tint val="66000"/>
+                  <a:satMod val="160000"/>
+                </a:schemeClr>
+              </a:gs>
+              <a:gs pos="50000">
+                <a:schemeClr val="accent1">
+                  <a:tint val="44500"/>
+                  <a:satMod val="160000"/>
+                </a:schemeClr>
+              </a:gs>
+              <a:gs pos="100000">
+                <a:schemeClr val="accent1">
+                  <a:tint val="23500"/>
+                  <a:satMod val="160000"/>
+                </a:schemeClr>
+              </a:gs>
+            </a:gsLst>
+            <a:path path="circle">
+              <a:fillToRect t="100000" r="100000"/>
+            </a:path>
+            <a:tileRect l="-100000" b="-100000"/>
+          </a:gradFill>
+        </p:spPr>
+        <p:style>
+          <a:lnRef idx="2">
+            <a:schemeClr val="accent1">
+              <a:shade val="15000"/>
+            </a:schemeClr>
+          </a:lnRef>
+          <a:fillRef idx="1">
+            <a:schemeClr val="accent1"/>
+          </a:fillRef>
+          <a:effectRef idx="0">
+            <a:schemeClr val="accent1"/>
+          </a:effectRef>
+          <a:fontRef idx="minor">
+            <a:schemeClr val="lt1"/>
+          </a:fontRef>
+        </p:style>
+        <p:txBody>
+          <a:bodyPr rtlCol="0" anchor="ctr"/>
+          <a:lstStyle/>
+          <a:p>
+            <a:pPr algn="ctr"/>
+            <a:r>
+              <a:rPr lang="en-US" dirty="0">
+                <a:solidFill>
+                  <a:schemeClr val="tx1"/>
+                </a:solidFill>
+              </a:rPr>
+              <a:t>Safety</a:t>
+            </a:r>
           </a:p>
         </p:txBody>
       </p:sp>
     </p:spTree>
     <p:extLst>
       <p:ext uri="{BB962C8B-B14F-4D97-AF65-F5344CB8AC3E}">
-        <p14:creationId xmlns:p14="http://schemas.microsoft.com/office/powerpoint/2010/main" val="2823057263"/>
+        <p14:creationId xmlns:p14="http://schemas.microsoft.com/office/powerpoint/2010/main" val="929769730"/>
       </p:ext>
     </p:extLst>
   </p:cSld>
@@ -8704,13 +10450,7 @@
   <p:cSld>
     <p:spTree>
       <p:nvGrpSpPr>
-        <p:cNvPr id="1" name="">
-          <a:extLst>
-            <a:ext uri="{FF2B5EF4-FFF2-40B4-BE49-F238E27FC236}">
-              <a16:creationId xmlns:a16="http://schemas.microsoft.com/office/drawing/2014/main" id="{9F3E30F6-326D-57E9-0F15-5EF34F392810}"/>
-            </a:ext>
-          </a:extLst>
-        </p:cNvPr>
+        <p:cNvPr id="1" name=""/>
         <p:cNvGrpSpPr/>
         <p:nvPr/>
       </p:nvGrpSpPr>
@@ -8722,12 +10462,2038 @@
           <a:chExt cx="0" cy="0"/>
         </a:xfrm>
       </p:grpSpPr>
+      <p:graphicFrame>
+        <p:nvGraphicFramePr>
+          <p:cNvPr id="2" name="Table 1">
+            <a:extLst>
+              <a:ext uri="{FF2B5EF4-FFF2-40B4-BE49-F238E27FC236}">
+                <a16:creationId xmlns:a16="http://schemas.microsoft.com/office/drawing/2014/main" id="{647DC7B0-801F-F792-2FCD-4C6AA0CABA9D}"/>
+              </a:ext>
+            </a:extLst>
+          </p:cNvPr>
+          <p:cNvGraphicFramePr>
+            <a:graphicFrameLocks noGrp="1"/>
+          </p:cNvGraphicFramePr>
+          <p:nvPr>
+            <p:extLst>
+              <p:ext uri="{D42A27DB-BD31-4B8C-83A1-F6EECF244321}">
+                <p14:modId xmlns:p14="http://schemas.microsoft.com/office/powerpoint/2010/main" val="1321921666"/>
+              </p:ext>
+            </p:extLst>
+          </p:nvPr>
+        </p:nvGraphicFramePr>
+        <p:xfrm>
+          <a:off x="0" y="0"/>
+          <a:ext cx="12192000" cy="6858000"/>
+        </p:xfrm>
+        <a:graphic>
+          <a:graphicData uri="http://schemas.openxmlformats.org/drawingml/2006/table">
+            <a:tbl>
+              <a:tblPr firstRow="1" firstCol="1" bandRow="1">
+                <a:tableStyleId>{91EBBBCC-DAD2-459C-BE2E-F6DE35CF9A28}</a:tableStyleId>
+              </a:tblPr>
+              <a:tblGrid>
+                <a:gridCol w="2031416">
+                  <a:extLst>
+                    <a:ext uri="{9D8B030D-6E8A-4147-A177-3AD203B41FA5}">
+                      <a16:colId xmlns:a16="http://schemas.microsoft.com/office/drawing/2014/main" val="3660263680"/>
+                    </a:ext>
+                  </a:extLst>
+                </a:gridCol>
+                <a:gridCol w="2032292">
+                  <a:extLst>
+                    <a:ext uri="{9D8B030D-6E8A-4147-A177-3AD203B41FA5}">
+                      <a16:colId xmlns:a16="http://schemas.microsoft.com/office/drawing/2014/main" val="648409947"/>
+                    </a:ext>
+                  </a:extLst>
+                </a:gridCol>
+                <a:gridCol w="2032292">
+                  <a:extLst>
+                    <a:ext uri="{9D8B030D-6E8A-4147-A177-3AD203B41FA5}">
+                      <a16:colId xmlns:a16="http://schemas.microsoft.com/office/drawing/2014/main" val="2368400089"/>
+                    </a:ext>
+                  </a:extLst>
+                </a:gridCol>
+                <a:gridCol w="2031416">
+                  <a:extLst>
+                    <a:ext uri="{9D8B030D-6E8A-4147-A177-3AD203B41FA5}">
+                      <a16:colId xmlns:a16="http://schemas.microsoft.com/office/drawing/2014/main" val="51067763"/>
+                    </a:ext>
+                  </a:extLst>
+                </a:gridCol>
+                <a:gridCol w="2032292">
+                  <a:extLst>
+                    <a:ext uri="{9D8B030D-6E8A-4147-A177-3AD203B41FA5}">
+                      <a16:colId xmlns:a16="http://schemas.microsoft.com/office/drawing/2014/main" val="3037930058"/>
+                    </a:ext>
+                  </a:extLst>
+                </a:gridCol>
+                <a:gridCol w="2032292">
+                  <a:extLst>
+                    <a:ext uri="{9D8B030D-6E8A-4147-A177-3AD203B41FA5}">
+                      <a16:colId xmlns:a16="http://schemas.microsoft.com/office/drawing/2014/main" val="1202942625"/>
+                    </a:ext>
+                  </a:extLst>
+                </a:gridCol>
+              </a:tblGrid>
+              <a:tr h="365039">
+                <a:tc gridSpan="2">
+                  <a:txBody>
+                    <a:bodyPr/>
+                    <a:lstStyle/>
+                    <a:p>
+                      <a:pPr algn="ctr">
+                        <a:lnSpc>
+                          <a:spcPct val="115000"/>
+                        </a:lnSpc>
+                        <a:spcAft>
+                          <a:spcPts val="800"/>
+                        </a:spcAft>
+                        <a:buNone/>
+                      </a:pPr>
+                      <a:r>
+                        <a:rPr lang="en-GB" sz="1400" kern="100" dirty="0">
+                          <a:effectLst/>
+                        </a:rPr>
+                        <a:t>Environment</a:t>
+                      </a:r>
+                      <a:endParaRPr lang="en-GB" sz="1400" kern="100" dirty="0">
+                        <a:effectLst/>
+                        <a:latin typeface="Aptos" panose="020B0004020202020204" pitchFamily="34" charset="0"/>
+                        <a:ea typeface="Aptos" panose="020B0004020202020204" pitchFamily="34" charset="0"/>
+                        <a:cs typeface="Times New Roman" panose="02020603050405020304" pitchFamily="18" charset="0"/>
+                      </a:endParaRPr>
+                    </a:p>
+                  </a:txBody>
+                  <a:tcPr marL="38716" marR="38716" marT="0" marB="0">
+                    <a:lnL w="12700" cap="flat" cmpd="sng" algn="ctr">
+                      <a:solidFill>
+                        <a:schemeClr val="tx1"/>
+                      </a:solidFill>
+                      <a:prstDash val="solid"/>
+                      <a:round/>
+                      <a:headEnd type="none" w="med" len="med"/>
+                      <a:tailEnd type="none" w="med" len="med"/>
+                    </a:lnL>
+                    <a:lnR w="12700" cap="flat" cmpd="sng" algn="ctr">
+                      <a:solidFill>
+                        <a:schemeClr val="tx1"/>
+                      </a:solidFill>
+                      <a:prstDash val="solid"/>
+                      <a:round/>
+                      <a:headEnd type="none" w="med" len="med"/>
+                      <a:tailEnd type="none" w="med" len="med"/>
+                    </a:lnR>
+                    <a:lnT w="12700" cap="flat" cmpd="sng" algn="ctr">
+                      <a:solidFill>
+                        <a:schemeClr val="tx1"/>
+                      </a:solidFill>
+                      <a:prstDash val="solid"/>
+                      <a:round/>
+                      <a:headEnd type="none" w="med" len="med"/>
+                      <a:tailEnd type="none" w="med" len="med"/>
+                    </a:lnT>
+                    <a:lnB w="12700" cap="flat" cmpd="sng" algn="ctr">
+                      <a:solidFill>
+                        <a:schemeClr val="tx1"/>
+                      </a:solidFill>
+                      <a:prstDash val="solid"/>
+                      <a:round/>
+                      <a:headEnd type="none" w="med" len="med"/>
+                      <a:tailEnd type="none" w="med" len="med"/>
+                    </a:lnB>
+                  </a:tcPr>
+                </a:tc>
+                <a:tc hMerge="1">
+                  <a:txBody>
+                    <a:bodyPr/>
+                    <a:lstStyle/>
+                    <a:p>
+                      <a:endParaRPr lang="en-US"/>
+                    </a:p>
+                  </a:txBody>
+                  <a:tcPr/>
+                </a:tc>
+                <a:tc>
+                  <a:txBody>
+                    <a:bodyPr/>
+                    <a:lstStyle/>
+                    <a:p>
+                      <a:pPr algn="ctr">
+                        <a:lnSpc>
+                          <a:spcPct val="115000"/>
+                        </a:lnSpc>
+                        <a:spcAft>
+                          <a:spcPts val="800"/>
+                        </a:spcAft>
+                        <a:buNone/>
+                      </a:pPr>
+                      <a:r>
+                        <a:rPr lang="en-GB" sz="1400" kern="100" dirty="0">
+                          <a:effectLst/>
+                        </a:rPr>
+                        <a:t>Housing</a:t>
+                      </a:r>
+                      <a:endParaRPr lang="en-GB" sz="1400" kern="100" dirty="0">
+                        <a:effectLst/>
+                        <a:latin typeface="Aptos" panose="020B0004020202020204" pitchFamily="34" charset="0"/>
+                        <a:ea typeface="Aptos" panose="020B0004020202020204" pitchFamily="34" charset="0"/>
+                        <a:cs typeface="Times New Roman" panose="02020603050405020304" pitchFamily="18" charset="0"/>
+                      </a:endParaRPr>
+                    </a:p>
+                  </a:txBody>
+                  <a:tcPr marL="38716" marR="38716" marT="0" marB="0">
+                    <a:lnL w="12700" cap="flat" cmpd="sng" algn="ctr">
+                      <a:solidFill>
+                        <a:schemeClr val="tx1"/>
+                      </a:solidFill>
+                      <a:prstDash val="solid"/>
+                      <a:round/>
+                      <a:headEnd type="none" w="med" len="med"/>
+                      <a:tailEnd type="none" w="med" len="med"/>
+                    </a:lnL>
+                    <a:lnR w="12700" cap="flat" cmpd="sng" algn="ctr">
+                      <a:solidFill>
+                        <a:schemeClr val="tx1"/>
+                      </a:solidFill>
+                      <a:prstDash val="solid"/>
+                      <a:round/>
+                      <a:headEnd type="none" w="med" len="med"/>
+                      <a:tailEnd type="none" w="med" len="med"/>
+                    </a:lnR>
+                    <a:lnT w="12700" cap="flat" cmpd="sng" algn="ctr">
+                      <a:solidFill>
+                        <a:schemeClr val="tx1"/>
+                      </a:solidFill>
+                      <a:prstDash val="solid"/>
+                      <a:round/>
+                      <a:headEnd type="none" w="med" len="med"/>
+                      <a:tailEnd type="none" w="med" len="med"/>
+                    </a:lnT>
+                    <a:lnB w="12700" cap="flat" cmpd="sng" algn="ctr">
+                      <a:solidFill>
+                        <a:schemeClr val="tx1"/>
+                      </a:solidFill>
+                      <a:prstDash val="solid"/>
+                      <a:round/>
+                      <a:headEnd type="none" w="med" len="med"/>
+                      <a:tailEnd type="none" w="med" len="med"/>
+                    </a:lnB>
+                  </a:tcPr>
+                </a:tc>
+                <a:tc>
+                  <a:txBody>
+                    <a:bodyPr/>
+                    <a:lstStyle/>
+                    <a:p>
+                      <a:pPr algn="ctr">
+                        <a:lnSpc>
+                          <a:spcPct val="115000"/>
+                        </a:lnSpc>
+                        <a:spcAft>
+                          <a:spcPts val="800"/>
+                        </a:spcAft>
+                        <a:buNone/>
+                      </a:pPr>
+                      <a:r>
+                        <a:rPr lang="en-GB" sz="1400" kern="100" dirty="0">
+                          <a:effectLst/>
+                        </a:rPr>
+                        <a:t>Amenities</a:t>
+                      </a:r>
+                      <a:endParaRPr lang="en-GB" sz="1400" kern="100" dirty="0">
+                        <a:effectLst/>
+                        <a:latin typeface="Aptos" panose="020B0004020202020204" pitchFamily="34" charset="0"/>
+                        <a:ea typeface="Aptos" panose="020B0004020202020204" pitchFamily="34" charset="0"/>
+                        <a:cs typeface="Times New Roman" panose="02020603050405020304" pitchFamily="18" charset="0"/>
+                      </a:endParaRPr>
+                    </a:p>
+                  </a:txBody>
+                  <a:tcPr marL="38716" marR="38716" marT="0" marB="0">
+                    <a:lnL w="12700" cap="flat" cmpd="sng" algn="ctr">
+                      <a:solidFill>
+                        <a:schemeClr val="tx1"/>
+                      </a:solidFill>
+                      <a:prstDash val="solid"/>
+                      <a:round/>
+                      <a:headEnd type="none" w="med" len="med"/>
+                      <a:tailEnd type="none" w="med" len="med"/>
+                    </a:lnL>
+                    <a:lnR w="12700" cap="flat" cmpd="sng" algn="ctr">
+                      <a:solidFill>
+                        <a:schemeClr val="tx1"/>
+                      </a:solidFill>
+                      <a:prstDash val="solid"/>
+                      <a:round/>
+                      <a:headEnd type="none" w="med" len="med"/>
+                      <a:tailEnd type="none" w="med" len="med"/>
+                    </a:lnR>
+                    <a:lnT w="12700" cap="flat" cmpd="sng" algn="ctr">
+                      <a:solidFill>
+                        <a:schemeClr val="tx1"/>
+                      </a:solidFill>
+                      <a:prstDash val="solid"/>
+                      <a:round/>
+                      <a:headEnd type="none" w="med" len="med"/>
+                      <a:tailEnd type="none" w="med" len="med"/>
+                    </a:lnT>
+                    <a:lnB w="12700" cap="flat" cmpd="sng" algn="ctr">
+                      <a:solidFill>
+                        <a:schemeClr val="tx1"/>
+                      </a:solidFill>
+                      <a:prstDash val="solid"/>
+                      <a:round/>
+                      <a:headEnd type="none" w="med" len="med"/>
+                      <a:tailEnd type="none" w="med" len="med"/>
+                    </a:lnB>
+                  </a:tcPr>
+                </a:tc>
+                <a:tc>
+                  <a:txBody>
+                    <a:bodyPr/>
+                    <a:lstStyle/>
+                    <a:p>
+                      <a:pPr algn="ctr">
+                        <a:lnSpc>
+                          <a:spcPct val="115000"/>
+                        </a:lnSpc>
+                        <a:spcAft>
+                          <a:spcPts val="800"/>
+                        </a:spcAft>
+                        <a:buNone/>
+                      </a:pPr>
+                      <a:r>
+                        <a:rPr lang="en-GB" sz="1400" kern="100" dirty="0">
+                          <a:effectLst/>
+                        </a:rPr>
+                        <a:t>Social cohesion</a:t>
+                      </a:r>
+                      <a:endParaRPr lang="en-GB" sz="1400" kern="100" dirty="0">
+                        <a:effectLst/>
+                        <a:latin typeface="Aptos" panose="020B0004020202020204" pitchFamily="34" charset="0"/>
+                        <a:ea typeface="Aptos" panose="020B0004020202020204" pitchFamily="34" charset="0"/>
+                        <a:cs typeface="Times New Roman" panose="02020603050405020304" pitchFamily="18" charset="0"/>
+                      </a:endParaRPr>
+                    </a:p>
+                  </a:txBody>
+                  <a:tcPr marL="38716" marR="38716" marT="0" marB="0">
+                    <a:lnL w="12700" cap="flat" cmpd="sng" algn="ctr">
+                      <a:solidFill>
+                        <a:schemeClr val="tx1"/>
+                      </a:solidFill>
+                      <a:prstDash val="solid"/>
+                      <a:round/>
+                      <a:headEnd type="none" w="med" len="med"/>
+                      <a:tailEnd type="none" w="med" len="med"/>
+                    </a:lnL>
+                    <a:lnR w="12700" cap="flat" cmpd="sng" algn="ctr">
+                      <a:solidFill>
+                        <a:schemeClr val="tx1"/>
+                      </a:solidFill>
+                      <a:prstDash val="solid"/>
+                      <a:round/>
+                      <a:headEnd type="none" w="med" len="med"/>
+                      <a:tailEnd type="none" w="med" len="med"/>
+                    </a:lnR>
+                    <a:lnT w="12700" cap="flat" cmpd="sng" algn="ctr">
+                      <a:solidFill>
+                        <a:schemeClr val="tx1"/>
+                      </a:solidFill>
+                      <a:prstDash val="solid"/>
+                      <a:round/>
+                      <a:headEnd type="none" w="med" len="med"/>
+                      <a:tailEnd type="none" w="med" len="med"/>
+                    </a:lnT>
+                    <a:lnB w="12700" cap="flat" cmpd="sng" algn="ctr">
+                      <a:solidFill>
+                        <a:schemeClr val="tx1"/>
+                      </a:solidFill>
+                      <a:prstDash val="solid"/>
+                      <a:round/>
+                      <a:headEnd type="none" w="med" len="med"/>
+                      <a:tailEnd type="none" w="med" len="med"/>
+                    </a:lnB>
+                  </a:tcPr>
+                </a:tc>
+                <a:tc>
+                  <a:txBody>
+                    <a:bodyPr/>
+                    <a:lstStyle/>
+                    <a:p>
+                      <a:pPr algn="ctr">
+                        <a:lnSpc>
+                          <a:spcPct val="115000"/>
+                        </a:lnSpc>
+                        <a:spcAft>
+                          <a:spcPts val="800"/>
+                        </a:spcAft>
+                        <a:buNone/>
+                      </a:pPr>
+                      <a:r>
+                        <a:rPr lang="en-GB" sz="1400" kern="100" dirty="0">
+                          <a:effectLst/>
+                        </a:rPr>
+                        <a:t>Safety</a:t>
+                      </a:r>
+                      <a:endParaRPr lang="en-GB" sz="1400" kern="100" dirty="0">
+                        <a:effectLst/>
+                        <a:latin typeface="Aptos" panose="020B0004020202020204" pitchFamily="34" charset="0"/>
+                        <a:ea typeface="Aptos" panose="020B0004020202020204" pitchFamily="34" charset="0"/>
+                        <a:cs typeface="Times New Roman" panose="02020603050405020304" pitchFamily="18" charset="0"/>
+                      </a:endParaRPr>
+                    </a:p>
+                  </a:txBody>
+                  <a:tcPr marL="38716" marR="38716" marT="0" marB="0">
+                    <a:lnL w="12700" cap="flat" cmpd="sng" algn="ctr">
+                      <a:solidFill>
+                        <a:schemeClr val="tx1"/>
+                      </a:solidFill>
+                      <a:prstDash val="solid"/>
+                      <a:round/>
+                      <a:headEnd type="none" w="med" len="med"/>
+                      <a:tailEnd type="none" w="med" len="med"/>
+                    </a:lnL>
+                    <a:lnR w="12700" cap="flat" cmpd="sng" algn="ctr">
+                      <a:solidFill>
+                        <a:schemeClr val="tx1"/>
+                      </a:solidFill>
+                      <a:prstDash val="solid"/>
+                      <a:round/>
+                      <a:headEnd type="none" w="med" len="med"/>
+                      <a:tailEnd type="none" w="med" len="med"/>
+                    </a:lnR>
+                    <a:lnT w="12700" cap="flat" cmpd="sng" algn="ctr">
+                      <a:solidFill>
+                        <a:schemeClr val="tx1"/>
+                      </a:solidFill>
+                      <a:prstDash val="solid"/>
+                      <a:round/>
+                      <a:headEnd type="none" w="med" len="med"/>
+                      <a:tailEnd type="none" w="med" len="med"/>
+                    </a:lnT>
+                    <a:lnB w="12700" cap="flat" cmpd="sng" algn="ctr">
+                      <a:solidFill>
+                        <a:schemeClr val="tx1"/>
+                      </a:solidFill>
+                      <a:prstDash val="solid"/>
+                      <a:round/>
+                      <a:headEnd type="none" w="med" len="med"/>
+                      <a:tailEnd type="none" w="med" len="med"/>
+                    </a:lnB>
+                  </a:tcPr>
+                </a:tc>
+                <a:extLst>
+                  <a:ext uri="{0D108BD9-81ED-4DB2-BD59-A6C34878D82A}">
+                    <a16:rowId xmlns:a16="http://schemas.microsoft.com/office/drawing/2014/main" val="702559469"/>
+                  </a:ext>
+                </a:extLst>
+              </a:tr>
+              <a:tr h="365039">
+                <a:tc>
+                  <a:txBody>
+                    <a:bodyPr/>
+                    <a:lstStyle/>
+                    <a:p>
+                      <a:pPr algn="ctr">
+                        <a:lnSpc>
+                          <a:spcPct val="115000"/>
+                        </a:lnSpc>
+                        <a:spcAft>
+                          <a:spcPts val="800"/>
+                        </a:spcAft>
+                        <a:buNone/>
+                      </a:pPr>
+                      <a:r>
+                        <a:rPr lang="en-GB" sz="1400" kern="100" dirty="0">
+                          <a:effectLst/>
+                        </a:rPr>
+                        <a:t>Natural environment</a:t>
+                      </a:r>
+                      <a:endParaRPr lang="en-GB" sz="1400" kern="100" dirty="0">
+                        <a:effectLst/>
+                        <a:latin typeface="Aptos" panose="020B0004020202020204" pitchFamily="34" charset="0"/>
+                        <a:ea typeface="Aptos" panose="020B0004020202020204" pitchFamily="34" charset="0"/>
+                        <a:cs typeface="Times New Roman" panose="02020603050405020304" pitchFamily="18" charset="0"/>
+                      </a:endParaRPr>
+                    </a:p>
+                  </a:txBody>
+                  <a:tcPr marL="38716" marR="38716" marT="0" marB="0">
+                    <a:lnL w="12700" cap="flat" cmpd="sng" algn="ctr">
+                      <a:solidFill>
+                        <a:schemeClr val="tx1"/>
+                      </a:solidFill>
+                      <a:prstDash val="solid"/>
+                      <a:round/>
+                      <a:headEnd type="none" w="med" len="med"/>
+                      <a:tailEnd type="none" w="med" len="med"/>
+                    </a:lnL>
+                    <a:lnR w="12700" cap="flat" cmpd="sng" algn="ctr">
+                      <a:solidFill>
+                        <a:schemeClr val="tx1"/>
+                      </a:solidFill>
+                      <a:prstDash val="solid"/>
+                      <a:round/>
+                      <a:headEnd type="none" w="med" len="med"/>
+                      <a:tailEnd type="none" w="med" len="med"/>
+                    </a:lnR>
+                    <a:lnT w="12700" cap="flat" cmpd="sng" algn="ctr">
+                      <a:solidFill>
+                        <a:schemeClr val="tx1"/>
+                      </a:solidFill>
+                      <a:prstDash val="solid"/>
+                      <a:round/>
+                      <a:headEnd type="none" w="med" len="med"/>
+                      <a:tailEnd type="none" w="med" len="med"/>
+                    </a:lnT>
+                    <a:lnB w="12700" cap="flat" cmpd="sng" algn="ctr">
+                      <a:solidFill>
+                        <a:schemeClr val="tx1"/>
+                      </a:solidFill>
+                      <a:prstDash val="solid"/>
+                      <a:round/>
+                      <a:headEnd type="none" w="med" len="med"/>
+                      <a:tailEnd type="none" w="med" len="med"/>
+                    </a:lnB>
+                  </a:tcPr>
+                </a:tc>
+                <a:tc>
+                  <a:txBody>
+                    <a:bodyPr/>
+                    <a:lstStyle/>
+                    <a:p>
+                      <a:pPr algn="ctr">
+                        <a:lnSpc>
+                          <a:spcPct val="115000"/>
+                        </a:lnSpc>
+                        <a:spcAft>
+                          <a:spcPts val="800"/>
+                        </a:spcAft>
+                        <a:buNone/>
+                      </a:pPr>
+                      <a:r>
+                        <a:rPr lang="en-GB" sz="1400" b="1" kern="100" dirty="0">
+                          <a:effectLst/>
+                        </a:rPr>
+                        <a:t>Infrastructure</a:t>
+                      </a:r>
+                      <a:endParaRPr lang="en-GB" sz="1400" b="1" kern="100" dirty="0">
+                        <a:effectLst/>
+                        <a:latin typeface="Aptos" panose="020B0004020202020204" pitchFamily="34" charset="0"/>
+                        <a:ea typeface="Aptos" panose="020B0004020202020204" pitchFamily="34" charset="0"/>
+                        <a:cs typeface="Times New Roman" panose="02020603050405020304" pitchFamily="18" charset="0"/>
+                      </a:endParaRPr>
+                    </a:p>
+                  </a:txBody>
+                  <a:tcPr marL="38716" marR="38716" marT="0" marB="0">
+                    <a:lnL w="12700" cap="flat" cmpd="sng" algn="ctr">
+                      <a:solidFill>
+                        <a:schemeClr val="tx1"/>
+                      </a:solidFill>
+                      <a:prstDash val="solid"/>
+                      <a:round/>
+                      <a:headEnd type="none" w="med" len="med"/>
+                      <a:tailEnd type="none" w="med" len="med"/>
+                    </a:lnL>
+                    <a:lnR w="12700" cap="flat" cmpd="sng" algn="ctr">
+                      <a:solidFill>
+                        <a:schemeClr val="tx1"/>
+                      </a:solidFill>
+                      <a:prstDash val="solid"/>
+                      <a:round/>
+                      <a:headEnd type="none" w="med" len="med"/>
+                      <a:tailEnd type="none" w="med" len="med"/>
+                    </a:lnR>
+                    <a:lnT w="12700" cap="flat" cmpd="sng" algn="ctr">
+                      <a:solidFill>
+                        <a:schemeClr val="tx1"/>
+                      </a:solidFill>
+                      <a:prstDash val="solid"/>
+                      <a:round/>
+                      <a:headEnd type="none" w="med" len="med"/>
+                      <a:tailEnd type="none" w="med" len="med"/>
+                    </a:lnT>
+                    <a:lnB w="12700" cap="flat" cmpd="sng" algn="ctr">
+                      <a:solidFill>
+                        <a:schemeClr val="tx1"/>
+                      </a:solidFill>
+                      <a:prstDash val="solid"/>
+                      <a:round/>
+                      <a:headEnd type="none" w="med" len="med"/>
+                      <a:tailEnd type="none" w="med" len="med"/>
+                    </a:lnB>
+                  </a:tcPr>
+                </a:tc>
+                <a:tc>
+                  <a:txBody>
+                    <a:bodyPr/>
+                    <a:lstStyle/>
+                    <a:p>
+                      <a:pPr>
+                        <a:lnSpc>
+                          <a:spcPct val="115000"/>
+                        </a:lnSpc>
+                        <a:spcAft>
+                          <a:spcPts val="800"/>
+                        </a:spcAft>
+                        <a:buNone/>
+                      </a:pPr>
+                      <a:r>
+                        <a:rPr lang="en-GB" sz="1400" kern="100">
+                          <a:effectLst/>
+                        </a:rPr>
+                        <a:t> </a:t>
+                      </a:r>
+                      <a:endParaRPr lang="en-GB" sz="1400" kern="100">
+                        <a:effectLst/>
+                        <a:latin typeface="Aptos" panose="020B0004020202020204" pitchFamily="34" charset="0"/>
+                        <a:ea typeface="Aptos" panose="020B0004020202020204" pitchFamily="34" charset="0"/>
+                        <a:cs typeface="Times New Roman" panose="02020603050405020304" pitchFamily="18" charset="0"/>
+                      </a:endParaRPr>
+                    </a:p>
+                  </a:txBody>
+                  <a:tcPr marL="38716" marR="38716" marT="0" marB="0">
+                    <a:lnL w="12700" cap="flat" cmpd="sng" algn="ctr">
+                      <a:solidFill>
+                        <a:schemeClr val="tx1"/>
+                      </a:solidFill>
+                      <a:prstDash val="solid"/>
+                      <a:round/>
+                      <a:headEnd type="none" w="med" len="med"/>
+                      <a:tailEnd type="none" w="med" len="med"/>
+                    </a:lnL>
+                    <a:lnR w="12700" cap="flat" cmpd="sng" algn="ctr">
+                      <a:solidFill>
+                        <a:schemeClr val="tx1"/>
+                      </a:solidFill>
+                      <a:prstDash val="solid"/>
+                      <a:round/>
+                      <a:headEnd type="none" w="med" len="med"/>
+                      <a:tailEnd type="none" w="med" len="med"/>
+                    </a:lnR>
+                    <a:lnT w="12700" cap="flat" cmpd="sng" algn="ctr">
+                      <a:solidFill>
+                        <a:schemeClr val="tx1"/>
+                      </a:solidFill>
+                      <a:prstDash val="solid"/>
+                      <a:round/>
+                      <a:headEnd type="none" w="med" len="med"/>
+                      <a:tailEnd type="none" w="med" len="med"/>
+                    </a:lnT>
+                    <a:lnB w="12700" cap="flat" cmpd="sng" algn="ctr">
+                      <a:solidFill>
+                        <a:schemeClr val="tx1"/>
+                      </a:solidFill>
+                      <a:prstDash val="solid"/>
+                      <a:round/>
+                      <a:headEnd type="none" w="med" len="med"/>
+                      <a:tailEnd type="none" w="med" len="med"/>
+                    </a:lnB>
+                  </a:tcPr>
+                </a:tc>
+                <a:tc>
+                  <a:txBody>
+                    <a:bodyPr/>
+                    <a:lstStyle/>
+                    <a:p>
+                      <a:pPr>
+                        <a:lnSpc>
+                          <a:spcPct val="115000"/>
+                        </a:lnSpc>
+                        <a:spcAft>
+                          <a:spcPts val="800"/>
+                        </a:spcAft>
+                        <a:buNone/>
+                      </a:pPr>
+                      <a:r>
+                        <a:rPr lang="en-GB" sz="1400" kern="100">
+                          <a:effectLst/>
+                        </a:rPr>
+                        <a:t> </a:t>
+                      </a:r>
+                      <a:endParaRPr lang="en-GB" sz="1400" kern="100">
+                        <a:effectLst/>
+                        <a:latin typeface="Aptos" panose="020B0004020202020204" pitchFamily="34" charset="0"/>
+                        <a:ea typeface="Aptos" panose="020B0004020202020204" pitchFamily="34" charset="0"/>
+                        <a:cs typeface="Times New Roman" panose="02020603050405020304" pitchFamily="18" charset="0"/>
+                      </a:endParaRPr>
+                    </a:p>
+                  </a:txBody>
+                  <a:tcPr marL="38716" marR="38716" marT="0" marB="0">
+                    <a:lnL w="12700" cap="flat" cmpd="sng" algn="ctr">
+                      <a:solidFill>
+                        <a:schemeClr val="tx1"/>
+                      </a:solidFill>
+                      <a:prstDash val="solid"/>
+                      <a:round/>
+                      <a:headEnd type="none" w="med" len="med"/>
+                      <a:tailEnd type="none" w="med" len="med"/>
+                    </a:lnL>
+                    <a:lnR w="12700" cap="flat" cmpd="sng" algn="ctr">
+                      <a:solidFill>
+                        <a:schemeClr val="tx1"/>
+                      </a:solidFill>
+                      <a:prstDash val="solid"/>
+                      <a:round/>
+                      <a:headEnd type="none" w="med" len="med"/>
+                      <a:tailEnd type="none" w="med" len="med"/>
+                    </a:lnR>
+                    <a:lnT w="12700" cap="flat" cmpd="sng" algn="ctr">
+                      <a:solidFill>
+                        <a:schemeClr val="tx1"/>
+                      </a:solidFill>
+                      <a:prstDash val="solid"/>
+                      <a:round/>
+                      <a:headEnd type="none" w="med" len="med"/>
+                      <a:tailEnd type="none" w="med" len="med"/>
+                    </a:lnT>
+                    <a:lnB w="12700" cap="flat" cmpd="sng" algn="ctr">
+                      <a:solidFill>
+                        <a:schemeClr val="tx1"/>
+                      </a:solidFill>
+                      <a:prstDash val="solid"/>
+                      <a:round/>
+                      <a:headEnd type="none" w="med" len="med"/>
+                      <a:tailEnd type="none" w="med" len="med"/>
+                    </a:lnB>
+                  </a:tcPr>
+                </a:tc>
+                <a:tc>
+                  <a:txBody>
+                    <a:bodyPr/>
+                    <a:lstStyle/>
+                    <a:p>
+                      <a:pPr>
+                        <a:lnSpc>
+                          <a:spcPct val="115000"/>
+                        </a:lnSpc>
+                        <a:spcAft>
+                          <a:spcPts val="800"/>
+                        </a:spcAft>
+                        <a:buNone/>
+                      </a:pPr>
+                      <a:r>
+                        <a:rPr lang="en-GB" sz="1400" kern="100">
+                          <a:effectLst/>
+                        </a:rPr>
+                        <a:t> </a:t>
+                      </a:r>
+                      <a:endParaRPr lang="en-GB" sz="1400" kern="100">
+                        <a:effectLst/>
+                        <a:latin typeface="Aptos" panose="020B0004020202020204" pitchFamily="34" charset="0"/>
+                        <a:ea typeface="Aptos" panose="020B0004020202020204" pitchFamily="34" charset="0"/>
+                        <a:cs typeface="Times New Roman" panose="02020603050405020304" pitchFamily="18" charset="0"/>
+                      </a:endParaRPr>
+                    </a:p>
+                  </a:txBody>
+                  <a:tcPr marL="38716" marR="38716" marT="0" marB="0">
+                    <a:lnL w="12700" cap="flat" cmpd="sng" algn="ctr">
+                      <a:solidFill>
+                        <a:schemeClr val="tx1"/>
+                      </a:solidFill>
+                      <a:prstDash val="solid"/>
+                      <a:round/>
+                      <a:headEnd type="none" w="med" len="med"/>
+                      <a:tailEnd type="none" w="med" len="med"/>
+                    </a:lnL>
+                    <a:lnR w="12700" cap="flat" cmpd="sng" algn="ctr">
+                      <a:solidFill>
+                        <a:schemeClr val="tx1"/>
+                      </a:solidFill>
+                      <a:prstDash val="solid"/>
+                      <a:round/>
+                      <a:headEnd type="none" w="med" len="med"/>
+                      <a:tailEnd type="none" w="med" len="med"/>
+                    </a:lnR>
+                    <a:lnT w="12700" cap="flat" cmpd="sng" algn="ctr">
+                      <a:solidFill>
+                        <a:schemeClr val="tx1"/>
+                      </a:solidFill>
+                      <a:prstDash val="solid"/>
+                      <a:round/>
+                      <a:headEnd type="none" w="med" len="med"/>
+                      <a:tailEnd type="none" w="med" len="med"/>
+                    </a:lnT>
+                    <a:lnB w="12700" cap="flat" cmpd="sng" algn="ctr">
+                      <a:solidFill>
+                        <a:schemeClr val="tx1"/>
+                      </a:solidFill>
+                      <a:prstDash val="solid"/>
+                      <a:round/>
+                      <a:headEnd type="none" w="med" len="med"/>
+                      <a:tailEnd type="none" w="med" len="med"/>
+                    </a:lnB>
+                  </a:tcPr>
+                </a:tc>
+                <a:tc>
+                  <a:txBody>
+                    <a:bodyPr/>
+                    <a:lstStyle/>
+                    <a:p>
+                      <a:pPr>
+                        <a:lnSpc>
+                          <a:spcPct val="115000"/>
+                        </a:lnSpc>
+                        <a:spcAft>
+                          <a:spcPts val="800"/>
+                        </a:spcAft>
+                        <a:buNone/>
+                      </a:pPr>
+                      <a:r>
+                        <a:rPr lang="en-GB" sz="1400" kern="100">
+                          <a:effectLst/>
+                        </a:rPr>
+                        <a:t> </a:t>
+                      </a:r>
+                      <a:endParaRPr lang="en-GB" sz="1400" kern="100">
+                        <a:effectLst/>
+                        <a:latin typeface="Aptos" panose="020B0004020202020204" pitchFamily="34" charset="0"/>
+                        <a:ea typeface="Aptos" panose="020B0004020202020204" pitchFamily="34" charset="0"/>
+                        <a:cs typeface="Times New Roman" panose="02020603050405020304" pitchFamily="18" charset="0"/>
+                      </a:endParaRPr>
+                    </a:p>
+                  </a:txBody>
+                  <a:tcPr marL="38716" marR="38716" marT="0" marB="0">
+                    <a:lnL w="12700" cap="flat" cmpd="sng" algn="ctr">
+                      <a:solidFill>
+                        <a:schemeClr val="tx1"/>
+                      </a:solidFill>
+                      <a:prstDash val="solid"/>
+                      <a:round/>
+                      <a:headEnd type="none" w="med" len="med"/>
+                      <a:tailEnd type="none" w="med" len="med"/>
+                    </a:lnL>
+                    <a:lnR w="12700" cap="flat" cmpd="sng" algn="ctr">
+                      <a:solidFill>
+                        <a:schemeClr val="tx1"/>
+                      </a:solidFill>
+                      <a:prstDash val="solid"/>
+                      <a:round/>
+                      <a:headEnd type="none" w="med" len="med"/>
+                      <a:tailEnd type="none" w="med" len="med"/>
+                    </a:lnR>
+                    <a:lnT w="12700" cap="flat" cmpd="sng" algn="ctr">
+                      <a:solidFill>
+                        <a:schemeClr val="tx1"/>
+                      </a:solidFill>
+                      <a:prstDash val="solid"/>
+                      <a:round/>
+                      <a:headEnd type="none" w="med" len="med"/>
+                      <a:tailEnd type="none" w="med" len="med"/>
+                    </a:lnT>
+                    <a:lnB w="12700" cap="flat" cmpd="sng" algn="ctr">
+                      <a:solidFill>
+                        <a:schemeClr val="tx1"/>
+                      </a:solidFill>
+                      <a:prstDash val="solid"/>
+                      <a:round/>
+                      <a:headEnd type="none" w="med" len="med"/>
+                      <a:tailEnd type="none" w="med" len="med"/>
+                    </a:lnB>
+                  </a:tcPr>
+                </a:tc>
+                <a:extLst>
+                  <a:ext uri="{0D108BD9-81ED-4DB2-BD59-A6C34878D82A}">
+                    <a16:rowId xmlns:a16="http://schemas.microsoft.com/office/drawing/2014/main" val="2348826315"/>
+                  </a:ext>
+                </a:extLst>
+              </a:tr>
+              <a:tr h="6127922">
+                <a:tc>
+                  <a:txBody>
+                    <a:bodyPr/>
+                    <a:lstStyle/>
+                    <a:p>
+                      <a:pPr>
+                        <a:lnSpc>
+                          <a:spcPct val="115000"/>
+                        </a:lnSpc>
+                        <a:spcAft>
+                          <a:spcPts val="800"/>
+                        </a:spcAft>
+                        <a:buNone/>
+                      </a:pPr>
+                      <a:r>
+                        <a:rPr lang="en-GB" sz="1400" b="0" kern="100" dirty="0">
+                          <a:effectLst/>
+                        </a:rPr>
+                        <a:t>Air quality</a:t>
+                      </a:r>
+                    </a:p>
+                    <a:p>
+                      <a:pPr>
+                        <a:lnSpc>
+                          <a:spcPct val="115000"/>
+                        </a:lnSpc>
+                        <a:spcAft>
+                          <a:spcPts val="800"/>
+                        </a:spcAft>
+                        <a:buNone/>
+                      </a:pPr>
+                      <a:r>
+                        <a:rPr lang="en-GB" sz="1400" b="0" kern="100" dirty="0">
+                          <a:effectLst/>
+                        </a:rPr>
+                        <a:t>Noise pollution</a:t>
+                      </a:r>
+                    </a:p>
+                    <a:p>
+                      <a:pPr>
+                        <a:lnSpc>
+                          <a:spcPct val="115000"/>
+                        </a:lnSpc>
+                        <a:spcAft>
+                          <a:spcPts val="800"/>
+                        </a:spcAft>
+                        <a:buNone/>
+                      </a:pPr>
+                      <a:r>
+                        <a:rPr lang="en-GB" sz="1400" b="0" kern="100" dirty="0">
+                          <a:effectLst/>
+                        </a:rPr>
+                        <a:t>Non-ionizing radiation</a:t>
+                      </a:r>
+                    </a:p>
+                    <a:p>
+                      <a:pPr>
+                        <a:lnSpc>
+                          <a:spcPct val="115000"/>
+                        </a:lnSpc>
+                        <a:spcAft>
+                          <a:spcPts val="800"/>
+                        </a:spcAft>
+                        <a:buNone/>
+                      </a:pPr>
+                      <a:r>
+                        <a:rPr lang="en-GB" sz="1400" b="0" kern="100" dirty="0">
+                          <a:effectLst/>
+                        </a:rPr>
+                        <a:t>Feels like temperature/heat stress</a:t>
+                      </a:r>
+                    </a:p>
+                    <a:p>
+                      <a:pPr>
+                        <a:lnSpc>
+                          <a:spcPct val="115000"/>
+                        </a:lnSpc>
+                        <a:spcAft>
+                          <a:spcPts val="800"/>
+                        </a:spcAft>
+                        <a:buNone/>
+                      </a:pPr>
+                      <a:r>
+                        <a:rPr lang="en-GB" sz="1400" b="0" kern="100" dirty="0">
+                          <a:effectLst/>
+                        </a:rPr>
+                        <a:t>Flooding</a:t>
+                      </a:r>
+                    </a:p>
+                    <a:p>
+                      <a:pPr>
+                        <a:lnSpc>
+                          <a:spcPct val="115000"/>
+                        </a:lnSpc>
+                        <a:spcAft>
+                          <a:spcPts val="800"/>
+                        </a:spcAft>
+                        <a:buNone/>
+                      </a:pPr>
+                      <a:r>
+                        <a:rPr lang="en-GB" sz="1400" b="0" kern="100" dirty="0">
+                          <a:effectLst/>
+                        </a:rPr>
+                        <a:t>Groundwater nuisance/soil subsidence</a:t>
+                      </a:r>
+                    </a:p>
+                    <a:p>
+                      <a:pPr>
+                        <a:lnSpc>
+                          <a:spcPct val="115000"/>
+                        </a:lnSpc>
+                        <a:spcAft>
+                          <a:spcPts val="800"/>
+                        </a:spcAft>
+                        <a:buNone/>
+                      </a:pPr>
+                      <a:r>
+                        <a:rPr lang="en-GB" sz="1400" b="0" kern="100" dirty="0">
+                          <a:effectLst/>
+                        </a:rPr>
+                        <a:t>Earthquakes</a:t>
+                      </a:r>
+                    </a:p>
+                    <a:p>
+                      <a:pPr>
+                        <a:lnSpc>
+                          <a:spcPct val="115000"/>
+                        </a:lnSpc>
+                        <a:spcAft>
+                          <a:spcPts val="800"/>
+                        </a:spcAft>
+                        <a:buNone/>
+                      </a:pPr>
+                      <a:r>
+                        <a:rPr lang="en-GB" sz="1400" b="0" kern="100" dirty="0">
+                          <a:effectLst/>
+                        </a:rPr>
+                        <a:t>Flood depth</a:t>
+                      </a:r>
+                    </a:p>
+                    <a:p>
+                      <a:pPr>
+                        <a:lnSpc>
+                          <a:spcPct val="115000"/>
+                        </a:lnSpc>
+                        <a:spcAft>
+                          <a:spcPts val="800"/>
+                        </a:spcAft>
+                        <a:buNone/>
+                      </a:pPr>
+                      <a:r>
+                        <a:rPr lang="en-GB" sz="1400" b="0" kern="100" dirty="0">
+                          <a:effectLst/>
+                        </a:rPr>
+                        <a:t>Proximity to forest/green space</a:t>
+                      </a:r>
+                    </a:p>
+                    <a:p>
+                      <a:pPr>
+                        <a:lnSpc>
+                          <a:spcPct val="115000"/>
+                        </a:lnSpc>
+                        <a:spcAft>
+                          <a:spcPts val="800"/>
+                        </a:spcAft>
+                        <a:buNone/>
+                      </a:pPr>
+                      <a:r>
+                        <a:rPr lang="en-GB" sz="1400" b="0" kern="100" dirty="0">
+                          <a:effectLst/>
+                        </a:rPr>
+                        <a:t>Air quality</a:t>
+                      </a:r>
+                    </a:p>
+                    <a:p>
+                      <a:pPr>
+                        <a:lnSpc>
+                          <a:spcPct val="115000"/>
+                        </a:lnSpc>
+                        <a:spcAft>
+                          <a:spcPts val="800"/>
+                        </a:spcAft>
+                        <a:buNone/>
+                      </a:pPr>
+                      <a:r>
+                        <a:rPr lang="en-GB" sz="1400" b="0" kern="100" dirty="0">
+                          <a:effectLst/>
+                        </a:rPr>
+                        <a:t>Proximity to landscape attractive for recreation</a:t>
+                      </a:r>
+                    </a:p>
+                    <a:p>
+                      <a:pPr>
+                        <a:lnSpc>
+                          <a:spcPct val="115000"/>
+                        </a:lnSpc>
+                        <a:spcAft>
+                          <a:spcPts val="800"/>
+                        </a:spcAft>
+                        <a:buNone/>
+                      </a:pPr>
+                      <a:r>
+                        <a:rPr lang="en-GB" sz="1400" b="0" kern="100" dirty="0">
+                          <a:effectLst/>
+                        </a:rPr>
+                        <a:t>Variety of landscapes</a:t>
+                      </a:r>
+                      <a:endParaRPr lang="en-GB" sz="1400" b="0" kern="100" dirty="0">
+                        <a:effectLst/>
+                        <a:latin typeface="Aptos" panose="020B0004020202020204" pitchFamily="34" charset="0"/>
+                        <a:ea typeface="Aptos" panose="020B0004020202020204" pitchFamily="34" charset="0"/>
+                        <a:cs typeface="Times New Roman" panose="02020603050405020304" pitchFamily="18" charset="0"/>
+                      </a:endParaRPr>
+                    </a:p>
+                  </a:txBody>
+                  <a:tcPr marL="38716" marR="38716" marT="0" marB="0">
+                    <a:lnL w="12700" cap="flat" cmpd="sng" algn="ctr">
+                      <a:solidFill>
+                        <a:schemeClr val="tx1"/>
+                      </a:solidFill>
+                      <a:prstDash val="solid"/>
+                      <a:round/>
+                      <a:headEnd type="none" w="med" len="med"/>
+                      <a:tailEnd type="none" w="med" len="med"/>
+                    </a:lnL>
+                    <a:lnR w="12700" cap="flat" cmpd="sng" algn="ctr">
+                      <a:solidFill>
+                        <a:schemeClr val="tx1"/>
+                      </a:solidFill>
+                      <a:prstDash val="solid"/>
+                      <a:round/>
+                      <a:headEnd type="none" w="med" len="med"/>
+                      <a:tailEnd type="none" w="med" len="med"/>
+                    </a:lnR>
+                    <a:lnT w="12700" cap="flat" cmpd="sng" algn="ctr">
+                      <a:solidFill>
+                        <a:schemeClr val="tx1"/>
+                      </a:solidFill>
+                      <a:prstDash val="solid"/>
+                      <a:round/>
+                      <a:headEnd type="none" w="med" len="med"/>
+                      <a:tailEnd type="none" w="med" len="med"/>
+                    </a:lnT>
+                    <a:lnB w="12700" cap="flat" cmpd="sng" algn="ctr">
+                      <a:solidFill>
+                        <a:schemeClr val="tx1"/>
+                      </a:solidFill>
+                      <a:prstDash val="solid"/>
+                      <a:round/>
+                      <a:headEnd type="none" w="med" len="med"/>
+                      <a:tailEnd type="none" w="med" len="med"/>
+                    </a:lnB>
+                  </a:tcPr>
+                </a:tc>
+                <a:tc>
+                  <a:txBody>
+                    <a:bodyPr/>
+                    <a:lstStyle/>
+                    <a:p>
+                      <a:pPr>
+                        <a:lnSpc>
+                          <a:spcPct val="115000"/>
+                        </a:lnSpc>
+                        <a:spcAft>
+                          <a:spcPts val="800"/>
+                        </a:spcAft>
+                        <a:buNone/>
+                      </a:pPr>
+                      <a:r>
+                        <a:rPr lang="en-GB" sz="1400" kern="100" dirty="0">
+                          <a:effectLst/>
+                        </a:rPr>
+                        <a:t>Proximity to (through) roads</a:t>
+                      </a:r>
+                    </a:p>
+                    <a:p>
+                      <a:pPr>
+                        <a:lnSpc>
+                          <a:spcPct val="115000"/>
+                        </a:lnSpc>
+                        <a:spcAft>
+                          <a:spcPts val="800"/>
+                        </a:spcAft>
+                        <a:buNone/>
+                      </a:pPr>
+                      <a:r>
+                        <a:rPr lang="en-GB" sz="1400" kern="100" dirty="0">
+                          <a:effectLst/>
+                        </a:rPr>
+                        <a:t>Proximity to rail infrastructure</a:t>
+                      </a:r>
+                    </a:p>
+                    <a:p>
+                      <a:pPr>
+                        <a:lnSpc>
+                          <a:spcPct val="115000"/>
+                        </a:lnSpc>
+                        <a:spcAft>
+                          <a:spcPts val="800"/>
+                        </a:spcAft>
+                        <a:buNone/>
+                      </a:pPr>
+                      <a:r>
+                        <a:rPr lang="en-GB" sz="1400" kern="100" dirty="0">
+                          <a:effectLst/>
+                        </a:rPr>
+                        <a:t>Traffic safety</a:t>
+                      </a:r>
+                    </a:p>
+                    <a:p>
+                      <a:pPr>
+                        <a:lnSpc>
+                          <a:spcPct val="115000"/>
+                        </a:lnSpc>
+                        <a:spcAft>
+                          <a:spcPts val="800"/>
+                        </a:spcAft>
+                        <a:buNone/>
+                      </a:pPr>
+                      <a:r>
+                        <a:rPr lang="en-GB" sz="1400" kern="100" dirty="0">
+                          <a:effectLst/>
+                        </a:rPr>
+                        <a:t>Car density</a:t>
+                      </a:r>
+                    </a:p>
+                    <a:p>
+                      <a:pPr>
+                        <a:lnSpc>
+                          <a:spcPct val="115000"/>
+                        </a:lnSpc>
+                        <a:spcAft>
+                          <a:spcPts val="800"/>
+                        </a:spcAft>
+                        <a:buNone/>
+                      </a:pPr>
+                      <a:r>
+                        <a:rPr lang="en-GB" sz="1400" kern="100" dirty="0">
+                          <a:effectLst/>
+                        </a:rPr>
+                        <a:t>Proximity to wind turbines</a:t>
+                      </a:r>
+                    </a:p>
+                    <a:p>
+                      <a:pPr>
+                        <a:lnSpc>
+                          <a:spcPct val="115000"/>
+                        </a:lnSpc>
+                        <a:spcAft>
+                          <a:spcPts val="800"/>
+                        </a:spcAft>
+                        <a:buNone/>
+                      </a:pPr>
+                      <a:r>
+                        <a:rPr lang="en-GB" sz="1400" kern="100" dirty="0">
+                          <a:effectLst/>
+                        </a:rPr>
+                        <a:t>Proximity to high-voltage pylons</a:t>
+                      </a:r>
+                    </a:p>
+                    <a:p>
+                      <a:pPr>
+                        <a:lnSpc>
+                          <a:spcPct val="115000"/>
+                        </a:lnSpc>
+                        <a:spcAft>
+                          <a:spcPts val="800"/>
+                        </a:spcAft>
+                        <a:buNone/>
+                      </a:pPr>
+                      <a:r>
+                        <a:rPr lang="en-GB" sz="1400" kern="100" dirty="0">
+                          <a:effectLst/>
+                        </a:rPr>
+                        <a:t>Quality of walking and cycling paths</a:t>
+                      </a:r>
+                    </a:p>
+                    <a:p>
+                      <a:pPr>
+                        <a:lnSpc>
+                          <a:spcPct val="115000"/>
+                        </a:lnSpc>
+                        <a:spcAft>
+                          <a:spcPts val="800"/>
+                        </a:spcAft>
+                        <a:buNone/>
+                      </a:pPr>
+                      <a:r>
+                        <a:rPr lang="en-GB" sz="1400" kern="100" dirty="0">
+                          <a:effectLst/>
+                        </a:rPr>
+                        <a:t>Mixed-use development</a:t>
+                      </a:r>
+                    </a:p>
+                    <a:p>
+                      <a:pPr>
+                        <a:lnSpc>
+                          <a:spcPct val="115000"/>
+                        </a:lnSpc>
+                        <a:spcAft>
+                          <a:spcPts val="800"/>
+                        </a:spcAft>
+                        <a:buNone/>
+                      </a:pPr>
+                      <a:r>
+                        <a:rPr lang="en-GB" sz="1400" kern="100" dirty="0">
+                          <a:effectLst/>
+                        </a:rPr>
+                        <a:t>Vacancy of non-residential real estate</a:t>
+                      </a:r>
+                    </a:p>
+                    <a:p>
+                      <a:pPr>
+                        <a:lnSpc>
+                          <a:spcPct val="115000"/>
+                        </a:lnSpc>
+                        <a:spcAft>
+                          <a:spcPts val="800"/>
+                        </a:spcAft>
+                        <a:buNone/>
+                      </a:pPr>
+                      <a:r>
+                        <a:rPr lang="en-GB" sz="1400" kern="100" dirty="0">
+                          <a:effectLst/>
+                        </a:rPr>
+                        <a:t>Walkability</a:t>
+                      </a:r>
+                      <a:endParaRPr lang="en-GB" sz="1400" kern="100" dirty="0">
+                        <a:effectLst/>
+                        <a:latin typeface="Aptos" panose="020B0004020202020204" pitchFamily="34" charset="0"/>
+                        <a:ea typeface="Aptos" panose="020B0004020202020204" pitchFamily="34" charset="0"/>
+                        <a:cs typeface="Times New Roman" panose="02020603050405020304" pitchFamily="18" charset="0"/>
+                      </a:endParaRPr>
+                    </a:p>
+                  </a:txBody>
+                  <a:tcPr marL="38716" marR="38716" marT="0" marB="0">
+                    <a:lnL w="12700" cap="flat" cmpd="sng" algn="ctr">
+                      <a:solidFill>
+                        <a:schemeClr val="tx1"/>
+                      </a:solidFill>
+                      <a:prstDash val="solid"/>
+                      <a:round/>
+                      <a:headEnd type="none" w="med" len="med"/>
+                      <a:tailEnd type="none" w="med" len="med"/>
+                    </a:lnL>
+                    <a:lnR w="12700" cap="flat" cmpd="sng" algn="ctr">
+                      <a:solidFill>
+                        <a:schemeClr val="tx1"/>
+                      </a:solidFill>
+                      <a:prstDash val="solid"/>
+                      <a:round/>
+                      <a:headEnd type="none" w="med" len="med"/>
+                      <a:tailEnd type="none" w="med" len="med"/>
+                    </a:lnR>
+                    <a:lnT w="12700" cap="flat" cmpd="sng" algn="ctr">
+                      <a:solidFill>
+                        <a:schemeClr val="tx1"/>
+                      </a:solidFill>
+                      <a:prstDash val="solid"/>
+                      <a:round/>
+                      <a:headEnd type="none" w="med" len="med"/>
+                      <a:tailEnd type="none" w="med" len="med"/>
+                    </a:lnT>
+                    <a:lnB w="12700" cap="flat" cmpd="sng" algn="ctr">
+                      <a:solidFill>
+                        <a:schemeClr val="tx1"/>
+                      </a:solidFill>
+                      <a:prstDash val="solid"/>
+                      <a:round/>
+                      <a:headEnd type="none" w="med" len="med"/>
+                      <a:tailEnd type="none" w="med" len="med"/>
+                    </a:lnB>
+                  </a:tcPr>
+                </a:tc>
+                <a:tc>
+                  <a:txBody>
+                    <a:bodyPr/>
+                    <a:lstStyle/>
+                    <a:p>
+                      <a:pPr>
+                        <a:lnSpc>
+                          <a:spcPct val="115000"/>
+                        </a:lnSpc>
+                        <a:spcAft>
+                          <a:spcPts val="800"/>
+                        </a:spcAft>
+                        <a:buNone/>
+                      </a:pPr>
+                      <a:r>
+                        <a:rPr lang="en-GB" sz="1400" kern="100" dirty="0">
+                          <a:effectLst/>
+                        </a:rPr>
+                        <a:t>Housing vacancy</a:t>
+                      </a:r>
+                    </a:p>
+                    <a:p>
+                      <a:pPr>
+                        <a:lnSpc>
+                          <a:spcPct val="115000"/>
+                        </a:lnSpc>
+                        <a:spcAft>
+                          <a:spcPts val="800"/>
+                        </a:spcAft>
+                        <a:buNone/>
+                      </a:pPr>
+                      <a:r>
+                        <a:rPr lang="en-GB" sz="1400" kern="100" dirty="0">
+                          <a:effectLst/>
+                        </a:rPr>
+                        <a:t>Building density</a:t>
+                      </a:r>
+                    </a:p>
+                    <a:p>
+                      <a:pPr>
+                        <a:lnSpc>
+                          <a:spcPct val="115000"/>
+                        </a:lnSpc>
+                        <a:spcAft>
+                          <a:spcPts val="800"/>
+                        </a:spcAft>
+                        <a:buNone/>
+                      </a:pPr>
+                      <a:r>
+                        <a:rPr lang="en-GB" sz="1400" kern="100" dirty="0">
+                          <a:effectLst/>
+                        </a:rPr>
+                        <a:t>Foundation problems</a:t>
+                      </a:r>
+                    </a:p>
+                    <a:p>
+                      <a:pPr>
+                        <a:lnSpc>
+                          <a:spcPct val="115000"/>
+                        </a:lnSpc>
+                        <a:spcAft>
+                          <a:spcPts val="800"/>
+                        </a:spcAft>
+                        <a:buNone/>
+                      </a:pPr>
+                      <a:r>
+                        <a:rPr lang="en-GB" sz="1400" kern="100" dirty="0">
+                          <a:effectLst/>
+                        </a:rPr>
+                        <a:t>Mixing of ownership structures</a:t>
+                      </a:r>
+                    </a:p>
+                    <a:p>
+                      <a:pPr>
+                        <a:lnSpc>
+                          <a:spcPct val="115000"/>
+                        </a:lnSpc>
+                        <a:spcAft>
+                          <a:spcPts val="800"/>
+                        </a:spcAft>
+                        <a:buNone/>
+                      </a:pPr>
+                      <a:r>
+                        <a:rPr lang="en-GB" sz="1400" kern="100" dirty="0">
+                          <a:effectLst/>
+                        </a:rPr>
+                        <a:t>Energy quality</a:t>
+                      </a:r>
+                    </a:p>
+                    <a:p>
+                      <a:pPr>
+                        <a:lnSpc>
+                          <a:spcPct val="115000"/>
+                        </a:lnSpc>
+                        <a:spcAft>
+                          <a:spcPts val="800"/>
+                        </a:spcAft>
+                        <a:buNone/>
+                      </a:pPr>
+                      <a:r>
+                        <a:rPr lang="en-GB" sz="1400" kern="100" dirty="0">
+                          <a:effectLst/>
+                        </a:rPr>
+                        <a:t>Home ownership</a:t>
+                      </a:r>
+                    </a:p>
+                    <a:p>
+                      <a:pPr>
+                        <a:lnSpc>
+                          <a:spcPct val="115000"/>
+                        </a:lnSpc>
+                        <a:spcAft>
+                          <a:spcPts val="800"/>
+                        </a:spcAft>
+                        <a:buNone/>
+                      </a:pPr>
+                      <a:r>
+                        <a:rPr lang="en-GB" sz="1400" kern="100" dirty="0">
+                          <a:effectLst/>
+                        </a:rPr>
+                        <a:t>Specific poorly maintained segments</a:t>
+                      </a:r>
+                    </a:p>
+                    <a:p>
+                      <a:pPr>
+                        <a:lnSpc>
+                          <a:spcPct val="115000"/>
+                        </a:lnSpc>
+                        <a:spcAft>
+                          <a:spcPts val="800"/>
+                        </a:spcAft>
+                        <a:buNone/>
+                      </a:pPr>
+                      <a:r>
+                        <a:rPr lang="en-GB" sz="1400" kern="100" dirty="0">
+                          <a:effectLst/>
+                        </a:rPr>
+                        <a:t>Home ownership in relation to insufficient income</a:t>
+                      </a:r>
+                    </a:p>
+                    <a:p>
+                      <a:pPr>
+                        <a:lnSpc>
+                          <a:spcPct val="115000"/>
+                        </a:lnSpc>
+                        <a:spcAft>
+                          <a:spcPts val="800"/>
+                        </a:spcAft>
+                        <a:buNone/>
+                      </a:pPr>
+                      <a:r>
+                        <a:rPr lang="en-GB" sz="1400" kern="100" dirty="0">
+                          <a:effectLst/>
+                        </a:rPr>
+                        <a:t>Use of solar panels</a:t>
+                      </a:r>
+                    </a:p>
+                    <a:p>
+                      <a:pPr>
+                        <a:lnSpc>
+                          <a:spcPct val="115000"/>
+                        </a:lnSpc>
+                        <a:spcAft>
+                          <a:spcPts val="800"/>
+                        </a:spcAft>
+                        <a:buNone/>
+                      </a:pPr>
+                      <a:r>
+                        <a:rPr lang="en-GB" sz="1400" kern="100" dirty="0">
+                          <a:effectLst/>
+                        </a:rPr>
+                        <a:t>Share of listed buildings</a:t>
+                      </a:r>
+                    </a:p>
+                    <a:p>
+                      <a:pPr>
+                        <a:lnSpc>
+                          <a:spcPct val="115000"/>
+                        </a:lnSpc>
+                        <a:spcAft>
+                          <a:spcPts val="800"/>
+                        </a:spcAft>
+                        <a:buNone/>
+                      </a:pPr>
+                      <a:r>
+                        <a:rPr lang="en-GB" sz="1400" kern="100" dirty="0">
+                          <a:effectLst/>
+                        </a:rPr>
+                        <a:t>Renovations of homes Overcrowding</a:t>
+                      </a:r>
+                    </a:p>
+                    <a:p>
+                      <a:pPr>
+                        <a:lnSpc>
+                          <a:spcPct val="115000"/>
+                        </a:lnSpc>
+                        <a:spcAft>
+                          <a:spcPts val="800"/>
+                        </a:spcAft>
+                        <a:buNone/>
+                      </a:pPr>
+                      <a:r>
+                        <a:rPr lang="en-GB" sz="1400" kern="100" dirty="0">
+                          <a:effectLst/>
+                        </a:rPr>
+                        <a:t>Housing types</a:t>
+                      </a:r>
+                      <a:endParaRPr lang="en-GB" sz="1400" kern="100" dirty="0">
+                        <a:effectLst/>
+                        <a:latin typeface="Aptos" panose="020B0004020202020204" pitchFamily="34" charset="0"/>
+                        <a:ea typeface="Aptos" panose="020B0004020202020204" pitchFamily="34" charset="0"/>
+                        <a:cs typeface="Times New Roman" panose="02020603050405020304" pitchFamily="18" charset="0"/>
+                      </a:endParaRPr>
+                    </a:p>
+                  </a:txBody>
+                  <a:tcPr marL="38716" marR="38716" marT="0" marB="0">
+                    <a:lnL w="12700" cap="flat" cmpd="sng" algn="ctr">
+                      <a:solidFill>
+                        <a:schemeClr val="tx1"/>
+                      </a:solidFill>
+                      <a:prstDash val="solid"/>
+                      <a:round/>
+                      <a:headEnd type="none" w="med" len="med"/>
+                      <a:tailEnd type="none" w="med" len="med"/>
+                    </a:lnL>
+                    <a:lnR w="12700" cap="flat" cmpd="sng" algn="ctr">
+                      <a:solidFill>
+                        <a:schemeClr val="tx1"/>
+                      </a:solidFill>
+                      <a:prstDash val="solid"/>
+                      <a:round/>
+                      <a:headEnd type="none" w="med" len="med"/>
+                      <a:tailEnd type="none" w="med" len="med"/>
+                    </a:lnR>
+                    <a:lnT w="12700" cap="flat" cmpd="sng" algn="ctr">
+                      <a:solidFill>
+                        <a:schemeClr val="tx1"/>
+                      </a:solidFill>
+                      <a:prstDash val="solid"/>
+                      <a:round/>
+                      <a:headEnd type="none" w="med" len="med"/>
+                      <a:tailEnd type="none" w="med" len="med"/>
+                    </a:lnT>
+                    <a:lnB w="12700" cap="flat" cmpd="sng" algn="ctr">
+                      <a:solidFill>
+                        <a:schemeClr val="tx1"/>
+                      </a:solidFill>
+                      <a:prstDash val="solid"/>
+                      <a:round/>
+                      <a:headEnd type="none" w="med" len="med"/>
+                      <a:tailEnd type="none" w="med" len="med"/>
+                    </a:lnB>
+                  </a:tcPr>
+                </a:tc>
+                <a:tc>
+                  <a:txBody>
+                    <a:bodyPr/>
+                    <a:lstStyle/>
+                    <a:p>
+                      <a:pPr>
+                        <a:lnSpc>
+                          <a:spcPct val="115000"/>
+                        </a:lnSpc>
+                        <a:spcAft>
+                          <a:spcPts val="800"/>
+                        </a:spcAft>
+                        <a:buNone/>
+                      </a:pPr>
+                      <a:r>
+                        <a:rPr lang="en-GB" sz="1400" kern="100" dirty="0">
+                          <a:effectLst/>
+                        </a:rPr>
+                        <a:t>(Public) transport</a:t>
+                      </a:r>
+                    </a:p>
+                    <a:p>
+                      <a:pPr>
+                        <a:lnSpc>
+                          <a:spcPct val="115000"/>
+                        </a:lnSpc>
+                        <a:spcAft>
+                          <a:spcPts val="800"/>
+                        </a:spcAft>
+                        <a:buNone/>
+                      </a:pPr>
+                      <a:r>
+                        <a:rPr lang="en-GB" sz="1400" kern="100" dirty="0">
+                          <a:effectLst/>
+                        </a:rPr>
+                        <a:t>Shops/retail</a:t>
+                      </a:r>
+                    </a:p>
+                    <a:p>
+                      <a:pPr>
+                        <a:lnSpc>
+                          <a:spcPct val="115000"/>
+                        </a:lnSpc>
+                        <a:spcAft>
+                          <a:spcPts val="800"/>
+                        </a:spcAft>
+                        <a:buNone/>
+                      </a:pPr>
+                      <a:r>
+                        <a:rPr lang="en-GB" sz="1400" kern="100" dirty="0">
+                          <a:effectLst/>
+                        </a:rPr>
+                        <a:t>Education</a:t>
+                      </a:r>
+                    </a:p>
+                    <a:p>
+                      <a:pPr>
+                        <a:lnSpc>
+                          <a:spcPct val="115000"/>
+                        </a:lnSpc>
+                        <a:spcAft>
+                          <a:spcPts val="800"/>
+                        </a:spcAft>
+                        <a:buNone/>
+                      </a:pPr>
+                      <a:r>
+                        <a:rPr lang="en-GB" sz="1400" kern="100" dirty="0">
+                          <a:effectLst/>
+                        </a:rPr>
+                        <a:t>Care and support</a:t>
+                      </a:r>
+                    </a:p>
+                    <a:p>
+                      <a:pPr>
+                        <a:lnSpc>
+                          <a:spcPct val="115000"/>
+                        </a:lnSpc>
+                        <a:spcAft>
+                          <a:spcPts val="800"/>
+                        </a:spcAft>
+                        <a:buNone/>
+                      </a:pPr>
+                      <a:r>
+                        <a:rPr lang="en-GB" sz="1400" kern="100" dirty="0">
+                          <a:effectLst/>
+                        </a:rPr>
+                        <a:t>Hospitality/social gatherings</a:t>
+                      </a:r>
+                    </a:p>
+                    <a:p>
+                      <a:pPr>
+                        <a:lnSpc>
+                          <a:spcPct val="115000"/>
+                        </a:lnSpc>
+                        <a:spcAft>
+                          <a:spcPts val="800"/>
+                        </a:spcAft>
+                        <a:buNone/>
+                      </a:pPr>
+                      <a:r>
+                        <a:rPr lang="en-GB" sz="1400" kern="100" dirty="0">
+                          <a:effectLst/>
+                        </a:rPr>
+                        <a:t>Leisure, culture, etc.</a:t>
+                      </a:r>
+                    </a:p>
+                    <a:p>
+                      <a:pPr>
+                        <a:lnSpc>
+                          <a:spcPct val="115000"/>
+                        </a:lnSpc>
+                        <a:spcAft>
+                          <a:spcPts val="800"/>
+                        </a:spcAft>
+                        <a:buNone/>
+                      </a:pPr>
+                      <a:r>
+                        <a:rPr lang="en-GB" sz="1400" kern="100" dirty="0">
+                          <a:effectLst/>
+                        </a:rPr>
+                        <a:t>Sports facilities</a:t>
+                      </a:r>
+                    </a:p>
+                    <a:p>
+                      <a:pPr>
+                        <a:lnSpc>
+                          <a:spcPct val="115000"/>
+                        </a:lnSpc>
+                        <a:spcAft>
+                          <a:spcPts val="800"/>
+                        </a:spcAft>
+                        <a:buNone/>
+                      </a:pPr>
+                      <a:r>
+                        <a:rPr lang="en-GB" sz="1400" kern="100" dirty="0">
+                          <a:effectLst/>
+                        </a:rPr>
+                        <a:t>Track accessibility</a:t>
+                      </a:r>
+                      <a:endParaRPr lang="en-GB" sz="1400" kern="100" dirty="0">
+                        <a:effectLst/>
+                        <a:latin typeface="Aptos" panose="020B0004020202020204" pitchFamily="34" charset="0"/>
+                        <a:ea typeface="Aptos" panose="020B0004020202020204" pitchFamily="34" charset="0"/>
+                        <a:cs typeface="Times New Roman" panose="02020603050405020304" pitchFamily="18" charset="0"/>
+                      </a:endParaRPr>
+                    </a:p>
+                  </a:txBody>
+                  <a:tcPr marL="38716" marR="38716" marT="0" marB="0">
+                    <a:lnL w="12700" cap="flat" cmpd="sng" algn="ctr">
+                      <a:solidFill>
+                        <a:schemeClr val="tx1"/>
+                      </a:solidFill>
+                      <a:prstDash val="solid"/>
+                      <a:round/>
+                      <a:headEnd type="none" w="med" len="med"/>
+                      <a:tailEnd type="none" w="med" len="med"/>
+                    </a:lnL>
+                    <a:lnR w="12700" cap="flat" cmpd="sng" algn="ctr">
+                      <a:solidFill>
+                        <a:schemeClr val="tx1"/>
+                      </a:solidFill>
+                      <a:prstDash val="solid"/>
+                      <a:round/>
+                      <a:headEnd type="none" w="med" len="med"/>
+                      <a:tailEnd type="none" w="med" len="med"/>
+                    </a:lnR>
+                    <a:lnT w="12700" cap="flat" cmpd="sng" algn="ctr">
+                      <a:solidFill>
+                        <a:schemeClr val="tx1"/>
+                      </a:solidFill>
+                      <a:prstDash val="solid"/>
+                      <a:round/>
+                      <a:headEnd type="none" w="med" len="med"/>
+                      <a:tailEnd type="none" w="med" len="med"/>
+                    </a:lnT>
+                    <a:lnB w="12700" cap="flat" cmpd="sng" algn="ctr">
+                      <a:solidFill>
+                        <a:schemeClr val="tx1"/>
+                      </a:solidFill>
+                      <a:prstDash val="solid"/>
+                      <a:round/>
+                      <a:headEnd type="none" w="med" len="med"/>
+                      <a:tailEnd type="none" w="med" len="med"/>
+                    </a:lnB>
+                  </a:tcPr>
+                </a:tc>
+                <a:tc>
+                  <a:txBody>
+                    <a:bodyPr/>
+                    <a:lstStyle/>
+                    <a:p>
+                      <a:pPr>
+                        <a:lnSpc>
+                          <a:spcPct val="115000"/>
+                        </a:lnSpc>
+                        <a:spcAft>
+                          <a:spcPts val="800"/>
+                        </a:spcAft>
+                        <a:buNone/>
+                      </a:pPr>
+                      <a:r>
+                        <a:rPr lang="en-GB" sz="1400" kern="100" dirty="0">
+                          <a:effectLst/>
+                        </a:rPr>
+                        <a:t>(Diversity by) life stage</a:t>
+                      </a:r>
+                    </a:p>
+                    <a:p>
+                      <a:pPr>
+                        <a:lnSpc>
+                          <a:spcPct val="115000"/>
+                        </a:lnSpc>
+                        <a:spcAft>
+                          <a:spcPts val="800"/>
+                        </a:spcAft>
+                        <a:buNone/>
+                      </a:pPr>
+                      <a:r>
+                        <a:rPr lang="en-GB" sz="1400" kern="100" dirty="0">
+                          <a:effectLst/>
+                        </a:rPr>
+                        <a:t>Social cohesion</a:t>
+                      </a:r>
+                    </a:p>
+                    <a:p>
+                      <a:pPr>
+                        <a:lnSpc>
+                          <a:spcPct val="115000"/>
+                        </a:lnSpc>
+                        <a:spcAft>
+                          <a:spcPts val="800"/>
+                        </a:spcAft>
+                        <a:buNone/>
+                      </a:pPr>
+                      <a:r>
+                        <a:rPr lang="en-GB" sz="1400" kern="100" dirty="0">
+                          <a:effectLst/>
+                        </a:rPr>
+                        <a:t>Tuition rate</a:t>
+                      </a:r>
+                    </a:p>
+                    <a:p>
+                      <a:pPr>
+                        <a:lnSpc>
+                          <a:spcPct val="115000"/>
+                        </a:lnSpc>
+                        <a:spcAft>
+                          <a:spcPts val="800"/>
+                        </a:spcAft>
+                        <a:buNone/>
+                      </a:pPr>
+                      <a:r>
+                        <a:rPr lang="en-GB" sz="1400" kern="100" dirty="0">
+                          <a:effectLst/>
+                        </a:rPr>
+                        <a:t>Population density</a:t>
+                      </a:r>
+                    </a:p>
+                    <a:p>
+                      <a:pPr>
+                        <a:lnSpc>
+                          <a:spcPct val="115000"/>
+                        </a:lnSpc>
+                        <a:spcAft>
+                          <a:spcPts val="800"/>
+                        </a:spcAft>
+                        <a:buNone/>
+                      </a:pPr>
+                      <a:r>
+                        <a:rPr lang="en-GB" sz="1400" kern="100" dirty="0">
+                          <a:effectLst/>
+                        </a:rPr>
+                        <a:t>Population development</a:t>
+                      </a:r>
+                      <a:endParaRPr lang="en-GB" sz="1400" kern="100" dirty="0">
+                        <a:effectLst/>
+                        <a:latin typeface="Aptos" panose="020B0004020202020204" pitchFamily="34" charset="0"/>
+                        <a:ea typeface="Aptos" panose="020B0004020202020204" pitchFamily="34" charset="0"/>
+                        <a:cs typeface="Times New Roman" panose="02020603050405020304" pitchFamily="18" charset="0"/>
+                      </a:endParaRPr>
+                    </a:p>
+                  </a:txBody>
+                  <a:tcPr marL="38716" marR="38716" marT="0" marB="0">
+                    <a:lnL w="12700" cap="flat" cmpd="sng" algn="ctr">
+                      <a:solidFill>
+                        <a:schemeClr val="tx1"/>
+                      </a:solidFill>
+                      <a:prstDash val="solid"/>
+                      <a:round/>
+                      <a:headEnd type="none" w="med" len="med"/>
+                      <a:tailEnd type="none" w="med" len="med"/>
+                    </a:lnL>
+                    <a:lnR w="12700" cap="flat" cmpd="sng" algn="ctr">
+                      <a:solidFill>
+                        <a:schemeClr val="tx1"/>
+                      </a:solidFill>
+                      <a:prstDash val="solid"/>
+                      <a:round/>
+                      <a:headEnd type="none" w="med" len="med"/>
+                      <a:tailEnd type="none" w="med" len="med"/>
+                    </a:lnR>
+                    <a:lnT w="12700" cap="flat" cmpd="sng" algn="ctr">
+                      <a:solidFill>
+                        <a:schemeClr val="tx1"/>
+                      </a:solidFill>
+                      <a:prstDash val="solid"/>
+                      <a:round/>
+                      <a:headEnd type="none" w="med" len="med"/>
+                      <a:tailEnd type="none" w="med" len="med"/>
+                    </a:lnT>
+                    <a:lnB w="12700" cap="flat" cmpd="sng" algn="ctr">
+                      <a:solidFill>
+                        <a:schemeClr val="tx1"/>
+                      </a:solidFill>
+                      <a:prstDash val="solid"/>
+                      <a:round/>
+                      <a:headEnd type="none" w="med" len="med"/>
+                      <a:tailEnd type="none" w="med" len="med"/>
+                    </a:lnB>
+                  </a:tcPr>
+                </a:tc>
+                <a:tc>
+                  <a:txBody>
+                    <a:bodyPr/>
+                    <a:lstStyle/>
+                    <a:p>
+                      <a:pPr>
+                        <a:lnSpc>
+                          <a:spcPct val="115000"/>
+                        </a:lnSpc>
+                        <a:spcAft>
+                          <a:spcPts val="800"/>
+                        </a:spcAft>
+                        <a:buNone/>
+                      </a:pPr>
+                      <a:r>
+                        <a:rPr lang="en-GB" sz="1400" kern="100" dirty="0">
+                          <a:effectLst/>
+                        </a:rPr>
+                        <a:t>Registered crimes</a:t>
+                      </a:r>
+                    </a:p>
+                    <a:p>
+                      <a:pPr>
+                        <a:lnSpc>
+                          <a:spcPct val="115000"/>
+                        </a:lnSpc>
+                        <a:spcAft>
+                          <a:spcPts val="800"/>
+                        </a:spcAft>
+                        <a:buNone/>
+                      </a:pPr>
+                      <a:r>
+                        <a:rPr lang="en-GB" sz="1400" kern="100" dirty="0">
+                          <a:effectLst/>
+                        </a:rPr>
+                        <a:t>Perceived safety</a:t>
+                      </a:r>
+                    </a:p>
+                    <a:p>
+                      <a:pPr>
+                        <a:lnSpc>
+                          <a:spcPct val="115000"/>
+                        </a:lnSpc>
+                        <a:spcAft>
+                          <a:spcPts val="800"/>
+                        </a:spcAft>
+                        <a:buNone/>
+                      </a:pPr>
+                      <a:r>
+                        <a:rPr lang="en-GB" sz="1400" kern="100" dirty="0">
+                          <a:effectLst/>
+                        </a:rPr>
+                        <a:t>Perceived nuisance</a:t>
+                      </a:r>
+                      <a:endParaRPr lang="en-GB" sz="1400" kern="100" dirty="0">
+                        <a:effectLst/>
+                        <a:latin typeface="Aptos" panose="020B0004020202020204" pitchFamily="34" charset="0"/>
+                        <a:ea typeface="Aptos" panose="020B0004020202020204" pitchFamily="34" charset="0"/>
+                        <a:cs typeface="Times New Roman" panose="02020603050405020304" pitchFamily="18" charset="0"/>
+                      </a:endParaRPr>
+                    </a:p>
+                  </a:txBody>
+                  <a:tcPr marL="38716" marR="38716" marT="0" marB="0">
+                    <a:lnL w="12700" cap="flat" cmpd="sng" algn="ctr">
+                      <a:solidFill>
+                        <a:schemeClr val="tx1"/>
+                      </a:solidFill>
+                      <a:prstDash val="solid"/>
+                      <a:round/>
+                      <a:headEnd type="none" w="med" len="med"/>
+                      <a:tailEnd type="none" w="med" len="med"/>
+                    </a:lnL>
+                    <a:lnR w="12700" cap="flat" cmpd="sng" algn="ctr">
+                      <a:solidFill>
+                        <a:schemeClr val="tx1"/>
+                      </a:solidFill>
+                      <a:prstDash val="solid"/>
+                      <a:round/>
+                      <a:headEnd type="none" w="med" len="med"/>
+                      <a:tailEnd type="none" w="med" len="med"/>
+                    </a:lnR>
+                    <a:lnT w="12700" cap="flat" cmpd="sng" algn="ctr">
+                      <a:solidFill>
+                        <a:schemeClr val="tx1"/>
+                      </a:solidFill>
+                      <a:prstDash val="solid"/>
+                      <a:round/>
+                      <a:headEnd type="none" w="med" len="med"/>
+                      <a:tailEnd type="none" w="med" len="med"/>
+                    </a:lnT>
+                    <a:lnB w="12700" cap="flat" cmpd="sng" algn="ctr">
+                      <a:solidFill>
+                        <a:schemeClr val="tx1"/>
+                      </a:solidFill>
+                      <a:prstDash val="solid"/>
+                      <a:round/>
+                      <a:headEnd type="none" w="med" len="med"/>
+                      <a:tailEnd type="none" w="med" len="med"/>
+                    </a:lnB>
+                  </a:tcPr>
+                </a:tc>
+                <a:extLst>
+                  <a:ext uri="{0D108BD9-81ED-4DB2-BD59-A6C34878D82A}">
+                    <a16:rowId xmlns:a16="http://schemas.microsoft.com/office/drawing/2014/main" val="387118945"/>
+                  </a:ext>
+                </a:extLst>
+              </a:tr>
+            </a:tbl>
+          </a:graphicData>
+        </a:graphic>
+      </p:graphicFrame>
+    </p:spTree>
+    <p:extLst>
+      <p:ext uri="{BB962C8B-B14F-4D97-AF65-F5344CB8AC3E}">
+        <p14:creationId xmlns:p14="http://schemas.microsoft.com/office/powerpoint/2010/main" val="4032450718"/>
+      </p:ext>
+    </p:extLst>
+  </p:cSld>
+  <p:clrMapOvr>
+    <a:masterClrMapping/>
+  </p:clrMapOvr>
+</p:sld>
+</file>
+
+<file path=ppt/slides/slide9.xml><?xml version="1.0" encoding="utf-8"?>
+<p:sld xmlns:a="http://schemas.openxmlformats.org/drawingml/2006/main" xmlns:r="http://schemas.openxmlformats.org/officeDocument/2006/relationships" xmlns:p="http://schemas.openxmlformats.org/presentationml/2006/main">
+  <p:cSld>
+    <p:spTree>
+      <p:nvGrpSpPr>
+        <p:cNvPr id="1" name=""/>
+        <p:cNvGrpSpPr/>
+        <p:nvPr/>
+      </p:nvGrpSpPr>
+      <p:grpSpPr>
+        <a:xfrm>
+          <a:off x="0" y="0"/>
+          <a:ext cx="0" cy="0"/>
+          <a:chOff x="0" y="0"/>
+          <a:chExt cx="0" cy="0"/>
+        </a:xfrm>
+      </p:grpSpPr>
       <p:sp>
         <p:nvSpPr>
           <p:cNvPr id="2" name="Title 1">
             <a:extLst>
               <a:ext uri="{FF2B5EF4-FFF2-40B4-BE49-F238E27FC236}">
-                <a16:creationId xmlns:a16="http://schemas.microsoft.com/office/drawing/2014/main" id="{83A5E6E3-AEBA-9155-B302-16E4B1111754}"/>
+                <a16:creationId xmlns:a16="http://schemas.microsoft.com/office/drawing/2014/main" id="{2667DB29-D704-7649-E63C-610D8F7CEBAF}"/>
               </a:ext>
             </a:extLst>
           </p:cNvPr>
@@ -8749,115 +12515,336 @@
               <a:rPr lang="en-US" sz="4000" b="1" dirty="0">
                 <a:latin typeface="Aptos" panose="020B0004020202020204" pitchFamily="34" charset="0"/>
               </a:rPr>
-              <a:t>DISCUSSION</a:t>
-            </a:r>
-            <a:endParaRPr lang="en-NL" sz="4000" b="1" dirty="0">
-              <a:latin typeface="Aptos" panose="020B0004020202020204" pitchFamily="34" charset="0"/>
-            </a:endParaRPr>
-          </a:p>
-        </p:txBody>
-      </p:sp>
-      <p:sp>
-        <p:nvSpPr>
-          <p:cNvPr id="3" name="Content Placeholder 2">
-            <a:extLst>
-              <a:ext uri="{FF2B5EF4-FFF2-40B4-BE49-F238E27FC236}">
-                <a16:creationId xmlns:a16="http://schemas.microsoft.com/office/drawing/2014/main" id="{28E6E416-C70A-6027-5F9B-7B2ABF0F2D83}"/>
-              </a:ext>
-            </a:extLst>
-          </p:cNvPr>
-          <p:cNvSpPr>
-            <a:spLocks noGrp="1"/>
-          </p:cNvSpPr>
-          <p:nvPr>
-            <p:ph idx="1"/>
-          </p:nvPr>
-        </p:nvSpPr>
-        <p:spPr/>
-        <p:txBody>
-          <a:bodyPr/>
+              <a:t>DATA</a:t>
+            </a:r>
+            <a:endParaRPr lang="en-NL" sz="4000" dirty="0"/>
+          </a:p>
+        </p:txBody>
+      </p:sp>
+      <p:pic>
+        <p:nvPicPr>
+          <p:cNvPr id="1026" name="Picture 2" descr="Survey Data Netherlands - About">
+            <a:extLst>
+              <a:ext uri="{FF2B5EF4-FFF2-40B4-BE49-F238E27FC236}">
+                <a16:creationId xmlns:a16="http://schemas.microsoft.com/office/drawing/2014/main" id="{912863B4-A454-920F-55D4-E828CD9836AF}"/>
+              </a:ext>
+            </a:extLst>
+          </p:cNvPr>
+          <p:cNvPicPr>
+            <a:picLocks noChangeAspect="1" noChangeArrowheads="1"/>
+          </p:cNvPicPr>
+          <p:nvPr/>
+        </p:nvPicPr>
+        <p:blipFill>
+          <a:blip r:embed="rId3">
+            <a:extLst>
+              <a:ext uri="{28A0092B-C50C-407E-A947-70E740481C1C}">
+                <a14:useLocalDpi xmlns:a14="http://schemas.microsoft.com/office/drawing/2010/main" val="0"/>
+              </a:ext>
+            </a:extLst>
+          </a:blip>
+          <a:srcRect/>
+          <a:stretch>
+            <a:fillRect/>
+          </a:stretch>
+        </p:blipFill>
+        <p:spPr bwMode="auto">
+          <a:xfrm>
+            <a:off x="360528" y="1484149"/>
+            <a:ext cx="1958068" cy="1958068"/>
+          </a:xfrm>
+          <a:prstGeom prst="rect">
+            <a:avLst/>
+          </a:prstGeom>
+          <a:noFill/>
+          <a:extLst>
+            <a:ext uri="{909E8E84-426E-40DD-AFC4-6F175D3DCCD1}">
+              <a14:hiddenFill xmlns:a14="http://schemas.microsoft.com/office/drawing/2010/main">
+                <a:solidFill>
+                  <a:srgbClr val="FFFFFF"/>
+                </a:solidFill>
+              </a14:hiddenFill>
+            </a:ext>
+          </a:extLst>
+        </p:spPr>
+      </p:pic>
+      <p:pic>
+        <p:nvPicPr>
+          <p:cNvPr id="12" name="Picture 11">
+            <a:extLst>
+              <a:ext uri="{FF2B5EF4-FFF2-40B4-BE49-F238E27FC236}">
+                <a16:creationId xmlns:a16="http://schemas.microsoft.com/office/drawing/2014/main" id="{B0B51224-3C30-98CB-EE9A-B726F75CA57A}"/>
+              </a:ext>
+            </a:extLst>
+          </p:cNvPr>
+          <p:cNvPicPr>
+            <a:picLocks noChangeAspect="1"/>
+          </p:cNvPicPr>
+          <p:nvPr/>
+        </p:nvPicPr>
+        <p:blipFill>
+          <a:blip r:embed="rId4"/>
+          <a:srcRect l="303" t="19448" r="72747" b="64625"/>
+          <a:stretch>
+            <a:fillRect/>
+          </a:stretch>
+        </p:blipFill>
+        <p:spPr>
+          <a:xfrm>
+            <a:off x="2747376" y="1588755"/>
+            <a:ext cx="4944730" cy="1643743"/>
+          </a:xfrm>
+          <a:prstGeom prst="rect">
+            <a:avLst/>
+          </a:prstGeom>
+        </p:spPr>
+      </p:pic>
+      <p:pic>
+        <p:nvPicPr>
+          <p:cNvPr id="14" name="Picture 13">
+            <a:extLst>
+              <a:ext uri="{FF2B5EF4-FFF2-40B4-BE49-F238E27FC236}">
+                <a16:creationId xmlns:a16="http://schemas.microsoft.com/office/drawing/2014/main" id="{2E34B0D6-8877-B408-5E8A-A26D9BD3BCDE}"/>
+              </a:ext>
+            </a:extLst>
+          </p:cNvPr>
+          <p:cNvPicPr>
+            <a:picLocks noChangeAspect="1"/>
+          </p:cNvPicPr>
+          <p:nvPr/>
+        </p:nvPicPr>
+        <p:blipFill>
+          <a:blip r:embed="rId5"/>
+          <a:srcRect l="1840" t="17143" r="75267" b="73175"/>
+          <a:stretch>
+            <a:fillRect/>
+          </a:stretch>
+        </p:blipFill>
+        <p:spPr>
+          <a:xfrm>
+            <a:off x="7970761" y="1926339"/>
+            <a:ext cx="4071113" cy="968573"/>
+          </a:xfrm>
+          <a:prstGeom prst="rect">
+            <a:avLst/>
+          </a:prstGeom>
+        </p:spPr>
+      </p:pic>
+      <p:pic>
+        <p:nvPicPr>
+          <p:cNvPr id="1038" name="Picture 14" descr="aivd_nl">
+            <a:extLst>
+              <a:ext uri="{FF2B5EF4-FFF2-40B4-BE49-F238E27FC236}">
+                <a16:creationId xmlns:a16="http://schemas.microsoft.com/office/drawing/2014/main" id="{2838B81E-7193-7651-E69A-11326F6CDF43}"/>
+              </a:ext>
+            </a:extLst>
+          </p:cNvPr>
+          <p:cNvPicPr>
+            <a:picLocks noChangeAspect="1" noChangeArrowheads="1"/>
+          </p:cNvPicPr>
+          <p:nvPr/>
+        </p:nvPicPr>
+        <p:blipFill>
+          <a:blip r:embed="rId6">
+            <a:extLst>
+              <a:ext uri="{28A0092B-C50C-407E-A947-70E740481C1C}">
+                <a14:useLocalDpi xmlns:a14="http://schemas.microsoft.com/office/drawing/2010/main" val="0"/>
+              </a:ext>
+            </a:extLst>
+          </a:blip>
+          <a:srcRect/>
+          <a:stretch>
+            <a:fillRect/>
+          </a:stretch>
+        </p:blipFill>
+        <p:spPr bwMode="auto">
+          <a:xfrm>
+            <a:off x="10631606" y="5297606"/>
+            <a:ext cx="1560394" cy="1560394"/>
+          </a:xfrm>
+          <a:prstGeom prst="rect">
+            <a:avLst/>
+          </a:prstGeom>
+          <a:noFill/>
+          <a:extLst>
+            <a:ext uri="{909E8E84-426E-40DD-AFC4-6F175D3DCCD1}">
+              <a14:hiddenFill xmlns:a14="http://schemas.microsoft.com/office/drawing/2010/main">
+                <a:solidFill>
+                  <a:srgbClr val="FFFFFF"/>
+                </a:solidFill>
+              </a14:hiddenFill>
+            </a:ext>
+          </a:extLst>
+        </p:spPr>
+      </p:pic>
+      <p:sp>
+        <p:nvSpPr>
+          <p:cNvPr id="3" name="TextBox 2">
+            <a:extLst>
+              <a:ext uri="{FF2B5EF4-FFF2-40B4-BE49-F238E27FC236}">
+                <a16:creationId xmlns:a16="http://schemas.microsoft.com/office/drawing/2014/main" id="{2012E5C2-2847-5AAE-C234-F89179B91853}"/>
+              </a:ext>
+            </a:extLst>
+          </p:cNvPr>
+          <p:cNvSpPr txBox="1"/>
+          <p:nvPr/>
+        </p:nvSpPr>
+        <p:spPr>
+          <a:xfrm>
+            <a:off x="218357" y="3603009"/>
+            <a:ext cx="2770503" cy="2308324"/>
+          </a:xfrm>
+          <a:prstGeom prst="rect">
+            <a:avLst/>
+          </a:prstGeom>
+          <a:noFill/>
+        </p:spPr>
+        <p:txBody>
+          <a:bodyPr wrap="square" rtlCol="0">
+            <a:spAutoFit/>
+          </a:bodyPr>
           <a:lstStyle/>
           <a:p>
-            <a:r>
-              <a:rPr lang="en-US" dirty="0"/>
-              <a:t>LIMITATIONS</a:t>
-            </a:r>
+            <a:pPr marL="285750" indent="-285750">
+              <a:buFontTx/>
+              <a:buChar char="-"/>
+            </a:pPr>
             <a:r>
               <a:rPr lang="en-GB" dirty="0"/>
-              <a:t>:</a:t>
+              <a:t>Wave 18 (2025)</a:t>
+            </a:r>
+          </a:p>
+          <a:p>
+            <a:pPr marL="285750" indent="-285750">
+              <a:buFontTx/>
+              <a:buChar char="-"/>
+            </a:pPr>
+            <a:r>
+              <a:rPr lang="en-GB" dirty="0"/>
+              <a:t>Core studies:</a:t>
             </a:r>
             <a:br>
               <a:rPr lang="en-GB" dirty="0"/>
             </a:br>
             <a:r>
               <a:rPr lang="en-GB" dirty="0"/>
-              <a:t>- limitations of using secondary data, and admin data in particular – having only variables that are available</a:t>
-            </a:r>
-            <a:br>
+              <a:t>Social Integration &amp; Leisure</a:t>
+            </a:r>
+          </a:p>
+          <a:p>
+            <a:pPr marL="285750" indent="-285750">
+              <a:buFontTx/>
+              <a:buChar char="-"/>
+            </a:pPr>
+            <a:r>
               <a:rPr lang="en-GB" dirty="0"/>
-            </a:br>
+              <a:t>Work &amp; School</a:t>
+            </a:r>
+          </a:p>
+          <a:p>
+            <a:pPr marL="285750" indent="-285750">
+              <a:buFontTx/>
+              <a:buChar char="-"/>
+            </a:pPr>
             <a:r>
               <a:rPr lang="en-GB" dirty="0"/>
-              <a:t>- representativeness of LISS – often less than 10 people per neighbourhood</a:t>
-            </a:r>
-            <a:br>
+              <a:t>Health</a:t>
+            </a:r>
+          </a:p>
+          <a:p>
+            <a:pPr marL="285750" indent="-285750">
+              <a:buFontTx/>
+              <a:buChar char="-"/>
+            </a:pPr>
+            <a:r>
               <a:rPr lang="en-GB" dirty="0"/>
-            </a:br>
-            <a:r>
-              <a:rPr lang="en-GB" dirty="0"/>
-              <a:t>- approximating measures for </a:t>
-            </a:r>
-            <a:r>
-              <a:rPr lang="en-GB" dirty="0" err="1"/>
-              <a:t>livability</a:t>
-            </a:r>
-            <a:r>
-              <a:rPr lang="en-GB" dirty="0"/>
-              <a:t> dimensions based on our own interpretation due to lack of metadata documentation for </a:t>
-            </a:r>
-            <a:r>
-              <a:rPr lang="en-GB" dirty="0" err="1"/>
-              <a:t>livability</a:t>
-            </a:r>
-            <a:r>
-              <a:rPr lang="en-GB" dirty="0"/>
-              <a:t> score</a:t>
-            </a:r>
+              <a:t>Housing</a:t>
+            </a:r>
+          </a:p>
+          <a:p>
+            <a:pPr marL="285750" indent="-285750">
+              <a:buFontTx/>
+              <a:buChar char="-"/>
+            </a:pPr>
             <a:endParaRPr lang="en-US" dirty="0"/>
           </a:p>
+        </p:txBody>
+      </p:sp>
+      <p:sp>
+        <p:nvSpPr>
+          <p:cNvPr id="4" name="TextBox 3">
+            <a:extLst>
+              <a:ext uri="{FF2B5EF4-FFF2-40B4-BE49-F238E27FC236}">
+                <a16:creationId xmlns:a16="http://schemas.microsoft.com/office/drawing/2014/main" id="{6111C955-0398-A29D-1574-D126904912CB}"/>
+              </a:ext>
+            </a:extLst>
+          </p:cNvPr>
+          <p:cNvSpPr txBox="1"/>
+          <p:nvPr/>
+        </p:nvSpPr>
+        <p:spPr>
+          <a:xfrm>
+            <a:off x="3903260" y="3603009"/>
+            <a:ext cx="3234519" cy="369332"/>
+          </a:xfrm>
+          <a:prstGeom prst="rect">
+            <a:avLst/>
+          </a:prstGeom>
+          <a:noFill/>
+        </p:spPr>
+        <p:txBody>
+          <a:bodyPr wrap="square" rtlCol="0">
+            <a:spAutoFit/>
+          </a:bodyPr>
+          <a:lstStyle/>
           <a:p>
             <a:r>
               <a:rPr lang="en-US" dirty="0"/>
-              <a:t>POSSIBLE FURTHER DIRECTIONS</a:t>
-            </a:r>
-            <a:r>
-              <a:rPr lang="en-US" dirty="0">
-                <a:sym typeface="Wingdings" pitchFamily="2" charset="2"/>
-              </a:rPr>
-              <a:t>:</a:t>
-            </a:r>
-            <a:br>
-              <a:rPr lang="en-US" dirty="0">
-                <a:sym typeface="Wingdings" pitchFamily="2" charset="2"/>
-              </a:rPr>
-            </a:br>
-            <a:r>
-              <a:rPr lang="en-US" dirty="0">
-                <a:sym typeface="Wingdings" pitchFamily="2" charset="2"/>
-              </a:rPr>
-              <a:t>- </a:t>
+              <a:t>Text</a:t>
+            </a:r>
+          </a:p>
+        </p:txBody>
+      </p:sp>
+      <p:sp>
+        <p:nvSpPr>
+          <p:cNvPr id="5" name="TextBox 4">
+            <a:extLst>
+              <a:ext uri="{FF2B5EF4-FFF2-40B4-BE49-F238E27FC236}">
+                <a16:creationId xmlns:a16="http://schemas.microsoft.com/office/drawing/2014/main" id="{9C016400-E22F-33A2-C7CE-BE99CD85344B}"/>
+              </a:ext>
+            </a:extLst>
+          </p:cNvPr>
+          <p:cNvSpPr txBox="1"/>
+          <p:nvPr/>
+        </p:nvSpPr>
+        <p:spPr>
+          <a:xfrm>
+            <a:off x="7970761" y="3603009"/>
+            <a:ext cx="2770027" cy="369332"/>
+          </a:xfrm>
+          <a:prstGeom prst="rect">
+            <a:avLst/>
+          </a:prstGeom>
+          <a:noFill/>
+        </p:spPr>
+        <p:txBody>
+          <a:bodyPr wrap="square" rtlCol="0">
+            <a:spAutoFit/>
+          </a:bodyPr>
+          <a:lstStyle/>
+          <a:p>
+            <a:r>
+              <a:rPr lang="en-US" dirty="0" err="1"/>
+              <a:t>Firmbackbone</a:t>
             </a:r>
             <a:endParaRPr lang="en-US" dirty="0"/>
-          </a:p>
-          <a:p>
-            <a:endParaRPr lang="en-NL" dirty="0"/>
           </a:p>
         </p:txBody>
       </p:sp>
     </p:spTree>
     <p:extLst>
       <p:ext uri="{BB962C8B-B14F-4D97-AF65-F5344CB8AC3E}">
-        <p14:creationId xmlns:p14="http://schemas.microsoft.com/office/powerpoint/2010/main" val="2640838743"/>
+        <p14:creationId xmlns:p14="http://schemas.microsoft.com/office/powerpoint/2010/main" val="3028968231"/>
       </p:ext>
     </p:extLst>
   </p:cSld>

--- a/LIVING-SICCS.pptx
+++ b/LIVING-SICCS.pptx
@@ -5,7 +5,7 @@
     <p:sldMasterId id="2147483739" r:id="rId1"/>
   </p:sldMasterIdLst>
   <p:notesMasterIdLst>
-    <p:notesMasterId r:id="rId18"/>
+    <p:notesMasterId r:id="rId20"/>
   </p:notesMasterIdLst>
   <p:sldIdLst>
     <p:sldId id="256" r:id="rId2"/>
@@ -23,7 +23,9 @@
     <p:sldId id="273" r:id="rId14"/>
     <p:sldId id="272" r:id="rId15"/>
     <p:sldId id="274" r:id="rId16"/>
-    <p:sldId id="268" r:id="rId17"/>
+    <p:sldId id="275" r:id="rId17"/>
+    <p:sldId id="276" r:id="rId18"/>
+    <p:sldId id="268" r:id="rId19"/>
   </p:sldIdLst>
   <p:sldSz cx="12192000" cy="6858000"/>
   <p:notesSz cx="6858000" cy="9144000"/>
@@ -8247,6 +8249,59 @@
           </a:p>
         </p:txBody>
       </p:sp>
+      <p:sp>
+        <p:nvSpPr>
+          <p:cNvPr id="4" name="TextBox 3">
+            <a:extLst>
+              <a:ext uri="{FF2B5EF4-FFF2-40B4-BE49-F238E27FC236}">
+                <a16:creationId xmlns:a16="http://schemas.microsoft.com/office/drawing/2014/main" id="{767C297B-838B-CB80-2B03-A226C293C573}"/>
+              </a:ext>
+            </a:extLst>
+          </p:cNvPr>
+          <p:cNvSpPr txBox="1"/>
+          <p:nvPr/>
+        </p:nvSpPr>
+        <p:spPr>
+          <a:xfrm>
+            <a:off x="838200" y="1825625"/>
+            <a:ext cx="10089995" cy="1477328"/>
+          </a:xfrm>
+          <a:prstGeom prst="rect">
+            <a:avLst/>
+          </a:prstGeom>
+          <a:noFill/>
+        </p:spPr>
+        <p:txBody>
+          <a:bodyPr wrap="square" rtlCol="0">
+            <a:spAutoFit/>
+          </a:bodyPr>
+          <a:lstStyle/>
+          <a:p>
+            <a:r>
+              <a:rPr lang="en-US" dirty="0"/>
+              <a:t>Both objective and subjective measures predict similar livability scores</a:t>
+            </a:r>
+          </a:p>
+          <a:p>
+            <a:endParaRPr lang="en-US" dirty="0"/>
+          </a:p>
+          <a:p>
+            <a:r>
+              <a:rPr lang="en-US" dirty="0"/>
+              <a:t>Good design of the government model</a:t>
+            </a:r>
+          </a:p>
+          <a:p>
+            <a:endParaRPr lang="en-US" dirty="0"/>
+          </a:p>
+          <a:p>
+            <a:r>
+              <a:rPr lang="en-US" dirty="0"/>
+              <a:t>Replicable</a:t>
+            </a:r>
+          </a:p>
+        </p:txBody>
+      </p:sp>
     </p:spTree>
     <p:extLst>
       <p:ext uri="{BB962C8B-B14F-4D97-AF65-F5344CB8AC3E}">
@@ -8343,7 +8398,7 @@
           <a:p>
             <a:r>
               <a:rPr lang="en-GB" dirty="0"/>
-              <a:t>Limited to available variables in admin data</a:t>
+              <a:t>Limited to available variables and years in admin data (LISS, Exposome)</a:t>
             </a:r>
           </a:p>
           <a:p>
@@ -8357,6 +8412,8 @@
               <a:rPr lang="en-GB" dirty="0"/>
               <a:t>Approximating measures for livability dimensions based on our own interpretation due to lack of metadata documentation for livability score</a:t>
             </a:r>
+          </a:p>
+          <a:p>
             <a:endParaRPr lang="en-US" dirty="0"/>
           </a:p>
           <a:p>
@@ -8489,6 +8546,269 @@
 </file>
 
 <file path=ppt/slides/slide16.xml><?xml version="1.0" encoding="utf-8"?>
+<p:sld xmlns:a="http://schemas.openxmlformats.org/drawingml/2006/main" xmlns:r="http://schemas.openxmlformats.org/officeDocument/2006/relationships" xmlns:p="http://schemas.openxmlformats.org/presentationml/2006/main">
+  <p:cSld>
+    <p:spTree>
+      <p:nvGrpSpPr>
+        <p:cNvPr id="1" name="">
+          <a:extLst>
+            <a:ext uri="{FF2B5EF4-FFF2-40B4-BE49-F238E27FC236}">
+              <a16:creationId xmlns:a16="http://schemas.microsoft.com/office/drawing/2014/main" id="{6E12979D-1B86-872C-B3B6-2B0DE0828E42}"/>
+            </a:ext>
+          </a:extLst>
+        </p:cNvPr>
+        <p:cNvGrpSpPr/>
+        <p:nvPr/>
+      </p:nvGrpSpPr>
+      <p:grpSpPr>
+        <a:xfrm>
+          <a:off x="0" y="0"/>
+          <a:ext cx="0" cy="0"/>
+          <a:chOff x="0" y="0"/>
+          <a:chExt cx="0" cy="0"/>
+        </a:xfrm>
+      </p:grpSpPr>
+      <p:sp>
+        <p:nvSpPr>
+          <p:cNvPr id="2" name="Title 1">
+            <a:extLst>
+              <a:ext uri="{FF2B5EF4-FFF2-40B4-BE49-F238E27FC236}">
+                <a16:creationId xmlns:a16="http://schemas.microsoft.com/office/drawing/2014/main" id="{FDD49B8E-B669-C240-9DF4-C120563F1C95}"/>
+              </a:ext>
+            </a:extLst>
+          </p:cNvPr>
+          <p:cNvSpPr>
+            <a:spLocks noGrp="1"/>
+          </p:cNvSpPr>
+          <p:nvPr>
+            <p:ph type="title"/>
+          </p:nvPr>
+        </p:nvSpPr>
+        <p:spPr/>
+        <p:txBody>
+          <a:bodyPr>
+            <a:normAutofit/>
+          </a:bodyPr>
+          <a:lstStyle/>
+          <a:p>
+            <a:r>
+              <a:rPr lang="en-US" sz="4000" b="1" dirty="0">
+                <a:latin typeface="Aptos" panose="020B0004020202020204" pitchFamily="34" charset="0"/>
+              </a:rPr>
+              <a:t>Reproducibility</a:t>
+            </a:r>
+            <a:endParaRPr lang="en-NL" sz="4000" b="1" dirty="0">
+              <a:latin typeface="Aptos" panose="020B0004020202020204" pitchFamily="34" charset="0"/>
+            </a:endParaRPr>
+          </a:p>
+        </p:txBody>
+      </p:sp>
+      <p:sp>
+        <p:nvSpPr>
+          <p:cNvPr id="3" name="Content Placeholder 2">
+            <a:extLst>
+              <a:ext uri="{FF2B5EF4-FFF2-40B4-BE49-F238E27FC236}">
+                <a16:creationId xmlns:a16="http://schemas.microsoft.com/office/drawing/2014/main" id="{E97BF907-139D-7639-878B-25C477E821A0}"/>
+              </a:ext>
+            </a:extLst>
+          </p:cNvPr>
+          <p:cNvSpPr>
+            <a:spLocks noGrp="1"/>
+          </p:cNvSpPr>
+          <p:nvPr>
+            <p:ph idx="1"/>
+          </p:nvPr>
+        </p:nvSpPr>
+        <p:spPr/>
+        <p:txBody>
+          <a:bodyPr/>
+          <a:lstStyle/>
+          <a:p>
+            <a:pPr marL="0" indent="0">
+              <a:buNone/>
+            </a:pPr>
+            <a:r>
+              <a:rPr lang="en-US" dirty="0"/>
+              <a:t>Measures taken for reproducibility: </a:t>
+            </a:r>
+          </a:p>
+          <a:p>
+            <a:pPr>
+              <a:buFontTx/>
+              <a:buChar char="-"/>
+            </a:pPr>
+            <a:r>
+              <a:rPr lang="en-US" dirty="0"/>
+              <a:t>Detailed comments in the scripts;</a:t>
+            </a:r>
+          </a:p>
+          <a:p>
+            <a:pPr>
+              <a:buFontTx/>
+              <a:buChar char="-"/>
+            </a:pPr>
+            <a:r>
+              <a:rPr lang="en-US" dirty="0"/>
+              <a:t>Readme file with detailed steps and required software and packages including their versions;</a:t>
+            </a:r>
+          </a:p>
+          <a:p>
+            <a:pPr>
+              <a:buFontTx/>
+              <a:buChar char="-"/>
+            </a:pPr>
+            <a:r>
+              <a:rPr lang="en-US" dirty="0"/>
+              <a:t>Uploaded to </a:t>
+            </a:r>
+            <a:r>
+              <a:rPr lang="en-US" dirty="0" err="1"/>
+              <a:t>Zenodo</a:t>
+            </a:r>
+            <a:r>
+              <a:rPr lang="en-US" dirty="0"/>
+              <a:t>;</a:t>
+            </a:r>
+          </a:p>
+          <a:p>
+            <a:pPr>
+              <a:buFontTx/>
+              <a:buChar char="-"/>
+            </a:pPr>
+            <a:r>
+              <a:rPr lang="en-US" dirty="0"/>
+              <a:t>Apache 2.0 </a:t>
+            </a:r>
+            <a:r>
+              <a:rPr lang="en-US" dirty="0" err="1"/>
+              <a:t>licence</a:t>
+            </a:r>
+            <a:r>
+              <a:rPr lang="en-US" dirty="0"/>
+              <a:t>. </a:t>
+            </a:r>
+          </a:p>
+        </p:txBody>
+      </p:sp>
+    </p:spTree>
+    <p:extLst>
+      <p:ext uri="{BB962C8B-B14F-4D97-AF65-F5344CB8AC3E}">
+        <p14:creationId xmlns:p14="http://schemas.microsoft.com/office/powerpoint/2010/main" val="2637066390"/>
+      </p:ext>
+    </p:extLst>
+  </p:cSld>
+  <p:clrMapOvr>
+    <a:masterClrMapping/>
+  </p:clrMapOvr>
+</p:sld>
+</file>
+
+<file path=ppt/slides/slide17.xml><?xml version="1.0" encoding="utf-8"?>
+<p:sld xmlns:a="http://schemas.openxmlformats.org/drawingml/2006/main" xmlns:r="http://schemas.openxmlformats.org/officeDocument/2006/relationships" xmlns:p="http://schemas.openxmlformats.org/presentationml/2006/main">
+  <p:cSld>
+    <p:spTree>
+      <p:nvGrpSpPr>
+        <p:cNvPr id="1" name="">
+          <a:extLst>
+            <a:ext uri="{FF2B5EF4-FFF2-40B4-BE49-F238E27FC236}">
+              <a16:creationId xmlns:a16="http://schemas.microsoft.com/office/drawing/2014/main" id="{AE5A68A3-2E86-2832-2D2A-ACA117FEF463}"/>
+            </a:ext>
+          </a:extLst>
+        </p:cNvPr>
+        <p:cNvGrpSpPr/>
+        <p:nvPr/>
+      </p:nvGrpSpPr>
+      <p:grpSpPr>
+        <a:xfrm>
+          <a:off x="0" y="0"/>
+          <a:ext cx="0" cy="0"/>
+          <a:chOff x="0" y="0"/>
+          <a:chExt cx="0" cy="0"/>
+        </a:xfrm>
+      </p:grpSpPr>
+      <p:sp>
+        <p:nvSpPr>
+          <p:cNvPr id="2" name="Title 1">
+            <a:extLst>
+              <a:ext uri="{FF2B5EF4-FFF2-40B4-BE49-F238E27FC236}">
+                <a16:creationId xmlns:a16="http://schemas.microsoft.com/office/drawing/2014/main" id="{FC549F4E-467E-6BCD-FF35-D6A0559DE4A8}"/>
+              </a:ext>
+            </a:extLst>
+          </p:cNvPr>
+          <p:cNvSpPr>
+            <a:spLocks noGrp="1"/>
+          </p:cNvSpPr>
+          <p:nvPr>
+            <p:ph type="title"/>
+          </p:nvPr>
+        </p:nvSpPr>
+        <p:spPr/>
+        <p:txBody>
+          <a:bodyPr>
+            <a:normAutofit/>
+          </a:bodyPr>
+          <a:lstStyle/>
+          <a:p>
+            <a:r>
+              <a:rPr lang="en-US" sz="4000" b="1" dirty="0">
+                <a:latin typeface="Aptos" panose="020B0004020202020204" pitchFamily="34" charset="0"/>
+              </a:rPr>
+              <a:t>Ethical considerations</a:t>
+            </a:r>
+            <a:endParaRPr lang="en-NL" sz="4000" b="1" dirty="0">
+              <a:latin typeface="Aptos" panose="020B0004020202020204" pitchFamily="34" charset="0"/>
+            </a:endParaRPr>
+          </a:p>
+        </p:txBody>
+      </p:sp>
+      <p:sp>
+        <p:nvSpPr>
+          <p:cNvPr id="3" name="Content Placeholder 2">
+            <a:extLst>
+              <a:ext uri="{FF2B5EF4-FFF2-40B4-BE49-F238E27FC236}">
+                <a16:creationId xmlns:a16="http://schemas.microsoft.com/office/drawing/2014/main" id="{08387C2D-CB01-9659-8330-1DF9F0819DC9}"/>
+              </a:ext>
+            </a:extLst>
+          </p:cNvPr>
+          <p:cNvSpPr>
+            <a:spLocks noGrp="1"/>
+          </p:cNvSpPr>
+          <p:nvPr>
+            <p:ph idx="1"/>
+          </p:nvPr>
+        </p:nvSpPr>
+        <p:spPr/>
+        <p:txBody>
+          <a:bodyPr/>
+          <a:lstStyle/>
+          <a:p>
+            <a:r>
+              <a:rPr lang="en-US" dirty="0"/>
+              <a:t>Carefulness in interpreting data, especially when referring to areas with low livability scores;</a:t>
+            </a:r>
+          </a:p>
+          <a:p>
+            <a:r>
+              <a:rPr lang="en-US" dirty="0"/>
+              <a:t>Statistical disclosure control – not outputting any individual-level or sensitive data</a:t>
+            </a:r>
+          </a:p>
+        </p:txBody>
+      </p:sp>
+    </p:spTree>
+    <p:extLst>
+      <p:ext uri="{BB962C8B-B14F-4D97-AF65-F5344CB8AC3E}">
+        <p14:creationId xmlns:p14="http://schemas.microsoft.com/office/powerpoint/2010/main" val="2619579965"/>
+      </p:ext>
+    </p:extLst>
+  </p:cSld>
+  <p:clrMapOvr>
+    <a:masterClrMapping/>
+  </p:clrMapOvr>
+</p:sld>
+</file>
+
+<file path=ppt/slides/slide18.xml><?xml version="1.0" encoding="utf-8"?>
 <p:sld xmlns:a="http://schemas.openxmlformats.org/drawingml/2006/main" xmlns:r="http://schemas.openxmlformats.org/officeDocument/2006/relationships" xmlns:p="http://schemas.openxmlformats.org/presentationml/2006/main">
   <p:cSld>
     <p:spTree>
@@ -12785,7 +13105,7 @@
         <p:spPr>
           <a:xfrm>
             <a:off x="3903260" y="3603009"/>
-            <a:ext cx="3234519" cy="369332"/>
+            <a:ext cx="3234519" cy="1477328"/>
           </a:xfrm>
           <a:prstGeom prst="rect">
             <a:avLst/>
@@ -12798,9 +13118,43 @@
           </a:bodyPr>
           <a:lstStyle/>
           <a:p>
+            <a:pPr marL="285750" indent="-285750">
+              <a:buFontTx/>
+              <a:buChar char="-"/>
+            </a:pPr>
             <a:r>
               <a:rPr lang="en-US" dirty="0"/>
-              <a:t>Text</a:t>
+              <a:t>Air pollution 2023</a:t>
+            </a:r>
+          </a:p>
+          <a:p>
+            <a:pPr marL="285750" indent="-285750">
+              <a:buFontTx/>
+              <a:buChar char="-"/>
+            </a:pPr>
+            <a:r>
+              <a:rPr lang="en-US" dirty="0"/>
+              <a:t>Light exposure and walkability from 2020</a:t>
+            </a:r>
+          </a:p>
+          <a:p>
+            <a:pPr marL="285750" indent="-285750">
+              <a:buFontTx/>
+              <a:buChar char="-"/>
+            </a:pPr>
+            <a:r>
+              <a:rPr lang="en-US" dirty="0"/>
+              <a:t>Food environment</a:t>
+            </a:r>
+          </a:p>
+          <a:p>
+            <a:pPr marL="285750" indent="-285750">
+              <a:buFontTx/>
+              <a:buChar char="-"/>
+            </a:pPr>
+            <a:r>
+              <a:rPr lang="en-US" dirty="0"/>
+              <a:t>Urbanist city 2015</a:t>
             </a:r>
           </a:p>
         </p:txBody>

--- a/LIVING-SICCS.pptx
+++ b/LIVING-SICCS.pptx
@@ -5,7 +5,7 @@
     <p:sldMasterId id="2147483739" r:id="rId1"/>
   </p:sldMasterIdLst>
   <p:notesMasterIdLst>
-    <p:notesMasterId r:id="rId20"/>
+    <p:notesMasterId r:id="rId21"/>
   </p:notesMasterIdLst>
   <p:sldIdLst>
     <p:sldId id="256" r:id="rId2"/>
@@ -20,12 +20,13 @@
     <p:sldId id="260" r:id="rId11"/>
     <p:sldId id="270" r:id="rId12"/>
     <p:sldId id="261" r:id="rId13"/>
-    <p:sldId id="273" r:id="rId14"/>
-    <p:sldId id="272" r:id="rId15"/>
-    <p:sldId id="274" r:id="rId16"/>
-    <p:sldId id="275" r:id="rId17"/>
-    <p:sldId id="276" r:id="rId18"/>
-    <p:sldId id="268" r:id="rId19"/>
+    <p:sldId id="277" r:id="rId14"/>
+    <p:sldId id="273" r:id="rId15"/>
+    <p:sldId id="272" r:id="rId16"/>
+    <p:sldId id="274" r:id="rId17"/>
+    <p:sldId id="275" r:id="rId18"/>
+    <p:sldId id="276" r:id="rId19"/>
+    <p:sldId id="268" r:id="rId20"/>
   </p:sldIdLst>
   <p:sldSz cx="12192000" cy="6858000"/>
   <p:notesSz cx="6858000" cy="9144000"/>
@@ -132,6 +133,172 @@
 </p:presentation>
 </file>
 
+<file path=ppt/revisionInfo.xml><?xml version="1.0" encoding="utf-8"?>
+<p1510:revInfo xmlns:a="http://schemas.openxmlformats.org/drawingml/2006/main" xmlns:r="http://schemas.openxmlformats.org/officeDocument/2006/relationships" xmlns:p1510="http://schemas.microsoft.com/office/powerpoint/2015/10/main">
+  <p1510:revLst>
+    <p1510:client id="{3206DDEF-91A6-4F32-B0EB-1FEFA2C511FD}" v="1" dt="2026-06-18T22:10:45.817"/>
+  </p1510:revLst>
+</p1510:revInfo>
+</file>
+
+<file path=ppt/changesInfos/changesInfo1.xml><?xml version="1.0" encoding="utf-8"?>
+<pc:chgInfo xmlns:a="http://schemas.openxmlformats.org/drawingml/2006/main" xmlns:r="http://schemas.openxmlformats.org/officeDocument/2006/relationships" xmlns:ac="http://schemas.microsoft.com/office/drawing/2013/main/command" xmlns:pc="http://schemas.microsoft.com/office/powerpoint/2013/main/command">
+  <pc:docChgLst>
+    <pc:chgData name="Leitritz, D.M. (David)" userId="60b9eceb-a469-4de4-87a6-6cc3586f531e" providerId="ADAL" clId="{F802D518-D6D8-44E1-B28A-1D8EC97FA3CE}"/>
+    <pc:docChg chg="custSel addSld modSld">
+      <pc:chgData name="Leitritz, D.M. (David)" userId="60b9eceb-a469-4de4-87a6-6cc3586f531e" providerId="ADAL" clId="{F802D518-D6D8-44E1-B28A-1D8EC97FA3CE}" dt="2026-06-18T22:20:22.726" v="1664" actId="20577"/>
+      <pc:docMkLst>
+        <pc:docMk/>
+      </pc:docMkLst>
+      <pc:sldChg chg="modSp mod">
+        <pc:chgData name="Leitritz, D.M. (David)" userId="60b9eceb-a469-4de4-87a6-6cc3586f531e" providerId="ADAL" clId="{F802D518-D6D8-44E1-B28A-1D8EC97FA3CE}" dt="2026-06-18T22:07:50.003" v="156" actId="20577"/>
+        <pc:sldMkLst>
+          <pc:docMk/>
+          <pc:sldMk cId="3028968231" sldId="258"/>
+        </pc:sldMkLst>
+        <pc:spChg chg="mod">
+          <ac:chgData name="Leitritz, D.M. (David)" userId="60b9eceb-a469-4de4-87a6-6cc3586f531e" providerId="ADAL" clId="{F802D518-D6D8-44E1-B28A-1D8EC97FA3CE}" dt="2026-06-18T22:07:17.655" v="54" actId="20577"/>
+          <ac:spMkLst>
+            <pc:docMk/>
+            <pc:sldMk cId="3028968231" sldId="258"/>
+            <ac:spMk id="4" creationId="{6111C955-0398-A29D-1574-D126904912CB}"/>
+          </ac:spMkLst>
+        </pc:spChg>
+        <pc:spChg chg="mod">
+          <ac:chgData name="Leitritz, D.M. (David)" userId="60b9eceb-a469-4de4-87a6-6cc3586f531e" providerId="ADAL" clId="{F802D518-D6D8-44E1-B28A-1D8EC97FA3CE}" dt="2026-06-18T22:07:50.003" v="156" actId="20577"/>
+          <ac:spMkLst>
+            <pc:docMk/>
+            <pc:sldMk cId="3028968231" sldId="258"/>
+            <ac:spMk id="5" creationId="{9C016400-E22F-33A2-C7CE-BE99CD85344B}"/>
+          </ac:spMkLst>
+        </pc:spChg>
+      </pc:sldChg>
+      <pc:sldChg chg="modSp mod">
+        <pc:chgData name="Leitritz, D.M. (David)" userId="60b9eceb-a469-4de4-87a6-6cc3586f531e" providerId="ADAL" clId="{F802D518-D6D8-44E1-B28A-1D8EC97FA3CE}" dt="2026-06-18T22:11:28.227" v="560" actId="20577"/>
+        <pc:sldMkLst>
+          <pc:docMk/>
+          <pc:sldMk cId="1200445968" sldId="260"/>
+        </pc:sldMkLst>
+        <pc:spChg chg="mod">
+          <ac:chgData name="Leitritz, D.M. (David)" userId="60b9eceb-a469-4de4-87a6-6cc3586f531e" providerId="ADAL" clId="{F802D518-D6D8-44E1-B28A-1D8EC97FA3CE}" dt="2026-06-18T22:11:28.227" v="560" actId="20577"/>
+          <ac:spMkLst>
+            <pc:docMk/>
+            <pc:sldMk cId="1200445968" sldId="260"/>
+            <ac:spMk id="3" creationId="{EE745100-CE06-4549-0F6E-0CC8267F6DBC}"/>
+          </ac:spMkLst>
+        </pc:spChg>
+      </pc:sldChg>
+      <pc:sldChg chg="modSp mod">
+        <pc:chgData name="Leitritz, D.M. (David)" userId="60b9eceb-a469-4de4-87a6-6cc3586f531e" providerId="ADAL" clId="{F802D518-D6D8-44E1-B28A-1D8EC97FA3CE}" dt="2026-06-18T22:14:47.435" v="989" actId="20577"/>
+        <pc:sldMkLst>
+          <pc:docMk/>
+          <pc:sldMk cId="2823057263" sldId="261"/>
+        </pc:sldMkLst>
+        <pc:spChg chg="mod">
+          <ac:chgData name="Leitritz, D.M. (David)" userId="60b9eceb-a469-4de4-87a6-6cc3586f531e" providerId="ADAL" clId="{F802D518-D6D8-44E1-B28A-1D8EC97FA3CE}" dt="2026-06-18T22:14:47.435" v="989" actId="20577"/>
+          <ac:spMkLst>
+            <pc:docMk/>
+            <pc:sldMk cId="2823057263" sldId="261"/>
+            <ac:spMk id="3" creationId="{B7AC6F1B-C3BD-3A07-79D7-89F1A5E47B98}"/>
+          </ac:spMkLst>
+        </pc:spChg>
+      </pc:sldChg>
+      <pc:sldChg chg="modSp mod">
+        <pc:chgData name="Leitritz, D.M. (David)" userId="60b9eceb-a469-4de4-87a6-6cc3586f531e" providerId="ADAL" clId="{F802D518-D6D8-44E1-B28A-1D8EC97FA3CE}" dt="2026-06-18T22:12:23.626" v="684" actId="20577"/>
+        <pc:sldMkLst>
+          <pc:docMk/>
+          <pc:sldMk cId="3778131531" sldId="270"/>
+        </pc:sldMkLst>
+        <pc:spChg chg="mod">
+          <ac:chgData name="Leitritz, D.M. (David)" userId="60b9eceb-a469-4de4-87a6-6cc3586f531e" providerId="ADAL" clId="{F802D518-D6D8-44E1-B28A-1D8EC97FA3CE}" dt="2026-06-18T22:12:23.626" v="684" actId="20577"/>
+          <ac:spMkLst>
+            <pc:docMk/>
+            <pc:sldMk cId="3778131531" sldId="270"/>
+            <ac:spMk id="3" creationId="{B9B86305-CFE3-D282-69B1-87E1AFA6AE0D}"/>
+          </ac:spMkLst>
+        </pc:spChg>
+      </pc:sldChg>
+      <pc:sldChg chg="modSp mod">
+        <pc:chgData name="Leitritz, D.M. (David)" userId="60b9eceb-a469-4de4-87a6-6cc3586f531e" providerId="ADAL" clId="{F802D518-D6D8-44E1-B28A-1D8EC97FA3CE}" dt="2026-06-18T22:18:37.323" v="1341" actId="20577"/>
+        <pc:sldMkLst>
+          <pc:docMk/>
+          <pc:sldMk cId="2305266645" sldId="272"/>
+        </pc:sldMkLst>
+        <pc:spChg chg="mod">
+          <ac:chgData name="Leitritz, D.M. (David)" userId="60b9eceb-a469-4de4-87a6-6cc3586f531e" providerId="ADAL" clId="{F802D518-D6D8-44E1-B28A-1D8EC97FA3CE}" dt="2026-06-18T22:18:37.323" v="1341" actId="20577"/>
+          <ac:spMkLst>
+            <pc:docMk/>
+            <pc:sldMk cId="2305266645" sldId="272"/>
+            <ac:spMk id="3" creationId="{21490BC7-1771-452A-8BD5-AFEAB98D7F87}"/>
+          </ac:spMkLst>
+        </pc:spChg>
+      </pc:sldChg>
+      <pc:sldChg chg="modSp mod">
+        <pc:chgData name="Leitritz, D.M. (David)" userId="60b9eceb-a469-4de4-87a6-6cc3586f531e" providerId="ADAL" clId="{F802D518-D6D8-44E1-B28A-1D8EC97FA3CE}" dt="2026-06-18T22:17:37.677" v="1211" actId="20577"/>
+        <pc:sldMkLst>
+          <pc:docMk/>
+          <pc:sldMk cId="2101214258" sldId="273"/>
+        </pc:sldMkLst>
+        <pc:spChg chg="mod">
+          <ac:chgData name="Leitritz, D.M. (David)" userId="60b9eceb-a469-4de4-87a6-6cc3586f531e" providerId="ADAL" clId="{F802D518-D6D8-44E1-B28A-1D8EC97FA3CE}" dt="2026-06-18T22:17:37.677" v="1211" actId="20577"/>
+          <ac:spMkLst>
+            <pc:docMk/>
+            <pc:sldMk cId="2101214258" sldId="273"/>
+            <ac:spMk id="4" creationId="{767C297B-838B-CB80-2B03-A226C293C573}"/>
+          </ac:spMkLst>
+        </pc:spChg>
+      </pc:sldChg>
+      <pc:sldChg chg="modSp mod">
+        <pc:chgData name="Leitritz, D.M. (David)" userId="60b9eceb-a469-4de4-87a6-6cc3586f531e" providerId="ADAL" clId="{F802D518-D6D8-44E1-B28A-1D8EC97FA3CE}" dt="2026-06-18T22:20:22.726" v="1664" actId="20577"/>
+        <pc:sldMkLst>
+          <pc:docMk/>
+          <pc:sldMk cId="2794840623" sldId="274"/>
+        </pc:sldMkLst>
+        <pc:spChg chg="mod">
+          <ac:chgData name="Leitritz, D.M. (David)" userId="60b9eceb-a469-4de4-87a6-6cc3586f531e" providerId="ADAL" clId="{F802D518-D6D8-44E1-B28A-1D8EC97FA3CE}" dt="2026-06-18T22:20:22.726" v="1664" actId="20577"/>
+          <ac:spMkLst>
+            <pc:docMk/>
+            <pc:sldMk cId="2794840623" sldId="274"/>
+            <ac:spMk id="3" creationId="{7549A113-3E64-19D2-7CA4-DFC57AC685DC}"/>
+          </ac:spMkLst>
+        </pc:spChg>
+      </pc:sldChg>
+      <pc:sldChg chg="addSp delSp modSp new mod">
+        <pc:chgData name="Leitritz, D.M. (David)" userId="60b9eceb-a469-4de4-87a6-6cc3586f531e" providerId="ADAL" clId="{F802D518-D6D8-44E1-B28A-1D8EC97FA3CE}" dt="2026-06-18T22:16:28.701" v="1027" actId="1076"/>
+        <pc:sldMkLst>
+          <pc:docMk/>
+          <pc:sldMk cId="3718312078" sldId="277"/>
+        </pc:sldMkLst>
+        <pc:spChg chg="mod">
+          <ac:chgData name="Leitritz, D.M. (David)" userId="60b9eceb-a469-4de4-87a6-6cc3586f531e" providerId="ADAL" clId="{F802D518-D6D8-44E1-B28A-1D8EC97FA3CE}" dt="2026-06-18T22:16:28.701" v="1027" actId="1076"/>
+          <ac:spMkLst>
+            <pc:docMk/>
+            <pc:sldMk cId="3718312078" sldId="277"/>
+            <ac:spMk id="2" creationId="{40FE11B9-140C-8FBF-9545-2EBDAD4C8254}"/>
+          </ac:spMkLst>
+        </pc:spChg>
+        <pc:spChg chg="del">
+          <ac:chgData name="Leitritz, D.M. (David)" userId="60b9eceb-a469-4de4-87a6-6cc3586f531e" providerId="ADAL" clId="{F802D518-D6D8-44E1-B28A-1D8EC97FA3CE}" dt="2026-06-18T22:15:44.637" v="992"/>
+          <ac:spMkLst>
+            <pc:docMk/>
+            <pc:sldMk cId="3718312078" sldId="277"/>
+            <ac:spMk id="3" creationId="{B8E6D5D1-CFC8-3CF0-FBE9-404A77F563F5}"/>
+          </ac:spMkLst>
+        </pc:spChg>
+        <pc:picChg chg="add mod ord">
+          <ac:chgData name="Leitritz, D.M. (David)" userId="60b9eceb-a469-4de4-87a6-6cc3586f531e" providerId="ADAL" clId="{F802D518-D6D8-44E1-B28A-1D8EC97FA3CE}" dt="2026-06-18T22:16:01.174" v="1000" actId="1076"/>
+          <ac:picMkLst>
+            <pc:docMk/>
+            <pc:sldMk cId="3718312078" sldId="277"/>
+            <ac:picMk id="5" creationId="{2F712797-FF66-E6DC-B2EE-931395D423F5}"/>
+          </ac:picMkLst>
+        </pc:picChg>
+      </pc:sldChg>
+    </pc:docChg>
+  </pc:docChgLst>
+</pc:chgInfo>
+</file>
+
 <file path=ppt/notesMasters/notesMaster1.xml><?xml version="1.0" encoding="utf-8"?>
 <p:notesMaster xmlns:a="http://schemas.openxmlformats.org/drawingml/2006/main" xmlns:r="http://schemas.openxmlformats.org/officeDocument/2006/relationships" xmlns:p="http://schemas.openxmlformats.org/presentationml/2006/main">
   <p:cSld>
@@ -214,7 +381,7 @@
           <a:p>
             <a:fld id="{8231C51D-D7C2-44A5-85D3-69E93A6C6FFA}" type="datetimeFigureOut">
               <a:rPr lang="en-NL" smtClean="0"/>
-              <a:t>6/18/26</a:t>
+              <a:t>19/06/2026</a:t>
             </a:fld>
             <a:endParaRPr lang="en-NL"/>
           </a:p>
@@ -720,7 +887,7 @@
           <a:p>
             <a:fld id="{82EDB8D0-98ED-4B86-9D5F-E61ADC70144D}" type="datetimeFigureOut">
               <a:rPr lang="en-US" smtClean="0"/>
-              <a:t>6/18/26</a:t>
+              <a:t>6/19/2026</a:t>
             </a:fld>
             <a:endParaRPr lang="en-US" dirty="0"/>
           </a:p>
@@ -1135,7 +1302,7 @@
           <a:p>
             <a:fld id="{82EDB8D0-98ED-4B86-9D5F-E61ADC70144D}" type="datetimeFigureOut">
               <a:rPr lang="en-US" smtClean="0"/>
-              <a:t>6/18/26</a:t>
+              <a:t>6/19/2026</a:t>
             </a:fld>
             <a:endParaRPr lang="en-US"/>
           </a:p>
@@ -1627,7 +1794,7 @@
           <a:p>
             <a:fld id="{82EDB8D0-98ED-4B86-9D5F-E61ADC70144D}" type="datetimeFigureOut">
               <a:rPr lang="en-US" smtClean="0"/>
-              <a:t>6/18/26</a:t>
+              <a:t>6/19/2026</a:t>
             </a:fld>
             <a:endParaRPr lang="en-US"/>
           </a:p>
@@ -2114,7 +2281,7 @@
           <a:p>
             <a:fld id="{82EDB8D0-98ED-4B86-9D5F-E61ADC70144D}" type="datetimeFigureOut">
               <a:rPr lang="en-US" smtClean="0"/>
-              <a:t>6/18/26</a:t>
+              <a:t>6/19/2026</a:t>
             </a:fld>
             <a:endParaRPr lang="en-US" dirty="0"/>
           </a:p>
@@ -2883,7 +3050,7 @@
           <a:p>
             <a:fld id="{82EDB8D0-98ED-4B86-9D5F-E61ADC70144D}" type="datetimeFigureOut">
               <a:rPr lang="en-US" smtClean="0"/>
-              <a:t>6/18/26</a:t>
+              <a:t>6/19/2026</a:t>
             </a:fld>
             <a:endParaRPr lang="en-US"/>
           </a:p>
@@ -3365,7 +3532,7 @@
           <a:p>
             <a:fld id="{82EDB8D0-98ED-4B86-9D5F-E61ADC70144D}" type="datetimeFigureOut">
               <a:rPr lang="en-US" smtClean="0"/>
-              <a:t>6/18/26</a:t>
+              <a:t>6/19/2026</a:t>
             </a:fld>
             <a:endParaRPr lang="en-US"/>
           </a:p>
@@ -4061,7 +4228,7 @@
           <a:p>
             <a:fld id="{82EDB8D0-98ED-4B86-9D5F-E61ADC70144D}" type="datetimeFigureOut">
               <a:rPr lang="en-US" smtClean="0"/>
-              <a:t>6/18/26</a:t>
+              <a:t>6/19/2026</a:t>
             </a:fld>
             <a:endParaRPr lang="en-US"/>
           </a:p>
@@ -4486,7 +4653,7 @@
           <a:p>
             <a:fld id="{82EDB8D0-98ED-4B86-9D5F-E61ADC70144D}" type="datetimeFigureOut">
               <a:rPr lang="en-US" smtClean="0"/>
-              <a:t>6/18/26</a:t>
+              <a:t>6/19/2026</a:t>
             </a:fld>
             <a:endParaRPr lang="en-US"/>
           </a:p>
@@ -4883,7 +5050,7 @@
           <a:p>
             <a:fld id="{82EDB8D0-98ED-4B86-9D5F-E61ADC70144D}" type="datetimeFigureOut">
               <a:rPr lang="en-US" smtClean="0"/>
-              <a:t>6/18/26</a:t>
+              <a:t>6/19/2026</a:t>
             </a:fld>
             <a:endParaRPr lang="en-US"/>
           </a:p>
@@ -5478,7 +5645,7 @@
           <a:p>
             <a:fld id="{82EDB8D0-98ED-4B86-9D5F-E61ADC70144D}" type="datetimeFigureOut">
               <a:rPr lang="en-US" smtClean="0"/>
-              <a:t>6/18/26</a:t>
+              <a:t>6/19/2026</a:t>
             </a:fld>
             <a:endParaRPr lang="en-US"/>
           </a:p>
@@ -6053,7 +6220,7 @@
           <a:p>
             <a:fld id="{82EDB8D0-98ED-4B86-9D5F-E61ADC70144D}" type="datetimeFigureOut">
               <a:rPr lang="en-US" smtClean="0"/>
-              <a:t>6/18/26</a:t>
+              <a:t>6/19/2026</a:t>
             </a:fld>
             <a:endParaRPr lang="en-US"/>
           </a:p>
@@ -6580,7 +6747,7 @@
             <a:fld id="{82EDB8D0-98ED-4B86-9D5F-E61ADC70144D}" type="datetimeFigureOut">
               <a:rPr lang="en-US" smtClean="0"/>
               <a:pPr/>
-              <a:t>6/18/26</a:t>
+              <a:t>6/19/2026</a:t>
             </a:fld>
             <a:endParaRPr lang="en-US" dirty="0"/>
           </a:p>
@@ -7938,9 +8105,61 @@
           <a:p>
             <a:r>
               <a:rPr lang="en-US" dirty="0"/>
-              <a:t>METHOD AND APPROACH</a:t>
-            </a:r>
-            <a:endParaRPr lang="ru-RU" dirty="0"/>
+              <a:t>ML modelling: Predicting “Official” livability scores from 2024 on PC4 level</a:t>
+            </a:r>
+          </a:p>
+          <a:p>
+            <a:r>
+              <a:rPr lang="en-US" dirty="0"/>
+              <a:t>2 Datasets: </a:t>
+            </a:r>
+          </a:p>
+          <a:p>
+            <a:pPr marL="457200" indent="-457200">
+              <a:buFont typeface="Arial" panose="020B0604020202020204" pitchFamily="34" charset="0"/>
+              <a:buAutoNum type="arabicParenR"/>
+            </a:pPr>
+            <a:r>
+              <a:rPr lang="en-US" dirty="0"/>
+              <a:t>Objective predictors (EXPOSOME + admin + </a:t>
+            </a:r>
+            <a:r>
+              <a:rPr lang="en-US" dirty="0" err="1"/>
+              <a:t>InnovatieSpotter</a:t>
+            </a:r>
+            <a:r>
+              <a:rPr lang="en-US" dirty="0"/>
+              <a:t>)</a:t>
+            </a:r>
+          </a:p>
+          <a:p>
+            <a:pPr marL="0" indent="0">
+              <a:buNone/>
+            </a:pPr>
+            <a:r>
+              <a:rPr lang="en-US" b="1" dirty="0"/>
+              <a:t>70 variables, 4,056 PC4</a:t>
+            </a:r>
+            <a:endParaRPr lang="en-US" dirty="0"/>
+          </a:p>
+          <a:p>
+            <a:pPr marL="457200" indent="-457200">
+              <a:buAutoNum type="arabicParenR" startAt="2"/>
+            </a:pPr>
+            <a:r>
+              <a:rPr lang="en-US" dirty="0"/>
+              <a:t>Subjective predictors (LISS panel)</a:t>
+            </a:r>
+          </a:p>
+          <a:p>
+            <a:pPr marL="0" indent="0">
+              <a:buNone/>
+            </a:pPr>
+            <a:r>
+              <a:rPr lang="en-US" b="1" dirty="0"/>
+              <a:t>83 variables, 1,900 PC4</a:t>
+            </a:r>
+            <a:endParaRPr lang="ru-RU" b="1" dirty="0"/>
           </a:p>
         </p:txBody>
       </p:sp>
@@ -8038,8 +8257,74 @@
           <a:p>
             <a:r>
               <a:rPr lang="en-US" dirty="0"/>
-              <a:t>METHOD AND APPROACH</a:t>
-            </a:r>
+              <a:t>ML preprocessing:</a:t>
+            </a:r>
+          </a:p>
+          <a:p>
+            <a:pPr lvl="1"/>
+            <a:r>
+              <a:rPr lang="en-US" dirty="0" err="1"/>
+              <a:t>Nzv</a:t>
+            </a:r>
+            <a:r>
+              <a:rPr lang="en-US" dirty="0"/>
+              <a:t> removal</a:t>
+            </a:r>
+          </a:p>
+          <a:p>
+            <a:pPr lvl="1"/>
+            <a:r>
+              <a:rPr lang="en-US" dirty="0"/>
+              <a:t>High-correlation removal</a:t>
+            </a:r>
+          </a:p>
+          <a:p>
+            <a:pPr lvl="1"/>
+            <a:r>
+              <a:rPr lang="en-US" dirty="0"/>
+              <a:t>Median imputation</a:t>
+            </a:r>
+          </a:p>
+          <a:p>
+            <a:pPr lvl="1"/>
+            <a:r>
+              <a:rPr lang="en-US" dirty="0"/>
+              <a:t>Train-test split (80-20)</a:t>
+            </a:r>
+          </a:p>
+          <a:p>
+            <a:pPr lvl="1"/>
+            <a:endParaRPr lang="en-US" dirty="0"/>
+          </a:p>
+          <a:p>
+            <a:r>
+              <a:rPr lang="en-US" dirty="0"/>
+              <a:t>ML training</a:t>
+            </a:r>
+          </a:p>
+          <a:p>
+            <a:pPr lvl="1"/>
+            <a:r>
+              <a:rPr lang="en-US" dirty="0"/>
+              <a:t>5-fold CV</a:t>
+            </a:r>
+          </a:p>
+          <a:p>
+            <a:pPr lvl="1"/>
+            <a:r>
+              <a:rPr lang="en-US" dirty="0"/>
+              <a:t>Hyperparameter tuning</a:t>
+            </a:r>
+          </a:p>
+          <a:p>
+            <a:pPr lvl="1"/>
+            <a:r>
+              <a:rPr lang="en-US" dirty="0"/>
+              <a:t>2 models (Elastic Net &amp; Random forest)</a:t>
+            </a:r>
+          </a:p>
+          <a:p>
+            <a:pPr lvl="1"/>
             <a:endParaRPr lang="ru-RU" dirty="0"/>
           </a:p>
         </p:txBody>
@@ -8131,20 +8416,46 @@
           <a:lstStyle/>
           <a:p>
             <a:r>
-              <a:rPr lang="en-US" dirty="0"/>
-              <a:t>OVERVIEW OF RESULTS</a:t>
-            </a:r>
-          </a:p>
-          <a:p>
-            <a:r>
-              <a:rPr lang="en-US" dirty="0"/>
-              <a:t>VISUALIZATIONS</a:t>
-            </a:r>
-          </a:p>
-          <a:p>
-            <a:r>
-              <a:rPr lang="en-US" dirty="0"/>
-              <a:t>REMARKS</a:t>
+              <a:rPr lang="en-GB" dirty="0"/>
+              <a:t>Best performing model: </a:t>
+            </a:r>
+            <a:r>
+              <a:rPr lang="en-GB" b="1" dirty="0"/>
+              <a:t>Objective predictors, random forest</a:t>
+            </a:r>
+          </a:p>
+          <a:p>
+            <a:pPr lvl="1"/>
+            <a:r>
+              <a:rPr lang="en-GB" b="1" dirty="0"/>
+              <a:t>RMSE: 1.99 (train); 5.51 (test)</a:t>
+            </a:r>
+          </a:p>
+          <a:p>
+            <a:pPr lvl="1"/>
+            <a:r>
+              <a:rPr lang="en-GB" b="1" dirty="0"/>
+              <a:t>MAE: 1.43 (train); 4.02 (test)</a:t>
+            </a:r>
+          </a:p>
+          <a:p>
+            <a:pPr marL="0" indent="0">
+              <a:buNone/>
+            </a:pPr>
+            <a:endParaRPr lang="en-GB" dirty="0"/>
+          </a:p>
+          <a:p>
+            <a:r>
+              <a:rPr lang="en-GB" dirty="0"/>
+              <a:t>Visualization of differences predicted vs. actual </a:t>
+            </a:r>
+            <a:r>
+              <a:rPr lang="en-GB" dirty="0" err="1"/>
+              <a:t>livability</a:t>
+            </a:r>
+            <a:r>
+              <a:rPr lang="en-GB" dirty="0"/>
+              <a:t> on Shiny dashboard</a:t>
             </a:r>
             <a:endParaRPr lang="en-NL" dirty="0"/>
           </a:p>
@@ -8164,6 +8475,110 @@
 </file>
 
 <file path=ppt/slides/slide13.xml><?xml version="1.0" encoding="utf-8"?>
+<p:sld xmlns:a="http://schemas.openxmlformats.org/drawingml/2006/main" xmlns:r="http://schemas.openxmlformats.org/officeDocument/2006/relationships" xmlns:p="http://schemas.openxmlformats.org/presentationml/2006/main">
+  <p:cSld>
+    <p:spTree>
+      <p:nvGrpSpPr>
+        <p:cNvPr id="1" name=""/>
+        <p:cNvGrpSpPr/>
+        <p:nvPr/>
+      </p:nvGrpSpPr>
+      <p:grpSpPr>
+        <a:xfrm>
+          <a:off x="0" y="0"/>
+          <a:ext cx="0" cy="0"/>
+          <a:chOff x="0" y="0"/>
+          <a:chExt cx="0" cy="0"/>
+        </a:xfrm>
+      </p:grpSpPr>
+      <p:sp>
+        <p:nvSpPr>
+          <p:cNvPr id="2" name="Title 1">
+            <a:extLst>
+              <a:ext uri="{FF2B5EF4-FFF2-40B4-BE49-F238E27FC236}">
+                <a16:creationId xmlns:a16="http://schemas.microsoft.com/office/drawing/2014/main" id="{40FE11B9-140C-8FBF-9545-2EBDAD4C8254}"/>
+              </a:ext>
+            </a:extLst>
+          </p:cNvPr>
+          <p:cNvSpPr>
+            <a:spLocks noGrp="1"/>
+          </p:cNvSpPr>
+          <p:nvPr>
+            <p:ph type="title"/>
+          </p:nvPr>
+        </p:nvSpPr>
+        <p:spPr>
+          <a:xfrm>
+            <a:off x="8113363" y="2906848"/>
+            <a:ext cx="3022170" cy="603519"/>
+          </a:xfrm>
+        </p:spPr>
+        <p:txBody>
+          <a:bodyPr>
+            <a:noAutofit/>
+          </a:bodyPr>
+          <a:lstStyle/>
+          <a:p>
+            <a:r>
+              <a:rPr lang="en-GB" sz="2000" dirty="0"/>
+              <a:t>RMSE per model</a:t>
+            </a:r>
+            <a:endParaRPr lang="en-NL" sz="2000" dirty="0"/>
+          </a:p>
+        </p:txBody>
+      </p:sp>
+      <p:pic>
+        <p:nvPicPr>
+          <p:cNvPr id="5" name="Content Placeholder 4">
+            <a:extLst>
+              <a:ext uri="{FF2B5EF4-FFF2-40B4-BE49-F238E27FC236}">
+                <a16:creationId xmlns:a16="http://schemas.microsoft.com/office/drawing/2014/main" id="{2F712797-FF66-E6DC-B2EE-931395D423F5}"/>
+              </a:ext>
+            </a:extLst>
+          </p:cNvPr>
+          <p:cNvPicPr>
+            <a:picLocks noGrp="1" noChangeAspect="1"/>
+          </p:cNvPicPr>
+          <p:nvPr>
+            <p:ph idx="1"/>
+          </p:nvPr>
+        </p:nvPicPr>
+        <p:blipFill>
+          <a:blip r:embed="rId2">
+            <a:extLst>
+              <a:ext uri="{28A0092B-C50C-407E-A947-70E740481C1C}">
+                <a14:useLocalDpi xmlns:a14="http://schemas.microsoft.com/office/drawing/2010/main" val="0"/>
+              </a:ext>
+            </a:extLst>
+          </a:blip>
+          <a:stretch>
+            <a:fillRect/>
+          </a:stretch>
+        </p:blipFill>
+        <p:spPr>
+          <a:xfrm>
+            <a:off x="449452" y="89116"/>
+            <a:ext cx="6679768" cy="6679768"/>
+          </a:xfrm>
+          <a:prstGeom prst="rect">
+            <a:avLst/>
+          </a:prstGeom>
+        </p:spPr>
+      </p:pic>
+    </p:spTree>
+    <p:extLst>
+      <p:ext uri="{BB962C8B-B14F-4D97-AF65-F5344CB8AC3E}">
+        <p14:creationId xmlns:p14="http://schemas.microsoft.com/office/powerpoint/2010/main" val="3718312078"/>
+      </p:ext>
+    </p:extLst>
+  </p:cSld>
+  <p:clrMapOvr>
+    <a:masterClrMapping/>
+  </p:clrMapOvr>
+</p:sld>
+</file>
+
+<file path=ppt/slides/slide14.xml><?xml version="1.0" encoding="utf-8"?>
 <p:sld xmlns:a="http://schemas.openxmlformats.org/drawingml/2006/main" xmlns:r="http://schemas.openxmlformats.org/officeDocument/2006/relationships" xmlns:p="http://schemas.openxmlformats.org/presentationml/2006/main">
   <p:cSld>
     <p:spTree>
@@ -8264,7 +8679,7 @@
         <p:spPr>
           <a:xfrm>
             <a:off x="838200" y="1825625"/>
-            <a:ext cx="10089995" cy="1477328"/>
+            <a:ext cx="10089995" cy="2585323"/>
           </a:xfrm>
           <a:prstGeom prst="rect">
             <a:avLst/>
@@ -8288,6 +8703,15 @@
           <a:p>
             <a:r>
               <a:rPr lang="en-US" dirty="0"/>
+              <a:t>Predictions not far off from the “official scores” despite limited data</a:t>
+            </a:r>
+          </a:p>
+          <a:p>
+            <a:endParaRPr lang="en-US" dirty="0"/>
+          </a:p>
+          <a:p>
+            <a:r>
+              <a:rPr lang="en-US" dirty="0"/>
               <a:t>Good design of the government model</a:t>
             </a:r>
           </a:p>
@@ -8296,9 +8720,12 @@
           </a:p>
           <a:p>
             <a:r>
-              <a:rPr lang="en-US" dirty="0"/>
-              <a:t>Replicable</a:t>
-            </a:r>
+              <a:rPr lang="en-US" b="1" dirty="0"/>
+              <a:t>Strength: Pipeline can be used to conduct further validation of scores with more (diverse) input data</a:t>
+            </a:r>
+          </a:p>
+          <a:p>
+            <a:endParaRPr lang="en-US" dirty="0"/>
           </a:p>
         </p:txBody>
       </p:sp>
@@ -8315,7 +8742,7 @@
 </p:sld>
 </file>
 
-<file path=ppt/slides/slide14.xml><?xml version="1.0" encoding="utf-8"?>
+<file path=ppt/slides/slide15.xml><?xml version="1.0" encoding="utf-8"?>
 <p:sld xmlns:a="http://schemas.openxmlformats.org/drawingml/2006/main" xmlns:r="http://schemas.openxmlformats.org/officeDocument/2006/relationships" xmlns:p="http://schemas.openxmlformats.org/presentationml/2006/main">
   <p:cSld>
     <p:spTree>
@@ -8392,25 +8819,51 @@
         <p:spPr/>
         <p:txBody>
           <a:bodyPr>
-            <a:normAutofit/>
+            <a:normAutofit fontScale="92500"/>
           </a:bodyPr>
           <a:lstStyle/>
           <a:p>
             <a:r>
               <a:rPr lang="en-GB" dirty="0"/>
-              <a:t>Limited to available variables and years in admin data (LISS, Exposome)</a:t>
-            </a:r>
-          </a:p>
-          <a:p>
+              <a:t>Limited to available variables and years in admin data (LISS, Exposome, </a:t>
+            </a:r>
+            <a:r>
+              <a:rPr lang="en-GB" dirty="0" err="1"/>
+              <a:t>InnovatieSpotter</a:t>
+            </a:r>
             <a:r>
               <a:rPr lang="en-GB" dirty="0"/>
-              <a:t>Smaller sample size in LISS, especially when aggregating per PS4 (often less than 10 people per neighbourhood)</a:t>
+              <a:t>)</a:t>
             </a:r>
           </a:p>
           <a:p>
             <a:r>
               <a:rPr lang="en-GB" dirty="0"/>
-              <a:t>Approximating measures for livability dimensions based on our own interpretation due to lack of metadata documentation for livability score</a:t>
+              <a:t>Smaller sample size in LISS, especially when aggregating per PC4 (often less than 10 people per neighbourhood, less available PC4s)</a:t>
+            </a:r>
+          </a:p>
+          <a:p>
+            <a:r>
+              <a:rPr lang="en-GB" dirty="0"/>
+              <a:t>Approximating measures for livability dimensions based on our own interpretation due to lack of metadata documentation for </a:t>
+            </a:r>
+            <a:r>
+              <a:rPr lang="en-GB" dirty="0" err="1"/>
+              <a:t>livability</a:t>
+            </a:r>
+            <a:r>
+              <a:rPr lang="en-GB" dirty="0"/>
+              <a:t> score</a:t>
+            </a:r>
+          </a:p>
+          <a:p>
+            <a:r>
+              <a:rPr lang="en-GB" dirty="0" err="1"/>
+              <a:t>InnovatieSpotter</a:t>
+            </a:r>
+            <a:r>
+              <a:rPr lang="en-GB" dirty="0"/>
+              <a:t> indicators created very ad hoc (lacking theoretical foundation)</a:t>
             </a:r>
           </a:p>
           <a:p>
@@ -8446,7 +8899,7 @@
 </p:sld>
 </file>
 
-<file path=ppt/slides/slide15.xml><?xml version="1.0" encoding="utf-8"?>
+<file path=ppt/slides/slide16.xml><?xml version="1.0" encoding="utf-8"?>
 <p:sld xmlns:a="http://schemas.openxmlformats.org/drawingml/2006/main" xmlns:r="http://schemas.openxmlformats.org/officeDocument/2006/relationships" xmlns:p="http://schemas.openxmlformats.org/presentationml/2006/main">
   <p:cSld>
     <p:spTree>
@@ -8525,9 +8978,30 @@
           <a:bodyPr/>
           <a:lstStyle/>
           <a:p>
-            <a:pPr marL="0" indent="0">
-              <a:buNone/>
-            </a:pPr>
+            <a:r>
+              <a:rPr lang="en-US" dirty="0"/>
+              <a:t>Feature importances of ML models: Which variables drive predictions of livability?</a:t>
+            </a:r>
+          </a:p>
+          <a:p>
+            <a:r>
+              <a:rPr lang="en-US" dirty="0"/>
+              <a:t>Feed more diverse data into pipeline (E.g. from GECCO consortium (neighborhood), CBS (administrative statistics)</a:t>
+            </a:r>
+          </a:p>
+          <a:p>
+            <a:r>
+              <a:rPr lang="en-US" dirty="0"/>
+              <a:t>Predict sub-dimensions of livability scores?</a:t>
+            </a:r>
+          </a:p>
+          <a:p>
+            <a:r>
+              <a:rPr lang="en-US" dirty="0"/>
+              <a:t>Weights?</a:t>
+            </a:r>
+          </a:p>
+          <a:p>
             <a:endParaRPr lang="en-US" dirty="0"/>
           </a:p>
         </p:txBody>
@@ -8545,7 +9019,7 @@
 </p:sld>
 </file>
 
-<file path=ppt/slides/slide16.xml><?xml version="1.0" encoding="utf-8"?>
+<file path=ppt/slides/slide17.xml><?xml version="1.0" encoding="utf-8"?>
 <p:sld xmlns:a="http://schemas.openxmlformats.org/drawingml/2006/main" xmlns:r="http://schemas.openxmlformats.org/officeDocument/2006/relationships" xmlns:p="http://schemas.openxmlformats.org/presentationml/2006/main">
   <p:cSld>
     <p:spTree>
@@ -8703,7 +9177,7 @@
 </p:sld>
 </file>
 
-<file path=ppt/slides/slide17.xml><?xml version="1.0" encoding="utf-8"?>
+<file path=ppt/slides/slide18.xml><?xml version="1.0" encoding="utf-8"?>
 <p:sld xmlns:a="http://schemas.openxmlformats.org/drawingml/2006/main" xmlns:r="http://schemas.openxmlformats.org/officeDocument/2006/relationships" xmlns:p="http://schemas.openxmlformats.org/presentationml/2006/main">
   <p:cSld>
     <p:spTree>
@@ -8808,7 +9282,7 @@
 </p:sld>
 </file>
 
-<file path=ppt/slides/slide18.xml><?xml version="1.0" encoding="utf-8"?>
+<file path=ppt/slides/slide19.xml><?xml version="1.0" encoding="utf-8"?>
 <p:sld xmlns:a="http://schemas.openxmlformats.org/drawingml/2006/main" xmlns:r="http://schemas.openxmlformats.org/officeDocument/2006/relationships" xmlns:p="http://schemas.openxmlformats.org/presentationml/2006/main">
   <p:cSld>
     <p:spTree>
@@ -13105,7 +13579,7 @@
         <p:spPr>
           <a:xfrm>
             <a:off x="3903260" y="3603009"/>
-            <a:ext cx="3234519" cy="1477328"/>
+            <a:ext cx="3234519" cy="2308324"/>
           </a:xfrm>
           <a:prstGeom prst="rect">
             <a:avLst/>
@@ -13154,7 +13628,17 @@
             </a:pPr>
             <a:r>
               <a:rPr lang="en-US" dirty="0"/>
-              <a:t>Urbanist city 2015</a:t>
+              <a:t>Urbanicity 2015</a:t>
+            </a:r>
+          </a:p>
+          <a:p>
+            <a:pPr marL="285750" indent="-285750">
+              <a:buFontTx/>
+              <a:buChar char="-"/>
+            </a:pPr>
+            <a:r>
+              <a:rPr lang="en-US" dirty="0"/>
+              <a:t>Administrative-demographic data on PC6 level (2025)</a:t>
             </a:r>
           </a:p>
         </p:txBody>
@@ -13174,7 +13658,7 @@
         <p:spPr>
           <a:xfrm>
             <a:off x="7970761" y="3603009"/>
-            <a:ext cx="2770027" cy="369332"/>
+            <a:ext cx="2770027" cy="2031325"/>
           </a:xfrm>
           <a:prstGeom prst="rect">
             <a:avLst/>
@@ -13191,7 +13675,24 @@
               <a:rPr lang="en-US" dirty="0" err="1"/>
               <a:t>Firmbackbone</a:t>
             </a:r>
+            <a:r>
+              <a:rPr lang="en-US" dirty="0"/>
+              <a:t> – </a:t>
+            </a:r>
+            <a:r>
+              <a:rPr lang="en-US" dirty="0" err="1"/>
+              <a:t>InnovatieSpotter</a:t>
+            </a:r>
             <a:endParaRPr lang="en-US" dirty="0"/>
+          </a:p>
+          <a:p>
+            <a:endParaRPr lang="en-US" dirty="0"/>
+          </a:p>
+          <a:p>
+            <a:r>
+              <a:rPr lang="en-US" dirty="0"/>
+              <a:t>Aggregated indicators of innovative economic activities on PC4 level (Q1 2026)</a:t>
+            </a:r>
           </a:p>
         </p:txBody>
       </p:sp>
